--- a/talks/whats-stopping-us-from-building-great-products-and-monetizing-them/whats-stopping-us-from-building-great-products-and-monetizing-them.pptx
+++ b/talks/whats-stopping-us-from-building-great-products-and-monetizing-them/whats-stopping-us-from-building-great-products-and-monetizing-them.pptx
@@ -25,6 +25,11 @@
     <p:sldId id="273" r:id="rId24"/>
     <p:sldId id="274" r:id="rId25"/>
     <p:sldId id="275" r:id="rId26"/>
+    <p:sldId id="276" r:id="rId27"/>
+    <p:sldId id="277" r:id="rId28"/>
+    <p:sldId id="278" r:id="rId29"/>
+    <p:sldId id="279" r:id="rId30"/>
+    <p:sldId id="280" r:id="rId31"/>
   </p:sldIdLst>
   <p:sldSz cx="12191695" cy="6858000" type="screen4x3"/>
   <p:notesSz cx="6858000" cy="9144000"/>
@@ -601,17 +606,57 @@
           <a:lstStyle/>
           <a:p>
             <a:r>
-              <a:t>Tanglish: Oru price. Oru checkout. Adhu dhaan payment.</a:t>
-            </a:r>
-          </a:p>
-          <a:p>
-            <a:r>
-              <a:t>Prices are examples. Razorpay: https://razorpay.com/docs/</a:t>
-            </a:r>
-          </a:p>
-          <a:p>
-            <a:r>
-              <a:t>Stripe where available. Crowdfunding is not guaranteed funding.</a:t>
+              <a:t>Tanglish: Checkout-ku anju peru. Ella provider-um venam.</a:t>
+            </a:r>
+          </a:p>
+          <a:p>
+            <a:r>
+              <a:t>Razorpay: https://razorpay.com/docs/</a:t>
+            </a:r>
+          </a:p>
+          <a:p>
+            <a:r>
+              <a:t>Stripe where available: https://docs.stripe.com/</a:t>
+            </a:r>
+          </a:p>
+          <a:p>
+            <a:r>
+              <a:t>RevenueCat is mobile subscriptions. https://www.revenuecat.com/</a:t>
+            </a:r>
+          </a:p>
+          <a:p>
+            <a:r>
+              <a:t>Google Pay: wallet checkout, including UPI in India. https://developers.google.com/pay</a:t>
+            </a:r>
+          </a:p>
+          <a:p>
+            <a:r>
+              <a:t>Apple Pay: wallet checkout where Apple Pay is available. https://developer.apple.com/apple-pay/</a:t>
+            </a:r>
+          </a:p>
+          <a:p>
+            <a:r>
+              <a:t>None of the five is required.</a:t>
+            </a:r>
+          </a:p>
+          <a:p>
+            <a:r>
+              <a:t>Notes only: a store app bills through Google Play Billing and the App Store. RevenueCat can sit on those.</a:t>
+            </a:r>
+          </a:p>
+          <a:p>
+            <a:r>
+              <a:t>https://developer.android.com/google/play/billing</a:t>
+            </a:r>
+          </a:p>
+          <a:p>
+            <a:r>
+              <a:t>https://developer.apple.com/in-app-purchase/</a:t>
+            </a:r>
+          </a:p>
+          <a:p>
+            <a:r>
+              <a:t>Luma collaborator: https://luma.com/mprx0ocg</a:t>
             </a:r>
           </a:p>
         </p:txBody>
@@ -681,22 +726,17 @@
           <a:lstStyle/>
           <a:p>
             <a:r>
-              <a:t>Tanglish: Analytics-ku oru tool pothum. Ella logo-um venam.</a:t>
-            </a:r>
-          </a:p>
-          <a:p>
-            <a:r>
-              <a:t>PostHog: https://posthog.com/</a:t>
-            </a:r>
-          </a:p>
-          <a:p>
-            <a:r>
-              <a:t>Also name Plausible, Firebase Analytics, and Mixpanel, and say pick one.</a:t>
-            </a:r>
-          </a:p>
-          <a:p>
-            <a:r>
-              <a:t>Track visitors, activation, retention, paid conversion, churn.</a:t>
+              <a:t>Tanglish: Oru price. Oru checkout. Adhu dhaan payment.</a:t>
+            </a:r>
+          </a:p>
+          <a:p>
+            <a:r>
+              <a:t>Prices are examples. Razorpay: https://razorpay.com/docs/</a:t>
+            </a:r>
+          </a:p>
+          <a:p>
+            <a:r>
+              <a:t>Stripe where available. Crowdfunding is not guaranteed funding.</a:t>
             </a:r>
           </a:p>
         </p:txBody>
@@ -766,17 +806,52 @@
           <a:lstStyle/>
           <a:p>
             <a:r>
-              <a:t>Tanglish: Support-ku Discord pothum. Periya team venam.</a:t>
-            </a:r>
-          </a:p>
-          <a:p>
-            <a:r>
-              <a:t>Discord, email, or GitHub Discussions. Nobody needs a support org.</a:t>
-            </a:r>
-          </a:p>
-          <a:p>
-            <a:r>
-              <a:t>https://discord.com/</a:t>
+              <a:t>Tanglish: Analytics-ku oru tool pothum. Ella logo-um venam. Firebase-la Analytics, Crashlytics, Performance — most of these free.</a:t>
+            </a:r>
+          </a:p>
+          <a:p>
+            <a:r>
+              <a:t>PostHog: https://posthog.com/</a:t>
+            </a:r>
+          </a:p>
+          <a:p>
+            <a:r>
+              <a:t>Google Analytics: https://developers.google.com/analytics</a:t>
+            </a:r>
+          </a:p>
+          <a:p>
+            <a:r>
+              <a:t>Plausible: https://plausible.io/</a:t>
+            </a:r>
+          </a:p>
+          <a:p>
+            <a:r>
+              <a:t>Firebase Analytics: https://firebase.google.com/docs/analytics</a:t>
+            </a:r>
+          </a:p>
+          <a:p>
+            <a:r>
+              <a:t>Crashlytics: https://firebase.google.com/docs/crashlytics</a:t>
+            </a:r>
+          </a:p>
+          <a:p>
+            <a:r>
+              <a:t>Performance Monitoring: https://firebase.google.com/docs/perf-mon</a:t>
+            </a:r>
+          </a:p>
+          <a:p>
+            <a:r>
+              <a:t>Pick one. Track visitors, activation, retention, paid conversion, churn.</a:t>
+            </a:r>
+          </a:p>
+          <a:p>
+            <a:r>
+              <a:t>Most of these Firebase products are free. Official pricing lists Analytics, Crashlytics, Performance Monitoring, A/B Testing, Cloud Messaging, and Remote Config as no-cost, including production apps. Do not say all of Firebase is free. Firestore, Hosting, Storage, and Functions have quotas, then a bill. Firebase Analytics is Google Analytics for Firebase apps — both names stay.</a:t>
+            </a:r>
+          </a:p>
+          <a:p>
+            <a:r>
+              <a:t>https://firebase.google.com/pricing/</a:t>
             </a:r>
           </a:p>
         </p:txBody>
@@ -846,17 +921,62 @@
           <a:lstStyle/>
           <a:p>
             <a:r>
-              <a:t>Tanglish: Like count customer illa. Problem solve panna, people trust pannuvaanga.</a:t>
-            </a:r>
-          </a:p>
-          <a:p>
-            <a:r>
-              <a:t>The owner's DunSocial observation, spoken lightly: posts he saw had about 5 or 10 likes. The projected line is the lesson, not the number.</a:t>
-            </a:r>
-          </a:p>
-          <a:p>
-            <a:r>
-              <a:t>https://www.dunsocial.com/</a:t>
+              <a:t>Tanglish: Growth team-oda velai-nu theriyum. AI era-la neenga pick up panna mudiyum.</a:t>
+            </a:r>
+          </a:p>
+          <a:p>
+            <a:r>
+              <a:t>These used to look like a growth team's job. In the AI era you can pick them up.</a:t>
+            </a:r>
+          </a:p>
+          <a:p>
+            <a:r>
+              <a:t>Ads: Google Ads, Meta ads, Apple Search Ads. Ads cost money.</a:t>
+            </a:r>
+          </a:p>
+          <a:p>
+            <a:r>
+              <a:t>https://ads.google.com/</a:t>
+            </a:r>
+          </a:p>
+          <a:p>
+            <a:r>
+              <a:t>https://www.facebook.com/business/ads</a:t>
+            </a:r>
+          </a:p>
+          <a:p>
+            <a:r>
+              <a:t>https://ads.apple.com/</a:t>
+            </a:r>
+          </a:p>
+          <a:p>
+            <a:r>
+              <a:t>Experiments: PostHog experiments, GrowthBook, Firebase A/B Testing. A handful of users cannot prove a winner. AI can help write the test and read the result. It does not invent significance.</a:t>
+            </a:r>
+          </a:p>
+          <a:p>
+            <a:r>
+              <a:t>https://posthog.com/docs/experiments</a:t>
+            </a:r>
+          </a:p>
+          <a:p>
+            <a:r>
+              <a:t>https://www.growthbook.io/</a:t>
+            </a:r>
+          </a:p>
+          <a:p>
+            <a:r>
+              <a:t>https://firebase.google.com/docs/ab-testing</a:t>
+            </a:r>
+          </a:p>
+          <a:p>
+            <a:r>
+              <a:t>The stream: events you already track. A feature flag ships a variant. Keep the winner.</a:t>
+            </a:r>
+          </a:p>
+          <a:p>
+            <a:r>
+              <a:t>Do not name Google Optimize. Do not name Kafka.</a:t>
             </a:r>
           </a:p>
         </p:txBody>
@@ -926,27 +1046,17 @@
           <a:lstStyle/>
           <a:p>
             <a:r>
-              <a:t>Tanglish: Innoru feature kedayadhu. First paying customer dhaan matter. Simple-nu ninaichu GitHub-la vechutaanga.</a:t>
-            </a:r>
-          </a:p>
-          <a:p>
-            <a:r>
-              <a:t>Talk to customers. Show pricing early. Preorders. Paid pilot. Clear refund and delivery policy.</a:t>
-            </a:r>
-          </a:p>
-          <a:p>
-            <a:r>
-              <a:t>Validate demand. Smallest version someone will pay for. Turn the product into a business. Organic growth. An exit is possible later on https://acquire.com/</a:t>
-            </a:r>
-          </a:p>
-          <a:p>
-            <a:r>
-              <a:t>Prices are examples. Razorpay: https://razorpay.com/docs/</a:t>
-            </a:r>
-          </a:p>
-          <a:p>
-            <a:r>
-              <a:t>Stripe where available. Crowdfunding is not guaranteed funding.</a:t>
+              <a:t>Tanglish: Support-ku Discord pothum. Periya team venam.</a:t>
+            </a:r>
+          </a:p>
+          <a:p>
+            <a:r>
+              <a:t>Discord, email, or GitHub Discussions. Nobody needs a support org.</a:t>
+            </a:r>
+          </a:p>
+          <a:p>
+            <a:r>
+              <a:t>https://discord.com/</a:t>
             </a:r>
           </a:p>
         </p:txBody>
@@ -1016,32 +1126,17 @@
           <a:lstStyle/>
           <a:p>
             <a:r>
-              <a:t>Tanglish: Anju per ₹199 kudutha, almost thousand. Gross idhu — tax, fees illa. PMF illa, willingness to pay.</a:t>
-            </a:r>
-          </a:p>
-          <a:p>
-            <a:r>
-              <a:t>7-step path: painful problem → smallest useful solution → landing + pricing → payment method → share → measure → improve from behavior.</a:t>
-            </a:r>
-          </a:p>
-          <a:p>
-            <a:r>
-              <a:t>Loop: Launch → Analytics → Feedback → Improvements → Retention → Revenue.</a:t>
-            </a:r>
-          </a:p>
-          <a:p>
-            <a:r>
-              <a:t>PostHog, Firebase Analytics, Mixpanel, Plausible, Discord, GitHub Discussions, email, X, LinkedIn, Reddit, Product Hunt, YouTube, Instagram, SEO, Sentry, Crashlytics. Nobody needs every tool.</a:t>
-            </a:r>
-          </a:p>
-          <a:p>
-            <a:r>
-              <a:t>Payment is evidence someone will pay. It is not product-market fit.</a:t>
-            </a:r>
-          </a:p>
-          <a:p>
-            <a:r>
-              <a:t>https://razorpay.com/docs/</a:t>
+              <a:t>Tanglish: Like count customer illa. Problem solve panna, people trust pannuvaanga.</a:t>
+            </a:r>
+          </a:p>
+          <a:p>
+            <a:r>
+              <a:t>The owner's DunSocial observation, spoken lightly: posts he saw had about 5 or 10 likes. The projected line is the lesson, not the number.</a:t>
+            </a:r>
+          </a:p>
+          <a:p>
+            <a:r>
+              <a:t>https://www.dunsocial.com/</a:t>
             </a:r>
           </a:p>
         </p:txBody>
@@ -1111,22 +1206,27 @@
           <a:lstStyle/>
           <a:p>
             <a:r>
-              <a:t>Tanglish: Team venum-na team. Solo-va irundha, solo. Build anything. Ship something.</a:t>
-            </a:r>
-          </a:p>
-          <a:p>
-            <a:r>
-              <a:t>Individuals and teams. New ideas and existing products. Any stack. Any policy-compliant payment provider.</a:t>
-            </a:r>
-          </a:p>
-          <a:p>
-            <a:r>
-              <a:t>RevenueCat is a Luma collaborator, not a requirement. A workable way to charge counts. Big revenue during the event is not required.</a:t>
-            </a:r>
-          </a:p>
-          <a:p>
-            <a:r>
-              <a:t>https://luma.com/mprx0ocg</a:t>
+              <a:t>Tanglish: Innoru feature kedayadhu. First paying customer dhaan matter. Simple-nu ninaichu GitHub-la vechutaanga.</a:t>
+            </a:r>
+          </a:p>
+          <a:p>
+            <a:r>
+              <a:t>Talk to customers. Show pricing early. Preorders. Paid pilot. Clear refund and delivery policy.</a:t>
+            </a:r>
+          </a:p>
+          <a:p>
+            <a:r>
+              <a:t>Validate demand. Smallest version someone will pay for. Turn the product into a business. Organic growth. An exit is possible later on https://acquire.com/</a:t>
+            </a:r>
+          </a:p>
+          <a:p>
+            <a:r>
+              <a:t>Prices are examples. Razorpay: https://razorpay.com/docs/</a:t>
+            </a:r>
+          </a:p>
+          <a:p>
+            <a:r>
+              <a:t>Stripe where available. Crowdfunding is not guaranteed funding.</a:t>
             </a:r>
           </a:p>
         </p:txBody>
@@ -1196,22 +1296,27 @@
           <a:lstStyle/>
           <a:p>
             <a:r>
-              <a:t>Tanglish: Sheet-la fill pannunga. Review Ready-ku maathunga. Organizers dhaan paathu review pannuvaanga.</a:t>
-            </a:r>
-          </a:p>
-          <a:p>
-            <a:r>
-              <a:t>Sheet: https://docs.google.com/spreadsheets/d/1DZ7OSphlY8llxWisVc_FcLGeu9Psj_fvfxR2F7ohxcM/edit?usp=sharing</a:t>
-            </a:r>
-          </a:p>
-          <a:p>
-            <a:r>
-              <a:t>Columns: Product Name, Creator / Team, Product Category, Demo / Product URL, Repository URL, Monetization Model, Payment Integration, Deployment Status, Review Status, Production Ready by Thursday, Notes.</a:t>
-            </a:r>
-          </a:p>
-          <a:p>
-            <a:r>
-              <a:t>Workflow: fill the sheet, update URLs, the participant sets Review Status to Review Ready, organizers review. Review Ready is not approval.</a:t>
+              <a:t>Tanglish: Anju per ₹199 kudutha, almost thousand. Gross idhu — tax, fees illa. PMF illa, willingness to pay.</a:t>
+            </a:r>
+          </a:p>
+          <a:p>
+            <a:r>
+              <a:t>7-step path: painful problem → smallest useful solution → landing + pricing → payment method → share → measure → improve from behavior.</a:t>
+            </a:r>
+          </a:p>
+          <a:p>
+            <a:r>
+              <a:t>Loop: Launch → Analytics → Feedback → Improvements → Retention → Revenue.</a:t>
+            </a:r>
+          </a:p>
+          <a:p>
+            <a:r>
+              <a:t>Payment is evidence someone will pay. It is not product-market fit.</a:t>
+            </a:r>
+          </a:p>
+          <a:p>
+            <a:r>
+              <a:t>https://razorpay.com/docs/</a:t>
             </a:r>
           </a:p>
         </p:txBody>
@@ -1281,37 +1386,22 @@
           <a:lstStyle/>
           <a:p>
             <a:r>
-              <a:t>Tanglish: Thursday-kku live aaganum. Review Ready-na ‘paathu videoonga.’ Production Ready-na users use panna ready.</a:t>
-            </a:r>
-          </a:p>
-          <a:p>
-            <a:r>
-              <a:t>Say Thursday. Do not print a calendar date.</a:t>
-            </a:r>
-          </a:p>
-          <a:p>
-            <a:r>
-              <a:t>Production Ready by Thursday = deployed and usable. Review Ready = please review.</a:t>
-            </a:r>
-          </a:p>
-          <a:p>
-            <a:r>
-              <a:t>Checklist: production URL; core flow works; usable onboarding; no critical blockers; a clear way to charge; payment flow works when they charge; basic analytics or feedback; enough for organizers to test.</a:t>
-            </a:r>
-          </a:p>
-          <a:p>
-            <a:r>
-              <a:t>Extra DevFest prize eligibility, not an automatic win.</a:t>
+              <a:t>Tanglish: Team venum-na team. Solo-va irundha, solo. Build anything. Ship something.</a:t>
+            </a:r>
+          </a:p>
+          <a:p>
+            <a:r>
+              <a:t>Individuals and teams. New ideas and existing products. Any stack. Any policy-compliant payment provider.</a:t>
+            </a:r>
+          </a:p>
+          <a:p>
+            <a:r>
+              <a:t>RevenueCat is a Luma collaborator, not a requirement. A workable way to charge counts. Big revenue during the event is not required.</a:t>
             </a:r>
           </a:p>
           <a:p>
             <a:r>
               <a:t>https://luma.com/mprx0ocg</a:t>
-            </a:r>
-          </a:p>
-          <a:p>
-            <a:r>
-              <a:t>https://devfest.gdgchennai.in/</a:t>
             </a:r>
           </a:p>
         </p:txBody>
@@ -1381,42 +1471,22 @@
           <a:lstStyle/>
           <a:p>
             <a:r>
-              <a:t>Tanglish: Ship pannunga. Review aaganum. Ticket-na bonus — guarantee illa.</a:t>
-            </a:r>
-          </a:p>
-          <a:p>
-            <a:r>
-              <a:t>On the slide, attributed to Sam Altman: We're going to see 10 person billion-dollar companies pretty soon.</a:t>
-            </a:r>
-          </a:p>
-          <a:p>
-            <a:r>
-              <a:t>Fuller reported line: We're going to see 10-person companies with billion-dollar valuations pretty soon.</a:t>
-            </a:r>
-          </a:p>
-          <a:p>
-            <a:r>
-              <a:t>https://www.forbes.com/sites/michaelashley/2025/02/17/the-future-is-solo-ai-is-creating-billion-dollar-one-person-companies/</a:t>
-            </a:r>
-          </a:p>
-          <a:p>
-            <a:r>
-              <a:t>Organizers review. Selected winners get DevFest Chennai tickets. Prizes also at DevFest, Sat 17 Oct 2026, IITM Research Park. Thursday production-ready teams are considered for an additional prize — not a guarantee.</a:t>
-            </a:r>
-          </a:p>
-          <a:p>
-            <a:r>
-              <a:t>Judging themes only: usefulness, execution, UX, monetization potential, real deployment, learning. Do not invent amounts, winner counts, or weights.</a:t>
-            </a:r>
-          </a:p>
-          <a:p>
-            <a:r>
-              <a:t>Close: Don't just build another side project. Build something people can use, ship it to the world, and see if someone is willing to pay for it.</a:t>
-            </a:r>
-          </a:p>
-          <a:p>
-            <a:r>
-              <a:t>https://devfest.gdgchennai.in/</a:t>
+              <a:t>Tanglish: Sheet-la fill pannunga. Review Ready-ku maathunga. Organizers dhaan paathu review pannuvaanga.</a:t>
+            </a:r>
+          </a:p>
+          <a:p>
+            <a:r>
+              <a:t>Sheet: https://docs.google.com/spreadsheets/d/1DZ7OSphlY8llxWisVc_FcLGeu9Psj_fvfxR2F7ohxcM/edit?usp=sharing</a:t>
+            </a:r>
+          </a:p>
+          <a:p>
+            <a:r>
+              <a:t>Columns: Product Name, Creator / Team, Product Category, Demo / Product URL, Repository URL, Monetization Model, Payment Integration, Deployment Status, Review Status, Production Ready by Thursday, Notes.</a:t>
+            </a:r>
+          </a:p>
+          <a:p>
+            <a:r>
+              <a:t>Workflow: fill the sheet, update URLs, the participant sets Review Status to Review Ready, organizers review. Review Ready is not approval.</a:t>
             </a:r>
           </a:p>
         </p:txBody>
@@ -1496,16 +1566,6 @@
           </a:p>
           <a:p>
             <a:r>
-              <a:t>Ask people just out of college to take YC Startup School (free, online). Say “early Startup School lessons.” Do not invent a lesson number.</a:t>
-            </a:r>
-          </a:p>
-          <a:p>
-            <a:r>
-              <a:t>https://www.startupschool.org/</a:t>
-            </a:r>
-          </a:p>
-          <a:p>
-            <a:r>
               <a:t>https://www.youtube.com/watch?v=BUE-icVYRFU</a:t>
             </a:r>
           </a:p>
@@ -1581,6 +1641,376 @@
           <a:lstStyle/>
           <a:p>
             <a:r>
+              <a:t>Tanglish: Thursday-kku live aaganum. Review Ready-na ‘paathu videoonga.’ Production Ready-na users use panna ready.</a:t>
+            </a:r>
+          </a:p>
+          <a:p>
+            <a:r>
+              <a:t>Say Thursday. Do not print a calendar date.</a:t>
+            </a:r>
+          </a:p>
+          <a:p>
+            <a:r>
+              <a:t>Production Ready by Thursday = deployed and usable. Review Ready = please review.</a:t>
+            </a:r>
+          </a:p>
+          <a:p>
+            <a:r>
+              <a:t>Checklist: production URL; core flow works; usable onboarding; no critical blockers; a clear way to charge; payment flow works when they charge; basic analytics or feedback; enough for organizers to test.</a:t>
+            </a:r>
+          </a:p>
+          <a:p>
+            <a:r>
+              <a:t>Extra DevFest prize eligibility, not an automatic win.</a:t>
+            </a:r>
+          </a:p>
+          <a:p>
+            <a:r>
+              <a:t>https://luma.com/mprx0ocg</a:t>
+            </a:r>
+          </a:p>
+          <a:p>
+            <a:r>
+              <a:t>https://devfest.gdgchennai.in/</a:t>
+            </a:r>
+          </a:p>
+        </p:txBody>
+      </p:sp>
+      <p:sp>
+        <p:nvSpPr>
+          <p:cNvPr id="4" name="Slide Number Placeholder 3"/>
+          <p:cNvSpPr>
+            <a:spLocks noGrp="1"/>
+          </p:cNvSpPr>
+          <p:nvPr>
+            <p:ph type="sldNum" idx="5" sz="quarter"/>
+          </p:nvPr>
+        </p:nvSpPr>
+        <p:spPr/>
+      </p:sp>
+    </p:spTree>
+  </p:cSld>
+  <p:clrMapOvr>
+    <a:masterClrMapping/>
+  </p:clrMapOvr>
+</p:notes>
+</file>
+
+<file path=ppt/notesSlides/notesSlide21.xml><?xml version="1.0" encoding="utf-8"?>
+<p:notes xmlns:a="http://schemas.openxmlformats.org/drawingml/2006/main" xmlns:p="http://schemas.openxmlformats.org/presentationml/2006/main" xmlns:r="http://schemas.openxmlformats.org/officeDocument/2006/relationships">
+  <p:cSld>
+    <p:spTree>
+      <p:nvGrpSpPr>
+        <p:cNvPr id="1" name=""/>
+        <p:cNvGrpSpPr/>
+        <p:nvPr/>
+      </p:nvGrpSpPr>
+      <p:grpSpPr>
+        <a:xfrm>
+          <a:off x="0" y="0"/>
+          <a:ext cx="0" cy="0"/>
+          <a:chOff x="0" y="0"/>
+          <a:chExt cx="0" cy="0"/>
+        </a:xfrm>
+      </p:grpSpPr>
+      <p:sp>
+        <p:nvSpPr>
+          <p:cNvPr id="2" name="Slide Image Placeholder 1"/>
+          <p:cNvSpPr>
+            <a:spLocks noGrp="1"/>
+          </p:cNvSpPr>
+          <p:nvPr>
+            <p:ph type="sldImg" idx="2"/>
+          </p:nvPr>
+        </p:nvSpPr>
+        <p:spPr/>
+      </p:sp>
+      <p:sp>
+        <p:nvSpPr>
+          <p:cNvPr id="3" name="Notes Placeholder 2"/>
+          <p:cNvSpPr>
+            <a:spLocks noGrp="1"/>
+          </p:cNvSpPr>
+          <p:nvPr>
+            <p:ph type="body" idx="3" sz="quarter"/>
+          </p:nvPr>
+        </p:nvSpPr>
+        <p:spPr/>
+        <p:txBody>
+          <a:bodyPr/>
+          <a:lstStyle/>
+          <a:p>
+            <a:r>
+              <a:t>Tanglish: Ship pannunga. Review aaganum. Ticket-na bonus — guarantee illa.</a:t>
+            </a:r>
+          </a:p>
+          <a:p>
+            <a:r>
+              <a:t>On the slide, attributed to Sam Altman: We're going to see 10 person billion-dollar companies pretty soon.</a:t>
+            </a:r>
+          </a:p>
+          <a:p>
+            <a:r>
+              <a:t>Fuller reported line: We're going to see 10-person companies with billion-dollar valuations pretty soon.</a:t>
+            </a:r>
+          </a:p>
+          <a:p>
+            <a:r>
+              <a:t>https://www.forbes.com/sites/michaelashley/2025/02/17/the-future-is-solo-ai-is-creating-billion-dollar-one-person-companies/</a:t>
+            </a:r>
+          </a:p>
+          <a:p>
+            <a:r>
+              <a:t>Organizers review. Selected winners get DevFest Chennai tickets. Prizes also at DevFest, Sat 17 Oct 2026, IITM Research Park. Thursday production-ready teams are considered for an additional prize — not a guarantee.</a:t>
+            </a:r>
+          </a:p>
+          <a:p>
+            <a:r>
+              <a:t>Judging themes only: usefulness, execution, UX, monetization potential, real deployment, learning. Do not invent amounts, winner counts, or weights.</a:t>
+            </a:r>
+          </a:p>
+          <a:p>
+            <a:r>
+              <a:t>https://devfest.gdgchennai.in/</a:t>
+            </a:r>
+          </a:p>
+        </p:txBody>
+      </p:sp>
+      <p:sp>
+        <p:nvSpPr>
+          <p:cNvPr id="4" name="Slide Number Placeholder 3"/>
+          <p:cNvSpPr>
+            <a:spLocks noGrp="1"/>
+          </p:cNvSpPr>
+          <p:nvPr>
+            <p:ph type="sldNum" idx="5" sz="quarter"/>
+          </p:nvPr>
+        </p:nvSpPr>
+        <p:spPr/>
+      </p:sp>
+    </p:spTree>
+  </p:cSld>
+  <p:clrMapOvr>
+    <a:masterClrMapping/>
+  </p:clrMapOvr>
+</p:notes>
+</file>
+
+<file path=ppt/notesSlides/notesSlide22.xml><?xml version="1.0" encoding="utf-8"?>
+<p:notes xmlns:a="http://schemas.openxmlformats.org/drawingml/2006/main" xmlns:p="http://schemas.openxmlformats.org/presentationml/2006/main" xmlns:r="http://schemas.openxmlformats.org/officeDocument/2006/relationships">
+  <p:cSld>
+    <p:spTree>
+      <p:nvGrpSpPr>
+        <p:cNvPr id="1" name=""/>
+        <p:cNvGrpSpPr/>
+        <p:nvPr/>
+      </p:nvGrpSpPr>
+      <p:grpSpPr>
+        <a:xfrm>
+          <a:off x="0" y="0"/>
+          <a:ext cx="0" cy="0"/>
+          <a:chOff x="0" y="0"/>
+          <a:chExt cx="0" cy="0"/>
+        </a:xfrm>
+      </p:grpSpPr>
+      <p:sp>
+        <p:nvSpPr>
+          <p:cNvPr id="2" name="Slide Image Placeholder 1"/>
+          <p:cNvSpPr>
+            <a:spLocks noGrp="1"/>
+          </p:cNvSpPr>
+          <p:nvPr>
+            <p:ph type="sldImg" idx="2"/>
+          </p:nvPr>
+        </p:nvSpPr>
+        <p:spPr/>
+      </p:sp>
+      <p:sp>
+        <p:nvSpPr>
+          <p:cNvPr id="3" name="Notes Placeholder 2"/>
+          <p:cNvSpPr>
+            <a:spLocks noGrp="1"/>
+          </p:cNvSpPr>
+          <p:nvPr>
+            <p:ph type="body" idx="3" sz="quarter"/>
+          </p:nvPr>
+        </p:nvSpPr>
+        <p:spPr/>
+        <p:txBody>
+          <a:bodyPr/>
+          <a:lstStyle/>
+          <a:p>
+            <a:r>
+              <a:t>Tanglish: Ippo ivathai follow pannunga. Overwhelm aagadheenga.</a:t>
+            </a:r>
+          </a:p>
+          <a:p>
+            <a:r>
+              <a:t>Three names only. X is build in public. https://x.com/</a:t>
+            </a:r>
+          </a:p>
+          <a:p>
+            <a:r>
+              <a:t>Product Hunt is where new products show up. https://www.producthunt.com/</a:t>
+            </a:r>
+          </a:p>
+          <a:p>
+            <a:r>
+              <a:t>Startup School is the free YC course on the next slide. https://www.startupschool.org/</a:t>
+            </a:r>
+          </a:p>
+          <a:p>
+            <a:r>
+              <a:t>No second QR here. No extra networks.</a:t>
+            </a:r>
+          </a:p>
+        </p:txBody>
+      </p:sp>
+      <p:sp>
+        <p:nvSpPr>
+          <p:cNvPr id="4" name="Slide Number Placeholder 3"/>
+          <p:cNvSpPr>
+            <a:spLocks noGrp="1"/>
+          </p:cNvSpPr>
+          <p:nvPr>
+            <p:ph type="sldNum" idx="5" sz="quarter"/>
+          </p:nvPr>
+        </p:nvSpPr>
+        <p:spPr/>
+      </p:sp>
+    </p:spTree>
+  </p:cSld>
+  <p:clrMapOvr>
+    <a:masterClrMapping/>
+  </p:clrMapOvr>
+</p:notes>
+</file>
+
+<file path=ppt/notesSlides/notesSlide23.xml><?xml version="1.0" encoding="utf-8"?>
+<p:notes xmlns:a="http://schemas.openxmlformats.org/drawingml/2006/main" xmlns:p="http://schemas.openxmlformats.org/presentationml/2006/main" xmlns:r="http://schemas.openxmlformats.org/officeDocument/2006/relationships">
+  <p:cSld>
+    <p:spTree>
+      <p:nvGrpSpPr>
+        <p:cNvPr id="1" name=""/>
+        <p:cNvGrpSpPr/>
+        <p:nvPr/>
+      </p:nvGrpSpPr>
+      <p:grpSpPr>
+        <a:xfrm>
+          <a:off x="0" y="0"/>
+          <a:ext cx="0" cy="0"/>
+          <a:chOff x="0" y="0"/>
+          <a:chExt cx="0" cy="0"/>
+        </a:xfrm>
+      </p:grpSpPr>
+      <p:sp>
+        <p:nvSpPr>
+          <p:cNvPr id="2" name="Slide Image Placeholder 1"/>
+          <p:cNvSpPr>
+            <a:spLocks noGrp="1"/>
+          </p:cNvSpPr>
+          <p:nvPr>
+            <p:ph type="sldImg" idx="2"/>
+          </p:nvPr>
+        </p:nvSpPr>
+        <p:spPr/>
+      </p:sp>
+      <p:sp>
+        <p:nvSpPr>
+          <p:cNvPr id="3" name="Notes Placeholder 2"/>
+          <p:cNvSpPr>
+            <a:spLocks noGrp="1"/>
+          </p:cNvSpPr>
+          <p:nvPr>
+            <p:ph type="body" idx="3" sz="quarter"/>
+          </p:nvPr>
+        </p:nvSpPr>
+        <p:spPr/>
+        <p:txBody>
+          <a:bodyPr/>
+          <a:lstStyle/>
+          <a:p>
+            <a:r>
+              <a:t>Tanglish: Startup School free. Online. YC. Early lessons-ah use pannunga. Lesson number invent pannaathinga.</a:t>
+            </a:r>
+          </a:p>
+          <a:p>
+            <a:r>
+              <a:t>The QR lives only here. The previous slide only named Startup School as something to follow. Take Y Combinator Startup School. Free. Online. Say early lessons. Do not invent a lesson number.</a:t>
+            </a:r>
+          </a:p>
+          <a:p>
+            <a:r>
+              <a:t>https://www.startupschool.org/</a:t>
+            </a:r>
+          </a:p>
+        </p:txBody>
+      </p:sp>
+      <p:sp>
+        <p:nvSpPr>
+          <p:cNvPr id="4" name="Slide Number Placeholder 3"/>
+          <p:cNvSpPr>
+            <a:spLocks noGrp="1"/>
+          </p:cNvSpPr>
+          <p:nvPr>
+            <p:ph type="sldNum" idx="5" sz="quarter"/>
+          </p:nvPr>
+        </p:nvSpPr>
+        <p:spPr/>
+      </p:sp>
+    </p:spTree>
+  </p:cSld>
+  <p:clrMapOvr>
+    <a:masterClrMapping/>
+  </p:clrMapOvr>
+</p:notes>
+</file>
+
+<file path=ppt/notesSlides/notesSlide24.xml><?xml version="1.0" encoding="utf-8"?>
+<p:notes xmlns:a="http://schemas.openxmlformats.org/drawingml/2006/main" xmlns:p="http://schemas.openxmlformats.org/presentationml/2006/main" xmlns:r="http://schemas.openxmlformats.org/officeDocument/2006/relationships">
+  <p:cSld>
+    <p:spTree>
+      <p:nvGrpSpPr>
+        <p:cNvPr id="1" name=""/>
+        <p:cNvGrpSpPr/>
+        <p:nvPr/>
+      </p:nvGrpSpPr>
+      <p:grpSpPr>
+        <a:xfrm>
+          <a:off x="0" y="0"/>
+          <a:ext cx="0" cy="0"/>
+          <a:chOff x="0" y="0"/>
+          <a:chExt cx="0" cy="0"/>
+        </a:xfrm>
+      </p:grpSpPr>
+      <p:sp>
+        <p:nvSpPr>
+          <p:cNvPr id="2" name="Slide Image Placeholder 1"/>
+          <p:cNvSpPr>
+            <a:spLocks noGrp="1"/>
+          </p:cNvSpPr>
+          <p:nvPr>
+            <p:ph type="sldImg" idx="2"/>
+          </p:nvPr>
+        </p:nvSpPr>
+        <p:spPr/>
+      </p:sp>
+      <p:sp>
+        <p:nvSpPr>
+          <p:cNvPr id="3" name="Notes Placeholder 2"/>
+          <p:cNvSpPr>
+            <a:spLocks noGrp="1"/>
+          </p:cNvSpPr>
+          <p:nvPr>
+            <p:ph type="body" idx="3" sz="quarter"/>
+          </p:nvPr>
+        </p:nvSpPr>
+        <p:spPr/>
+        <p:txBody>
+          <a:bodyPr/>
+          <a:lstStyle/>
+          <a:p>
+            <a:r>
               <a:t>Tanglish: Indha banner-ah vechi vidunga. Scan panna mudiyala-na DevFest site-ku point pannunga.</a:t>
             </a:r>
           </a:p>
@@ -1594,9 +2024,89 @@
               <a:t>The on-art QR did not decode in our check. Use https://devfest.gdgchennai.in/ — do not invent another.</a:t>
             </a:r>
           </a:p>
+        </p:txBody>
+      </p:sp>
+      <p:sp>
+        <p:nvSpPr>
+          <p:cNvPr id="4" name="Slide Number Placeholder 3"/>
+          <p:cNvSpPr>
+            <a:spLocks noGrp="1"/>
+          </p:cNvSpPr>
+          <p:nvPr>
+            <p:ph type="sldNum" idx="5" sz="quarter"/>
+          </p:nvPr>
+        </p:nvSpPr>
+        <p:spPr/>
+      </p:sp>
+    </p:spTree>
+  </p:cSld>
+  <p:clrMapOvr>
+    <a:masterClrMapping/>
+  </p:clrMapOvr>
+</p:notes>
+</file>
+
+<file path=ppt/notesSlides/notesSlide25.xml><?xml version="1.0" encoding="utf-8"?>
+<p:notes xmlns:a="http://schemas.openxmlformats.org/drawingml/2006/main" xmlns:p="http://schemas.openxmlformats.org/presentationml/2006/main" xmlns:r="http://schemas.openxmlformats.org/officeDocument/2006/relationships">
+  <p:cSld>
+    <p:spTree>
+      <p:nvGrpSpPr>
+        <p:cNvPr id="1" name=""/>
+        <p:cNvGrpSpPr/>
+        <p:nvPr/>
+      </p:nvGrpSpPr>
+      <p:grpSpPr>
+        <a:xfrm>
+          <a:off x="0" y="0"/>
+          <a:ext cx="0" cy="0"/>
+          <a:chOff x="0" y="0"/>
+          <a:chExt cx="0" cy="0"/>
+        </a:xfrm>
+      </p:grpSpPr>
+      <p:sp>
+        <p:nvSpPr>
+          <p:cNvPr id="2" name="Slide Image Placeholder 1"/>
+          <p:cNvSpPr>
+            <a:spLocks noGrp="1"/>
+          </p:cNvSpPr>
+          <p:nvPr>
+            <p:ph type="sldImg" idx="2"/>
+          </p:nvPr>
+        </p:nvSpPr>
+        <p:spPr/>
+      </p:sp>
+      <p:sp>
+        <p:nvSpPr>
+          <p:cNvPr id="3" name="Notes Placeholder 2"/>
+          <p:cNvSpPr>
+            <a:spLocks noGrp="1"/>
+          </p:cNvSpPr>
+          <p:nvPr>
+            <p:ph type="body" idx="3" sz="quarter"/>
+          </p:nvPr>
+        </p:nvSpPr>
+        <p:spPr/>
+        <p:txBody>
+          <a:bodyPr/>
+          <a:lstStyle/>
+          <a:p>
+            <a:r>
+              <a:t>Tanglish: Crazy-nu ninaichavanga dhaan world-ah maathuvaanga.</a:t>
+            </a:r>
+          </a:p>
+          <a:p>
+            <a:r>
+              <a:t>Leave the line up. The people who are crazy enough to think they can change the world are the ones who do. Steve Jobs.</a:t>
+            </a:r>
+          </a:p>
           <a:p>
             <a:r>
               <a:t>Don't just build another side project. Build something people can use, ship it to the world, and see if someone is willing to pay for it.</a:t>
+            </a:r>
+          </a:p>
+          <a:p>
+            <a:r>
+              <a:t>https://luma.com/mprx0ocg</a:t>
             </a:r>
           </a:p>
         </p:txBody>
@@ -1666,17 +2176,27 @@
           <a:lstStyle/>
           <a:p>
             <a:r>
-              <a:t>Tanglish: Startup School free. Online. YC. Early lessons-ah use pannunga. Lesson number invent pannaathinga.</a:t>
-            </a:r>
-          </a:p>
-          <a:p>
-            <a:r>
-              <a:t>Take Y Combinator Startup School. Free. Online. Say early lessons. Do not invent a lesson number.</a:t>
-            </a:r>
-          </a:p>
-          <a:p>
-            <a:r>
-              <a:t>https://www.startupschool.org/</a:t>
+              <a:t>Tanglish: Periya team venam. Months venam. Ad budget-um venam.</a:t>
+            </a:r>
+          </a:p>
+          <a:p>
+            <a:r>
+              <a:t>Credit Sanjeev NC, DevFest 2024 for the tiny-team, no-ad-budget, ship-before-polish point. Super Meme is the spoken example — inspiration only. No revenue, ARR, or size claims. Same for DroidClaw.</a:t>
+            </a:r>
+          </a:p>
+          <a:p>
+            <a:r>
+              <a:t>https://supermeme.ai/</a:t>
+            </a:r>
+          </a:p>
+          <a:p>
+            <a:r>
+              <a:t>https://droidclaw.ai/</a:t>
+            </a:r>
+          </a:p>
+          <a:p>
+            <a:r>
+              <a:t>Do not invent a YouTube id for Sanjeev's talk.</a:t>
             </a:r>
           </a:p>
         </p:txBody>
@@ -1746,27 +2266,22 @@
           <a:lstStyle/>
           <a:p>
             <a:r>
-              <a:t>Tanglish: Periya team venam. Months venam. Ad budget-um venam.</a:t>
-            </a:r>
-          </a:p>
-          <a:p>
-            <a:r>
-              <a:t>Credit Sanjeev NC, DevFest 2024 for the tiny-team, no-ad-budget, ship-before-polish point. Super Meme is the spoken example — inspiration only. No revenue, ARR, or size claims. Same for DroidClaw.</a:t>
-            </a:r>
-          </a:p>
-          <a:p>
-            <a:r>
-              <a:t>https://supermeme.ai/</a:t>
-            </a:r>
-          </a:p>
-          <a:p>
-            <a:r>
-              <a:t>https://droidclaw.ai/</a:t>
-            </a:r>
-          </a:p>
-          <a:p>
-            <a:r>
-              <a:t>Do not invent a YouTube id for Sanjeev's talk.</a:t>
+              <a:t>Tanglish: Instagram venam. Oru problem. Konjam per. Adhu pothum.</a:t>
+            </a:r>
+          </a:p>
+          <a:p>
+            <a:r>
+              <a:t>These are small products. Also: word game, quiz, browser game, PDF utilities, expense widget, social scheduling, inventory, booking reminders, productivity dashboards, Android performance report, API testing, log analysis.</a:t>
+            </a:r>
+          </a:p>
+          <a:p>
+            <a:r>
+              <a:t>Illustrative monetization: paid levels, one-time, credits, subscription, hosted plan, license.</a:t>
+            </a:r>
+          </a:p>
+          <a:p>
+            <a:r>
+              <a:t>https://luma.com/mprx0ocg</a:t>
             </a:r>
           </a:p>
         </p:txBody>
@@ -1836,22 +2351,27 @@
           <a:lstStyle/>
           <a:p>
             <a:r>
-              <a:t>Tanglish: Instagram venam. Oru problem. Konjam per. Adhu pothum.</a:t>
-            </a:r>
-          </a:p>
-          <a:p>
-            <a:r>
-              <a:t>These are small products. Also: word game, quiz, browser game, PDF utilities, expense widget, social scheduling, inventory, booking reminders, productivity dashboards, Android performance report, API testing, log analysis.</a:t>
-            </a:r>
-          </a:p>
-          <a:p>
-            <a:r>
-              <a:t>Illustrative monetization: paid levels, one-time, credits, subscription, hosted plan, license.</a:t>
-            </a:r>
-          </a:p>
-          <a:p>
-            <a:r>
-              <a:t>https://luma.com/mprx0ocg</a:t>
+              <a:t>Tanglish: Puthiya invention venam. Oru job. Oru price. Adhu pothum.</a:t>
+            </a:r>
+          </a:p>
+          <a:p>
+            <a:r>
+              <a:t>Maaa is a Mac notch reminder. Pro is $2.99 once for two computers. https://www.maaa.app/</a:t>
+            </a:r>
+          </a:p>
+          <a:p>
+            <a:r>
+              <a:t>Lucky Charm hangs a charm on the desktop. Phone shot: Nimbu-Mirchi, Floating Charm Overlay on. https://luckycharm.kraftostech.com/</a:t>
+            </a:r>
+          </a:p>
+          <a:p>
+            <a:r>
+              <a:t>Carrd is one-page sites. https://carrd.co/</a:t>
+            </a:r>
+          </a:p>
+          <a:p>
+            <a:r>
+              <a:t>No revenue or popularity counts.</a:t>
             </a:r>
           </a:p>
         </p:txBody>
@@ -1921,27 +2441,22 @@
           <a:lstStyle/>
           <a:p>
             <a:r>
-              <a:t>Tanglish: Puthiya invention venam. Oru job. Oru price. Adhu pothum.</a:t>
-            </a:r>
-          </a:p>
-          <a:p>
-            <a:r>
-              <a:t>Maaa is a Mac notch reminder. Pro is $2.99 once for two computers. https://www.maaa.app/</a:t>
-            </a:r>
-          </a:p>
-          <a:p>
-            <a:r>
-              <a:t>Lucky Charm hangs a charm on the desktop. https://luckycharm.kraftostech.com/</a:t>
-            </a:r>
-          </a:p>
-          <a:p>
-            <a:r>
-              <a:t>Carrd is one-page sites. https://carrd.co/</a:t>
-            </a:r>
-          </a:p>
-          <a:p>
-            <a:r>
-              <a:t>No revenue or popularity counts.</a:t>
+              <a:t>Tanglish: Copycat-nu ninaikadheenga. Better version pothum. Market already irukku.</a:t>
+            </a:r>
+          </a:p>
+          <a:p>
+            <a:r>
+              <a:t>DunSocial is one more scheduler in a market that already has them. Public list price is $20/month — not a success claim. https://www.dunsocial.com/</a:t>
+            </a:r>
+          </a:p>
+          <a:p>
+            <a:r>
+              <a:t>The owner talked to the founder, who did not want an interview. What he did say: people trust you when you solve a problem, and he studies competitors.</a:t>
+            </a:r>
+          </a:p>
+          <a:p>
+            <a:r>
+              <a:t>The easiest test of a market is to ship a better version of something that already exists. Do not put a like count on this slide.</a:t>
             </a:r>
           </a:p>
         </p:txBody>
@@ -2011,22 +2526,27 @@
           <a:lstStyle/>
           <a:p>
             <a:r>
-              <a:t>Tanglish: Copycat-nu ninaikadheenga. Better version pothum. Market already irukku.</a:t>
-            </a:r>
-          </a:p>
-          <a:p>
-            <a:r>
-              <a:t>DunSocial is one more scheduler in a market that already has them. Public list price is $20/month — not a success claim. https://www.dunsocial.com/</a:t>
-            </a:r>
-          </a:p>
-          <a:p>
-            <a:r>
-              <a:t>The owner talked to the founder, who did not want an interview. What he did say: people trust you when you solve a problem, and he studies competitors.</a:t>
-            </a:r>
-          </a:p>
-          <a:p>
-            <a:r>
-              <a:t>The easiest test of a market is to ship a better version of something that already exists. Do not put a like count on this slide.</a:t>
+              <a:t>Tanglish: Oru job. Ivanga already therinjavanga. Inspiration dhaan.</a:t>
+            </a:r>
+          </a:p>
+          <a:p>
+            <a:r>
+              <a:t>Raycast is a launcher. https://www.raycast.com/</a:t>
+            </a:r>
+          </a:p>
+          <a:p>
+            <a:r>
+              <a:t>Photopea is a browser photo editor. https://www.photopea.com/</a:t>
+            </a:r>
+          </a:p>
+          <a:p>
+            <a:r>
+              <a:t>Gumroad is a store for files and memberships. https://gumroad.com/</a:t>
+            </a:r>
+          </a:p>
+          <a:p>
+            <a:r>
+              <a:t>Screenshots are from the live sites. Inspiration only — no revenue, user-count, or success claims.</a:t>
             </a:r>
           </a:p>
         </p:txBody>
@@ -2096,27 +2616,32 @@
           <a:lstStyle/>
           <a:p>
             <a:r>
-              <a:t>Tanglish: Oru job. Ivanga already therinjavanga. Inspiration dhaan.</a:t>
-            </a:r>
-          </a:p>
-          <a:p>
-            <a:r>
-              <a:t>Raycast is a launcher. https://www.raycast.com/</a:t>
-            </a:r>
-          </a:p>
-          <a:p>
-            <a:r>
-              <a:t>Photopea is a browser photo editor. https://www.photopea.com/</a:t>
-            </a:r>
-          </a:p>
-          <a:p>
-            <a:r>
-              <a:t>Gumroad is a store for files and memberships. https://gumroad.com/</a:t>
-            </a:r>
-          </a:p>
-          <a:p>
-            <a:r>
-              <a:t>Screenshots are from the live sites. Inspiration only — no revenue, user-count, or success claims.</a:t>
+              <a:t>Tanglish: Shark Tank venam. Namma kitta Startup Singam irukku.</a:t>
+            </a:r>
+          </a:p>
+          <a:p>
+            <a:r>
+              <a:t>Spelling is Startup Singam. No Shark Tank logo. Do not use Sworkit.</a:t>
+            </a:r>
+          </a:p>
+          <a:p>
+            <a:r>
+              <a:t>Creedom: AI for creators. ₹1.9 crore deployed. https://www.linkedin.com/posts/startupsingam_a-commitment-on-stage-is-only-the-beginning-activity-7491060796655812608-QJl5</a:t>
+            </a:r>
+          </a:p>
+          <a:p>
+            <a:r>
+              <a:t>GrooveBook: photo app, acquired for $14.5M. https://shutterflyinc.com/shutterfly-inc-acquires-groovebook/</a:t>
+            </a:r>
+          </a:p>
+          <a:p>
+            <a:r>
+              <a:t>https://techcrunch.com/2014/11/17/shark-tank-backed-groovebook-acquired-by-shutterfly-for-14-5-million/</a:t>
+            </a:r>
+          </a:p>
+          <a:p>
+            <a:r>
+              <a:t>Scholly: scholarship app. Shark Tank deal, later acquired. Do not invent the check size. https://www.businesswire.com/news/home/20230726114303/en/Sallie-Mae-Acquires-Key-Assets-of-Top-Scholarship-Search-App-Scholly</a:t>
             </a:r>
           </a:p>
         </p:txBody>
@@ -5338,7 +5863,7 @@
         </p:nvSpPr>
         <p:spPr>
           <a:xfrm>
-            <a:off x="640080" y="1051560"/>
+            <a:off x="640080" y="411480"/>
             <a:ext cx="10881360" cy="1737360"/>
           </a:xfrm>
           <a:prstGeom prst="rect">
@@ -5354,13 +5879,13 @@
           <a:p>
             <a:pPr algn="ctr"/>
             <a:r>
-              <a:rPr sz="3600" b="1">
+              <a:rPr sz="3400" b="1">
                 <a:solidFill>
                   <a:srgbClr val="1D1D1F"/>
                 </a:solidFill>
                 <a:latin typeface="Calibri"/>
               </a:rPr>
-              <a:t>Then take payment.</a:t>
+              <a:t>Pick a checkout.</a:t>
             </a:r>
           </a:p>
         </p:txBody>
@@ -5373,7 +5898,7 @@
         </p:nvSpPr>
         <p:spPr>
           <a:xfrm>
-            <a:off x="640080" y="2834639"/>
+            <a:off x="640080" y="2194560"/>
             <a:ext cx="10881360" cy="777240"/>
           </a:xfrm>
           <a:prstGeom prst="rect">
@@ -5395,231 +5920,21 @@
                 </a:solidFill>
                 <a:latin typeface="Calibri"/>
               </a:rPr>
-              <a:t>One price. One checkout.</a:t>
-            </a:r>
-          </a:p>
-        </p:txBody>
-      </p:sp>
-      <p:sp>
-        <p:nvSpPr>
-          <p:cNvPr id="5" name="Rounded Rectangle 4"/>
-          <p:cNvSpPr/>
-          <p:nvPr/>
-        </p:nvSpPr>
-        <p:spPr>
-          <a:xfrm>
-            <a:off x="4617720" y="3794760"/>
-            <a:ext cx="2926080" cy="1234440"/>
-          </a:xfrm>
-          <a:prstGeom prst="roundRect">
-            <a:avLst/>
-          </a:prstGeom>
-          <a:noFill/>
-          <a:ln w="27940">
-            <a:solidFill>
-              <a:srgbClr val="7C5CFF"/>
-            </a:solidFill>
-          </a:ln>
-        </p:spPr>
-        <p:style>
-          <a:lnRef idx="1">
-            <a:schemeClr val="accent1"/>
-          </a:lnRef>
-          <a:fillRef idx="3">
-            <a:schemeClr val="accent1"/>
-          </a:fillRef>
-          <a:effectRef idx="2">
-            <a:schemeClr val="accent1"/>
-          </a:effectRef>
-          <a:fontRef idx="minor">
-            <a:schemeClr val="lt1"/>
-          </a:fontRef>
-        </p:style>
-        <p:txBody>
-          <a:bodyPr rtlCol="0" anchor="ctr"/>
-          <a:lstStyle/>
-          <a:p>
-            <a:pPr algn="ctr"/>
-          </a:p>
-        </p:txBody>
-      </p:sp>
-      <p:sp>
-        <p:nvSpPr>
-          <p:cNvPr id="6" name="Rounded Rectangle 5"/>
-          <p:cNvSpPr/>
-          <p:nvPr/>
-        </p:nvSpPr>
-        <p:spPr>
-          <a:xfrm>
-            <a:off x="4617720" y="3794760"/>
-            <a:ext cx="2926080" cy="292608"/>
-          </a:xfrm>
-          <a:prstGeom prst="roundRect">
-            <a:avLst/>
-          </a:prstGeom>
-          <a:solidFill>
-            <a:srgbClr val="1EC8E6">
-              <a:lumMod val="45000"/>
-              <a:lumOff val="55000"/>
-            </a:srgbClr>
-          </a:solidFill>
-          <a:ln>
-            <a:noFill/>
-          </a:ln>
-        </p:spPr>
-        <p:style>
-          <a:lnRef idx="1">
-            <a:schemeClr val="accent1"/>
-          </a:lnRef>
-          <a:fillRef idx="3">
-            <a:schemeClr val="accent1"/>
-          </a:fillRef>
-          <a:effectRef idx="2">
-            <a:schemeClr val="accent1"/>
-          </a:effectRef>
-          <a:fontRef idx="minor">
-            <a:schemeClr val="lt1"/>
-          </a:fontRef>
-        </p:style>
-        <p:txBody>
-          <a:bodyPr rtlCol="0" anchor="ctr"/>
-          <a:lstStyle/>
-          <a:p>
-            <a:pPr algn="ctr"/>
-          </a:p>
-        </p:txBody>
-      </p:sp>
-      <p:cxnSp>
-        <p:nvCxnSpPr>
-          <p:cNvPr id="7" name="Connector 6"/>
-          <p:cNvCxnSpPr/>
-          <p:nvPr/>
-        </p:nvCxnSpPr>
-        <p:spPr>
-          <a:xfrm>
-            <a:off x="4937760" y="4617720"/>
-            <a:ext cx="868680" cy="0"/>
-          </a:xfrm>
-          <a:prstGeom prst="line">
-            <a:avLst/>
-          </a:prstGeom>
-          <a:ln w="27940">
-            <a:solidFill>
-              <a:srgbClr val="1EC8E6"/>
-            </a:solidFill>
-          </a:ln>
-        </p:spPr>
-        <p:style>
-          <a:lnRef idx="2">
-            <a:schemeClr val="accent1"/>
-          </a:lnRef>
-          <a:fillRef idx="0">
-            <a:schemeClr val="accent1"/>
-          </a:fillRef>
-          <a:effectRef idx="1">
-            <a:schemeClr val="accent1"/>
-          </a:effectRef>
-          <a:fontRef idx="minor">
-            <a:schemeClr val="tx1"/>
-          </a:fontRef>
-        </p:style>
-      </p:cxnSp>
-      <p:sp>
-        <p:nvSpPr>
-          <p:cNvPr id="8" name="Oval 7"/>
-          <p:cNvSpPr/>
-          <p:nvPr/>
-        </p:nvSpPr>
-        <p:spPr>
-          <a:xfrm>
-            <a:off x="6903720" y="4315968"/>
-            <a:ext cx="384048" cy="384048"/>
-          </a:xfrm>
-          <a:prstGeom prst="ellipse">
-            <a:avLst/>
-          </a:prstGeom>
-          <a:noFill/>
-          <a:ln w="25400">
-            <a:solidFill>
-              <a:srgbClr val="7C5CFF"/>
-            </a:solidFill>
-          </a:ln>
-        </p:spPr>
-        <p:style>
-          <a:lnRef idx="1">
-            <a:schemeClr val="accent1"/>
-          </a:lnRef>
-          <a:fillRef idx="3">
-            <a:schemeClr val="accent1"/>
-          </a:fillRef>
-          <a:effectRef idx="2">
-            <a:schemeClr val="accent1"/>
-          </a:effectRef>
-          <a:fontRef idx="minor">
-            <a:schemeClr val="lt1"/>
-          </a:fontRef>
-        </p:style>
-        <p:txBody>
-          <a:bodyPr rtlCol="0" anchor="ctr"/>
-          <a:lstStyle/>
-          <a:p>
-            <a:pPr algn="ctr"/>
-          </a:p>
-        </p:txBody>
-      </p:sp>
-      <p:sp>
-        <p:nvSpPr>
-          <p:cNvPr id="9" name="Rounded Rectangle 8"/>
-          <p:cNvSpPr/>
-          <p:nvPr/>
-        </p:nvSpPr>
-        <p:spPr>
-          <a:xfrm>
-            <a:off x="4838547" y="5806440"/>
-            <a:ext cx="1078992" cy="384048"/>
-          </a:xfrm>
-          <a:prstGeom prst="roundRect">
-            <a:avLst/>
-          </a:prstGeom>
-          <a:solidFill>
-            <a:srgbClr val="E8E8ED"/>
-          </a:solidFill>
-          <a:ln>
-            <a:noFill/>
-          </a:ln>
-        </p:spPr>
-        <p:style>
-          <a:lnRef idx="1">
-            <a:schemeClr val="accent1"/>
-          </a:lnRef>
-          <a:fillRef idx="3">
-            <a:schemeClr val="accent1"/>
-          </a:fillRef>
-          <a:effectRef idx="2">
-            <a:schemeClr val="accent1"/>
-          </a:effectRef>
-          <a:fontRef idx="minor">
-            <a:schemeClr val="lt1"/>
-          </a:fontRef>
-        </p:style>
-        <p:txBody>
-          <a:bodyPr rtlCol="0" anchor="ctr"/>
-          <a:lstStyle/>
-          <a:p>
-            <a:pPr algn="ctr"/>
-          </a:p>
-        </p:txBody>
-      </p:sp>
-      <p:sp>
-        <p:nvSpPr>
-          <p:cNvPr id="10" name="TextBox 9"/>
+              <a:t>None of these is required.</a:t>
+            </a:r>
+          </a:p>
+        </p:txBody>
+      </p:sp>
+      <p:sp>
+        <p:nvSpPr>
+          <p:cNvPr id="5" name="TextBox 4"/>
           <p:cNvSpPr txBox="1"/>
           <p:nvPr/>
         </p:nvSpPr>
         <p:spPr>
           <a:xfrm>
-            <a:off x="4838547" y="5843016"/>
-            <a:ext cx="1078992" cy="329184"/>
+            <a:off x="640080" y="2788920"/>
+            <a:ext cx="10881360" cy="438912"/>
           </a:xfrm>
           <a:prstGeom prst="rect">
             <a:avLst/>
@@ -5634,70 +5949,27 @@
           <a:p>
             <a:pPr algn="ctr"/>
             <a:r>
-              <a:rPr sz="1200" b="1">
+              <a:rPr sz="2200" b="1">
                 <a:solidFill>
                   <a:srgbClr val="1D1D1F"/>
                 </a:solidFill>
                 <a:latin typeface="Calibri"/>
               </a:rPr>
-              <a:t>₹99–₹499</a:t>
-            </a:r>
-          </a:p>
-        </p:txBody>
-      </p:sp>
-      <p:sp>
-        <p:nvSpPr>
-          <p:cNvPr id="11" name="Rounded Rectangle 10"/>
-          <p:cNvSpPr/>
-          <p:nvPr/>
-        </p:nvSpPr>
-        <p:spPr>
-          <a:xfrm>
-            <a:off x="6082131" y="5806440"/>
-            <a:ext cx="1271016" cy="384048"/>
-          </a:xfrm>
-          <a:prstGeom prst="roundRect">
-            <a:avLst/>
-          </a:prstGeom>
-          <a:solidFill>
-            <a:srgbClr val="E8E8ED"/>
-          </a:solidFill>
-          <a:ln>
-            <a:noFill/>
-          </a:ln>
-        </p:spPr>
-        <p:style>
-          <a:lnRef idx="1">
-            <a:schemeClr val="accent1"/>
-          </a:lnRef>
-          <a:fillRef idx="3">
-            <a:schemeClr val="accent1"/>
-          </a:fillRef>
-          <a:effectRef idx="2">
-            <a:schemeClr val="accent1"/>
-          </a:effectRef>
-          <a:fontRef idx="minor">
-            <a:schemeClr val="lt1"/>
-          </a:fontRef>
-        </p:style>
-        <p:txBody>
-          <a:bodyPr rtlCol="0" anchor="ctr"/>
-          <a:lstStyle/>
-          <a:p>
-            <a:pPr algn="ctr"/>
-          </a:p>
-        </p:txBody>
-      </p:sp>
-      <p:sp>
-        <p:nvSpPr>
-          <p:cNvPr id="12" name="TextBox 11"/>
+              <a:t>Razorpay</a:t>
+            </a:r>
+          </a:p>
+        </p:txBody>
+      </p:sp>
+      <p:sp>
+        <p:nvSpPr>
+          <p:cNvPr id="6" name="TextBox 5"/>
           <p:cNvSpPr txBox="1"/>
           <p:nvPr/>
         </p:nvSpPr>
         <p:spPr>
           <a:xfrm>
-            <a:off x="6082131" y="5843016"/>
-            <a:ext cx="1271016" cy="329184"/>
+            <a:off x="640080" y="3291839"/>
+            <a:ext cx="10881360" cy="438912"/>
           </a:xfrm>
           <a:prstGeom prst="rect">
             <a:avLst/>
@@ -5712,13 +5984,118 @@
           <a:p>
             <a:pPr algn="ctr"/>
             <a:r>
-              <a:rPr sz="1200" b="1">
+              <a:rPr sz="2200" b="1">
                 <a:solidFill>
                   <a:srgbClr val="1D1D1F"/>
                 </a:solidFill>
                 <a:latin typeface="Calibri"/>
               </a:rPr>
-              <a:t>₹199/month</a:t>
+              <a:t>Stripe, where available</a:t>
+            </a:r>
+          </a:p>
+        </p:txBody>
+      </p:sp>
+      <p:sp>
+        <p:nvSpPr>
+          <p:cNvPr id="7" name="TextBox 6"/>
+          <p:cNvSpPr txBox="1"/>
+          <p:nvPr/>
+        </p:nvSpPr>
+        <p:spPr>
+          <a:xfrm>
+            <a:off x="640080" y="3794759"/>
+            <a:ext cx="10881360" cy="438912"/>
+          </a:xfrm>
+          <a:prstGeom prst="rect">
+            <a:avLst/>
+          </a:prstGeom>
+          <a:noFill/>
+        </p:spPr>
+        <p:txBody>
+          <a:bodyPr wrap="square">
+            <a:spAutoFit/>
+          </a:bodyPr>
+          <a:lstStyle/>
+          <a:p>
+            <a:pPr algn="ctr"/>
+            <a:r>
+              <a:rPr sz="2200" b="1">
+                <a:solidFill>
+                  <a:srgbClr val="1D1D1F"/>
+                </a:solidFill>
+                <a:latin typeface="Calibri"/>
+              </a:rPr>
+              <a:t>RevenueCat — mobile subscriptions</a:t>
+            </a:r>
+          </a:p>
+        </p:txBody>
+      </p:sp>
+      <p:sp>
+        <p:nvSpPr>
+          <p:cNvPr id="8" name="TextBox 7"/>
+          <p:cNvSpPr txBox="1"/>
+          <p:nvPr/>
+        </p:nvSpPr>
+        <p:spPr>
+          <a:xfrm>
+            <a:off x="640080" y="4297679"/>
+            <a:ext cx="10881360" cy="438912"/>
+          </a:xfrm>
+          <a:prstGeom prst="rect">
+            <a:avLst/>
+          </a:prstGeom>
+          <a:noFill/>
+        </p:spPr>
+        <p:txBody>
+          <a:bodyPr wrap="square">
+            <a:spAutoFit/>
+          </a:bodyPr>
+          <a:lstStyle/>
+          <a:p>
+            <a:pPr algn="ctr"/>
+            <a:r>
+              <a:rPr sz="2200" b="1">
+                <a:solidFill>
+                  <a:srgbClr val="1D1D1F"/>
+                </a:solidFill>
+                <a:latin typeface="Calibri"/>
+              </a:rPr>
+              <a:t>Google Pay — wallet, including UPI</a:t>
+            </a:r>
+          </a:p>
+        </p:txBody>
+      </p:sp>
+      <p:sp>
+        <p:nvSpPr>
+          <p:cNvPr id="9" name="TextBox 8"/>
+          <p:cNvSpPr txBox="1"/>
+          <p:nvPr/>
+        </p:nvSpPr>
+        <p:spPr>
+          <a:xfrm>
+            <a:off x="640080" y="4800599"/>
+            <a:ext cx="10881360" cy="438912"/>
+          </a:xfrm>
+          <a:prstGeom prst="rect">
+            <a:avLst/>
+          </a:prstGeom>
+          <a:noFill/>
+        </p:spPr>
+        <p:txBody>
+          <a:bodyPr wrap="square">
+            <a:spAutoFit/>
+          </a:bodyPr>
+          <a:lstStyle/>
+          <a:p>
+            <a:pPr algn="ctr"/>
+            <a:r>
+              <a:rPr sz="2200" b="1">
+                <a:solidFill>
+                  <a:srgbClr val="1D1D1F"/>
+                </a:solidFill>
+                <a:latin typeface="Calibri"/>
+              </a:rPr>
+              <a:t>Apple Pay — wallet, where available</a:t>
             </a:r>
           </a:p>
         </p:txBody>
@@ -5814,7 +6191,7 @@
                 </a:solidFill>
                 <a:latin typeface="Calibri"/>
               </a:rPr>
-              <a:t>Then watch what they do.</a:t>
+              <a:t>Then take payment.</a:t>
             </a:r>
           </a:p>
         </p:txBody>
@@ -5849,28 +6226,117 @@
                 </a:solidFill>
                 <a:latin typeface="Calibri"/>
               </a:rPr>
-              <a:t>One analytics tool is enough.</a:t>
-            </a:r>
+              <a:t>One price. One checkout.</a:t>
+            </a:r>
+          </a:p>
+        </p:txBody>
+      </p:sp>
+      <p:sp>
+        <p:nvSpPr>
+          <p:cNvPr id="5" name="Rounded Rectangle 4"/>
+          <p:cNvSpPr/>
+          <p:nvPr/>
+        </p:nvSpPr>
+        <p:spPr>
+          <a:xfrm>
+            <a:off x="4617720" y="3794760"/>
+            <a:ext cx="2926080" cy="1234440"/>
+          </a:xfrm>
+          <a:prstGeom prst="roundRect">
+            <a:avLst/>
+          </a:prstGeom>
+          <a:noFill/>
+          <a:ln w="27940">
+            <a:solidFill>
+              <a:srgbClr val="7C5CFF"/>
+            </a:solidFill>
+          </a:ln>
+        </p:spPr>
+        <p:style>
+          <a:lnRef idx="1">
+            <a:schemeClr val="accent1"/>
+          </a:lnRef>
+          <a:fillRef idx="3">
+            <a:schemeClr val="accent1"/>
+          </a:fillRef>
+          <a:effectRef idx="2">
+            <a:schemeClr val="accent1"/>
+          </a:effectRef>
+          <a:fontRef idx="minor">
+            <a:schemeClr val="lt1"/>
+          </a:fontRef>
+        </p:style>
+        <p:txBody>
+          <a:bodyPr rtlCol="0" anchor="ctr"/>
+          <a:lstStyle/>
+          <a:p>
+            <a:pPr algn="ctr"/>
+          </a:p>
+        </p:txBody>
+      </p:sp>
+      <p:sp>
+        <p:nvSpPr>
+          <p:cNvPr id="6" name="Rounded Rectangle 5"/>
+          <p:cNvSpPr/>
+          <p:nvPr/>
+        </p:nvSpPr>
+        <p:spPr>
+          <a:xfrm>
+            <a:off x="4617720" y="3794760"/>
+            <a:ext cx="2926080" cy="292608"/>
+          </a:xfrm>
+          <a:prstGeom prst="roundRect">
+            <a:avLst/>
+          </a:prstGeom>
+          <a:solidFill>
+            <a:srgbClr val="1EC8E6">
+              <a:lumMod val="45000"/>
+              <a:lumOff val="55000"/>
+            </a:srgbClr>
+          </a:solidFill>
+          <a:ln>
+            <a:noFill/>
+          </a:ln>
+        </p:spPr>
+        <p:style>
+          <a:lnRef idx="1">
+            <a:schemeClr val="accent1"/>
+          </a:lnRef>
+          <a:fillRef idx="3">
+            <a:schemeClr val="accent1"/>
+          </a:fillRef>
+          <a:effectRef idx="2">
+            <a:schemeClr val="accent1"/>
+          </a:effectRef>
+          <a:fontRef idx="minor">
+            <a:schemeClr val="lt1"/>
+          </a:fontRef>
+        </p:style>
+        <p:txBody>
+          <a:bodyPr rtlCol="0" anchor="ctr"/>
+          <a:lstStyle/>
+          <a:p>
+            <a:pPr algn="ctr"/>
           </a:p>
         </p:txBody>
       </p:sp>
       <p:cxnSp>
         <p:nvCxnSpPr>
-          <p:cNvPr id="5" name="Connector 4"/>
+          <p:cNvPr id="7" name="Connector 6"/>
           <p:cNvCxnSpPr/>
           <p:nvPr/>
         </p:nvCxnSpPr>
         <p:spPr>
           <a:xfrm>
-            <a:off x="4709160" y="3794760"/>
-            <a:ext cx="0" cy="1280160"/>
+            <a:off x="4937760" y="4617720"/>
+            <a:ext cx="868680" cy="0"/>
           </a:xfrm>
           <a:prstGeom prst="line">
             <a:avLst/>
           </a:prstGeom>
-          <a:ln w="25400">
+          <a:ln w="27940">
             <a:solidFill>
-              <a:srgbClr val="7C5CFF"/>
+              <a:srgbClr val="1EC8E6"/>
             </a:solidFill>
           </a:ln>
         </p:spPr>
@@ -5889,20 +6355,21 @@
           </a:fontRef>
         </p:style>
       </p:cxnSp>
-      <p:cxnSp>
-        <p:nvCxnSpPr>
-          <p:cNvPr id="6" name="Connector 5"/>
-          <p:cNvCxnSpPr/>
-          <p:nvPr/>
-        </p:nvCxnSpPr>
-        <p:spPr>
-          <a:xfrm>
-            <a:off x="4709160" y="5074920"/>
-            <a:ext cx="2788919" cy="0"/>
-          </a:xfrm>
-          <a:prstGeom prst="line">
-            <a:avLst/>
-          </a:prstGeom>
+      <p:sp>
+        <p:nvSpPr>
+          <p:cNvPr id="8" name="Oval 7"/>
+          <p:cNvSpPr/>
+          <p:nvPr/>
+        </p:nvSpPr>
+        <p:spPr>
+          <a:xfrm>
+            <a:off x="6903720" y="4315968"/>
+            <a:ext cx="384048" cy="384048"/>
+          </a:xfrm>
+          <a:prstGeom prst="ellipse">
+            <a:avLst/>
+          </a:prstGeom>
+          <a:noFill/>
           <a:ln w="25400">
             <a:solidFill>
               <a:srgbClr val="7C5CFF"/>
@@ -5910,45 +6377,6 @@
           </a:ln>
         </p:spPr>
         <p:style>
-          <a:lnRef idx="2">
-            <a:schemeClr val="accent1"/>
-          </a:lnRef>
-          <a:fillRef idx="0">
-            <a:schemeClr val="accent1"/>
-          </a:fillRef>
-          <a:effectRef idx="1">
-            <a:schemeClr val="accent1"/>
-          </a:effectRef>
-          <a:fontRef idx="minor">
-            <a:schemeClr val="tx1"/>
-          </a:fontRef>
-        </p:style>
-      </p:cxnSp>
-      <p:sp>
-        <p:nvSpPr>
-          <p:cNvPr id="7" name="Rounded Rectangle 6"/>
-          <p:cNvSpPr/>
-          <p:nvPr/>
-        </p:nvSpPr>
-        <p:spPr>
-          <a:xfrm>
-            <a:off x="4937760" y="4617720"/>
-            <a:ext cx="347472" cy="502920"/>
-          </a:xfrm>
-          <a:prstGeom prst="roundRect">
-            <a:avLst/>
-          </a:prstGeom>
-          <a:solidFill>
-            <a:srgbClr val="1EC8E6">
-              <a:lumMod val="65000"/>
-              <a:lumOff val="35000"/>
-            </a:srgbClr>
-          </a:solidFill>
-          <a:ln>
-            <a:noFill/>
-          </a:ln>
-        </p:spPr>
-        <p:style>
           <a:lnRef idx="1">
             <a:schemeClr val="accent1"/>
           </a:lnRef>
@@ -5972,152 +6400,14 @@
       </p:sp>
       <p:sp>
         <p:nvSpPr>
-          <p:cNvPr id="8" name="Rounded Rectangle 7"/>
-          <p:cNvSpPr/>
-          <p:nvPr/>
-        </p:nvSpPr>
-        <p:spPr>
-          <a:xfrm>
-            <a:off x="5623560" y="4297680"/>
-            <a:ext cx="347472" cy="777240"/>
-          </a:xfrm>
-          <a:prstGeom prst="roundRect">
-            <a:avLst/>
-          </a:prstGeom>
-          <a:solidFill>
-            <a:srgbClr val="7C5CFF">
-              <a:lumMod val="65000"/>
-              <a:lumOff val="35000"/>
-            </a:srgbClr>
-          </a:solidFill>
-          <a:ln>
-            <a:noFill/>
-          </a:ln>
-        </p:spPr>
-        <p:style>
-          <a:lnRef idx="1">
-            <a:schemeClr val="accent1"/>
-          </a:lnRef>
-          <a:fillRef idx="3">
-            <a:schemeClr val="accent1"/>
-          </a:fillRef>
-          <a:effectRef idx="2">
-            <a:schemeClr val="accent1"/>
-          </a:effectRef>
-          <a:fontRef idx="minor">
-            <a:schemeClr val="lt1"/>
-          </a:fontRef>
-        </p:style>
-        <p:txBody>
-          <a:bodyPr rtlCol="0" anchor="ctr"/>
-          <a:lstStyle/>
-          <a:p>
-            <a:pPr algn="ctr"/>
-          </a:p>
-        </p:txBody>
-      </p:sp>
-      <p:sp>
-        <p:nvSpPr>
           <p:cNvPr id="9" name="Rounded Rectangle 8"/>
           <p:cNvSpPr/>
           <p:nvPr/>
         </p:nvSpPr>
         <p:spPr>
           <a:xfrm>
-            <a:off x="6309360" y="4480560"/>
-            <a:ext cx="347472" cy="594360"/>
-          </a:xfrm>
-          <a:prstGeom prst="roundRect">
-            <a:avLst/>
-          </a:prstGeom>
-          <a:solidFill>
-            <a:srgbClr val="1EC8E6">
-              <a:lumMod val="65000"/>
-              <a:lumOff val="35000"/>
-            </a:srgbClr>
-          </a:solidFill>
-          <a:ln>
-            <a:noFill/>
-          </a:ln>
-        </p:spPr>
-        <p:style>
-          <a:lnRef idx="1">
-            <a:schemeClr val="accent1"/>
-          </a:lnRef>
-          <a:fillRef idx="3">
-            <a:schemeClr val="accent1"/>
-          </a:fillRef>
-          <a:effectRef idx="2">
-            <a:schemeClr val="accent1"/>
-          </a:effectRef>
-          <a:fontRef idx="minor">
-            <a:schemeClr val="lt1"/>
-          </a:fontRef>
-        </p:style>
-        <p:txBody>
-          <a:bodyPr rtlCol="0" anchor="ctr"/>
-          <a:lstStyle/>
-          <a:p>
-            <a:pPr algn="ctr"/>
-          </a:p>
-        </p:txBody>
-      </p:sp>
-      <p:sp>
-        <p:nvSpPr>
-          <p:cNvPr id="10" name="Rounded Rectangle 9"/>
-          <p:cNvSpPr/>
-          <p:nvPr/>
-        </p:nvSpPr>
-        <p:spPr>
-          <a:xfrm>
-            <a:off x="6995160" y="4023360"/>
-            <a:ext cx="347472" cy="1051560"/>
-          </a:xfrm>
-          <a:prstGeom prst="roundRect">
-            <a:avLst/>
-          </a:prstGeom>
-          <a:solidFill>
-            <a:srgbClr val="7C5CFF">
-              <a:lumMod val="65000"/>
-              <a:lumOff val="35000"/>
-            </a:srgbClr>
-          </a:solidFill>
-          <a:ln>
-            <a:noFill/>
-          </a:ln>
-        </p:spPr>
-        <p:style>
-          <a:lnRef idx="1">
-            <a:schemeClr val="accent1"/>
-          </a:lnRef>
-          <a:fillRef idx="3">
-            <a:schemeClr val="accent1"/>
-          </a:fillRef>
-          <a:effectRef idx="2">
-            <a:schemeClr val="accent1"/>
-          </a:effectRef>
-          <a:fontRef idx="minor">
-            <a:schemeClr val="lt1"/>
-          </a:fontRef>
-        </p:style>
-        <p:txBody>
-          <a:bodyPr rtlCol="0" anchor="ctr"/>
-          <a:lstStyle/>
-          <a:p>
-            <a:pPr algn="ctr"/>
-          </a:p>
-        </p:txBody>
-      </p:sp>
-      <p:sp>
-        <p:nvSpPr>
-          <p:cNvPr id="11" name="Rounded Rectangle 10"/>
-          <p:cNvSpPr/>
-          <p:nvPr/>
-        </p:nvSpPr>
-        <p:spPr>
-          <a:xfrm>
-            <a:off x="5604357" y="5806440"/>
-            <a:ext cx="982980" cy="384048"/>
+            <a:off x="4838547" y="5806440"/>
+            <a:ext cx="1078992" cy="384048"/>
           </a:xfrm>
           <a:prstGeom prst="roundRect">
             <a:avLst/>
@@ -6153,14 +6443,14 @@
       </p:sp>
       <p:sp>
         <p:nvSpPr>
-          <p:cNvPr id="12" name="TextBox 11"/>
+          <p:cNvPr id="10" name="TextBox 9"/>
           <p:cNvSpPr txBox="1"/>
           <p:nvPr/>
         </p:nvSpPr>
         <p:spPr>
           <a:xfrm>
-            <a:off x="5604357" y="5843016"/>
-            <a:ext cx="982980" cy="329184"/>
+            <a:off x="4838547" y="5843016"/>
+            <a:ext cx="1078992" cy="329184"/>
           </a:xfrm>
           <a:prstGeom prst="rect">
             <a:avLst/>
@@ -6181,7 +6471,85 @@
                 </a:solidFill>
                 <a:latin typeface="Calibri"/>
               </a:rPr>
-              <a:t>PostHog</a:t>
+              <a:t>₹99–₹499</a:t>
+            </a:r>
+          </a:p>
+        </p:txBody>
+      </p:sp>
+      <p:sp>
+        <p:nvSpPr>
+          <p:cNvPr id="11" name="Rounded Rectangle 10"/>
+          <p:cNvSpPr/>
+          <p:nvPr/>
+        </p:nvSpPr>
+        <p:spPr>
+          <a:xfrm>
+            <a:off x="6082131" y="5806440"/>
+            <a:ext cx="1271016" cy="384048"/>
+          </a:xfrm>
+          <a:prstGeom prst="roundRect">
+            <a:avLst/>
+          </a:prstGeom>
+          <a:solidFill>
+            <a:srgbClr val="E8E8ED"/>
+          </a:solidFill>
+          <a:ln>
+            <a:noFill/>
+          </a:ln>
+        </p:spPr>
+        <p:style>
+          <a:lnRef idx="1">
+            <a:schemeClr val="accent1"/>
+          </a:lnRef>
+          <a:fillRef idx="3">
+            <a:schemeClr val="accent1"/>
+          </a:fillRef>
+          <a:effectRef idx="2">
+            <a:schemeClr val="accent1"/>
+          </a:effectRef>
+          <a:fontRef idx="minor">
+            <a:schemeClr val="lt1"/>
+          </a:fontRef>
+        </p:style>
+        <p:txBody>
+          <a:bodyPr rtlCol="0" anchor="ctr"/>
+          <a:lstStyle/>
+          <a:p>
+            <a:pPr algn="ctr"/>
+          </a:p>
+        </p:txBody>
+      </p:sp>
+      <p:sp>
+        <p:nvSpPr>
+          <p:cNvPr id="12" name="TextBox 11"/>
+          <p:cNvSpPr txBox="1"/>
+          <p:nvPr/>
+        </p:nvSpPr>
+        <p:spPr>
+          <a:xfrm>
+            <a:off x="6082131" y="5843016"/>
+            <a:ext cx="1271016" cy="329184"/>
+          </a:xfrm>
+          <a:prstGeom prst="rect">
+            <a:avLst/>
+          </a:prstGeom>
+          <a:noFill/>
+        </p:spPr>
+        <p:txBody>
+          <a:bodyPr wrap="square">
+            <a:spAutoFit/>
+          </a:bodyPr>
+          <a:lstStyle/>
+          <a:p>
+            <a:pPr algn="ctr"/>
+            <a:r>
+              <a:rPr sz="1200" b="1">
+                <a:solidFill>
+                  <a:srgbClr val="1D1D1F"/>
+                </a:solidFill>
+                <a:latin typeface="Calibri"/>
+              </a:rPr>
+              <a:t>₹199/month</a:t>
             </a:r>
           </a:p>
         </p:txBody>
@@ -6255,7 +6623,7 @@
         </p:nvSpPr>
         <p:spPr>
           <a:xfrm>
-            <a:off x="640080" y="1143000"/>
+            <a:off x="640080" y="411480"/>
             <a:ext cx="10881360" cy="1737360"/>
           </a:xfrm>
           <a:prstGeom prst="rect">
@@ -6277,7 +6645,7 @@
                 </a:solidFill>
                 <a:latin typeface="Calibri"/>
               </a:rPr>
-              <a:t>Then give them a place to talk.</a:t>
+              <a:t>Then watch what they do.</a:t>
             </a:r>
           </a:p>
         </p:txBody>
@@ -6290,7 +6658,7 @@
         </p:nvSpPr>
         <p:spPr>
           <a:xfrm>
-            <a:off x="640080" y="2926080"/>
+            <a:off x="640080" y="2194560"/>
             <a:ext cx="10881360" cy="777240"/>
           </a:xfrm>
           <a:prstGeom prst="rect">
@@ -6312,30 +6680,103 @@
                 </a:solidFill>
                 <a:latin typeface="Calibri"/>
               </a:rPr>
-              <a:t>Discord is enough.</a:t>
-            </a:r>
-          </a:p>
-        </p:txBody>
-      </p:sp>
-      <p:sp>
-        <p:nvSpPr>
-          <p:cNvPr id="5" name="Rounded Rectangle 4"/>
-          <p:cNvSpPr/>
-          <p:nvPr/>
-        </p:nvSpPr>
+              <a:t>One analytics tool is enough.</a:t>
+            </a:r>
+          </a:p>
+        </p:txBody>
+      </p:sp>
+      <p:cxnSp>
+        <p:nvCxnSpPr>
+          <p:cNvPr id="5" name="Connector 4"/>
+          <p:cNvCxnSpPr/>
+          <p:nvPr/>
+        </p:nvCxnSpPr>
         <p:spPr>
           <a:xfrm>
             <a:off x="4709160" y="3794760"/>
-            <a:ext cx="1554480" cy="777240"/>
-          </a:xfrm>
-          <a:prstGeom prst="roundRect">
-            <a:avLst/>
-          </a:prstGeom>
-          <a:noFill/>
-          <a:ln w="27940">
+            <a:ext cx="0" cy="1280160"/>
+          </a:xfrm>
+          <a:prstGeom prst="line">
+            <a:avLst/>
+          </a:prstGeom>
+          <a:ln w="25400">
             <a:solidFill>
               <a:srgbClr val="7C5CFF"/>
             </a:solidFill>
+          </a:ln>
+        </p:spPr>
+        <p:style>
+          <a:lnRef idx="2">
+            <a:schemeClr val="accent1"/>
+          </a:lnRef>
+          <a:fillRef idx="0">
+            <a:schemeClr val="accent1"/>
+          </a:fillRef>
+          <a:effectRef idx="1">
+            <a:schemeClr val="accent1"/>
+          </a:effectRef>
+          <a:fontRef idx="minor">
+            <a:schemeClr val="tx1"/>
+          </a:fontRef>
+        </p:style>
+      </p:cxnSp>
+      <p:cxnSp>
+        <p:nvCxnSpPr>
+          <p:cNvPr id="6" name="Connector 5"/>
+          <p:cNvCxnSpPr/>
+          <p:nvPr/>
+        </p:nvCxnSpPr>
+        <p:spPr>
+          <a:xfrm>
+            <a:off x="4709160" y="5074920"/>
+            <a:ext cx="2788919" cy="0"/>
+          </a:xfrm>
+          <a:prstGeom prst="line">
+            <a:avLst/>
+          </a:prstGeom>
+          <a:ln w="25400">
+            <a:solidFill>
+              <a:srgbClr val="7C5CFF"/>
+            </a:solidFill>
+          </a:ln>
+        </p:spPr>
+        <p:style>
+          <a:lnRef idx="2">
+            <a:schemeClr val="accent1"/>
+          </a:lnRef>
+          <a:fillRef idx="0">
+            <a:schemeClr val="accent1"/>
+          </a:fillRef>
+          <a:effectRef idx="1">
+            <a:schemeClr val="accent1"/>
+          </a:effectRef>
+          <a:fontRef idx="minor">
+            <a:schemeClr val="tx1"/>
+          </a:fontRef>
+        </p:style>
+      </p:cxnSp>
+      <p:sp>
+        <p:nvSpPr>
+          <p:cNvPr id="7" name="Rounded Rectangle 6"/>
+          <p:cNvSpPr/>
+          <p:nvPr/>
+        </p:nvSpPr>
+        <p:spPr>
+          <a:xfrm>
+            <a:off x="4937760" y="4617720"/>
+            <a:ext cx="347472" cy="502920"/>
+          </a:xfrm>
+          <a:prstGeom prst="roundRect">
+            <a:avLst/>
+          </a:prstGeom>
+          <a:solidFill>
+            <a:srgbClr val="1EC8E6">
+              <a:lumMod val="65000"/>
+              <a:lumOff val="35000"/>
+            </a:srgbClr>
+          </a:solidFill>
+          <a:ln>
+            <a:noFill/>
           </a:ln>
         </p:spPr>
         <p:style>
@@ -6362,23 +6803,26 @@
       </p:sp>
       <p:sp>
         <p:nvSpPr>
-          <p:cNvPr id="6" name="Rounded Rectangle 5"/>
+          <p:cNvPr id="8" name="Rounded Rectangle 7"/>
           <p:cNvSpPr/>
           <p:nvPr/>
         </p:nvSpPr>
         <p:spPr>
           <a:xfrm>
-            <a:off x="5943600" y="4434840"/>
-            <a:ext cx="1554480" cy="658368"/>
+            <a:off x="5623560" y="4297680"/>
+            <a:ext cx="347472" cy="777240"/>
           </a:xfrm>
           <a:prstGeom prst="roundRect">
             <a:avLst/>
           </a:prstGeom>
-          <a:noFill/>
-          <a:ln w="27940">
-            <a:solidFill>
-              <a:srgbClr val="1EC8E6"/>
-            </a:solidFill>
+          <a:solidFill>
+            <a:srgbClr val="7C5CFF">
+              <a:lumMod val="65000"/>
+              <a:lumOff val="35000"/>
+            </a:srgbClr>
+          </a:solidFill>
+          <a:ln>
+            <a:noFill/>
           </a:ln>
         </p:spPr>
         <p:style>
@@ -6405,20 +6849,23 @@
       </p:sp>
       <p:sp>
         <p:nvSpPr>
-          <p:cNvPr id="7" name="Oval 6"/>
+          <p:cNvPr id="9" name="Rounded Rectangle 8"/>
           <p:cNvSpPr/>
           <p:nvPr/>
         </p:nvSpPr>
         <p:spPr>
           <a:xfrm>
-            <a:off x="4983480" y="4069080"/>
-            <a:ext cx="164592" cy="164592"/>
-          </a:xfrm>
-          <a:prstGeom prst="ellipse">
+            <a:off x="6309360" y="4480560"/>
+            <a:ext cx="347472" cy="594360"/>
+          </a:xfrm>
+          <a:prstGeom prst="roundRect">
             <a:avLst/>
           </a:prstGeom>
           <a:solidFill>
-            <a:srgbClr val="1EC8E6"/>
+            <a:srgbClr val="1EC8E6">
+              <a:lumMod val="65000"/>
+              <a:lumOff val="35000"/>
+            </a:srgbClr>
           </a:solidFill>
           <a:ln>
             <a:noFill/>
@@ -6448,20 +6895,23 @@
       </p:sp>
       <p:sp>
         <p:nvSpPr>
-          <p:cNvPr id="8" name="Oval 7"/>
+          <p:cNvPr id="10" name="Rounded Rectangle 9"/>
           <p:cNvSpPr/>
           <p:nvPr/>
         </p:nvSpPr>
         <p:spPr>
           <a:xfrm>
-            <a:off x="5276088" y="4069080"/>
-            <a:ext cx="164592" cy="164592"/>
-          </a:xfrm>
-          <a:prstGeom prst="ellipse">
+            <a:off x="6995160" y="4023360"/>
+            <a:ext cx="347472" cy="1051560"/>
+          </a:xfrm>
+          <a:prstGeom prst="roundRect">
             <a:avLst/>
           </a:prstGeom>
           <a:solidFill>
-            <a:srgbClr val="7C5CFF"/>
+            <a:srgbClr val="7C5CFF">
+              <a:lumMod val="65000"/>
+              <a:lumOff val="35000"/>
+            </a:srgbClr>
           </a:solidFill>
           <a:ln>
             <a:noFill/>
@@ -6491,20 +6941,20 @@
       </p:sp>
       <p:sp>
         <p:nvSpPr>
-          <p:cNvPr id="9" name="Oval 8"/>
+          <p:cNvPr id="11" name="Rounded Rectangle 10"/>
           <p:cNvSpPr/>
           <p:nvPr/>
         </p:nvSpPr>
         <p:spPr>
           <a:xfrm>
-            <a:off x="5568696" y="4069080"/>
-            <a:ext cx="164592" cy="164592"/>
-          </a:xfrm>
-          <a:prstGeom prst="ellipse">
+            <a:off x="767181" y="5349240"/>
+            <a:ext cx="982980" cy="384048"/>
+          </a:xfrm>
+          <a:prstGeom prst="roundRect">
             <a:avLst/>
           </a:prstGeom>
           <a:solidFill>
-            <a:srgbClr val="1EC8E6"/>
+            <a:srgbClr val="E8E8ED"/>
           </a:solidFill>
           <a:ln>
             <a:noFill/>
@@ -6529,6 +6979,466 @@
           <a:lstStyle/>
           <a:p>
             <a:pPr algn="ctr"/>
+          </a:p>
+        </p:txBody>
+      </p:sp>
+      <p:sp>
+        <p:nvSpPr>
+          <p:cNvPr id="12" name="TextBox 11"/>
+          <p:cNvSpPr txBox="1"/>
+          <p:nvPr/>
+        </p:nvSpPr>
+        <p:spPr>
+          <a:xfrm>
+            <a:off x="767181" y="5385816"/>
+            <a:ext cx="982980" cy="329184"/>
+          </a:xfrm>
+          <a:prstGeom prst="rect">
+            <a:avLst/>
+          </a:prstGeom>
+          <a:noFill/>
+        </p:spPr>
+        <p:txBody>
+          <a:bodyPr wrap="square">
+            <a:spAutoFit/>
+          </a:bodyPr>
+          <a:lstStyle/>
+          <a:p>
+            <a:pPr algn="ctr"/>
+            <a:r>
+              <a:rPr sz="1200" b="1">
+                <a:solidFill>
+                  <a:srgbClr val="1D1D1F"/>
+                </a:solidFill>
+                <a:latin typeface="Calibri"/>
+              </a:rPr>
+              <a:t>PostHog</a:t>
+            </a:r>
+          </a:p>
+        </p:txBody>
+      </p:sp>
+      <p:sp>
+        <p:nvSpPr>
+          <p:cNvPr id="13" name="Rounded Rectangle 12"/>
+          <p:cNvSpPr/>
+          <p:nvPr/>
+        </p:nvSpPr>
+        <p:spPr>
+          <a:xfrm>
+            <a:off x="1914753" y="5349240"/>
+            <a:ext cx="1847088" cy="384048"/>
+          </a:xfrm>
+          <a:prstGeom prst="roundRect">
+            <a:avLst/>
+          </a:prstGeom>
+          <a:solidFill>
+            <a:srgbClr val="E8E8ED"/>
+          </a:solidFill>
+          <a:ln>
+            <a:noFill/>
+          </a:ln>
+        </p:spPr>
+        <p:style>
+          <a:lnRef idx="1">
+            <a:schemeClr val="accent1"/>
+          </a:lnRef>
+          <a:fillRef idx="3">
+            <a:schemeClr val="accent1"/>
+          </a:fillRef>
+          <a:effectRef idx="2">
+            <a:schemeClr val="accent1"/>
+          </a:effectRef>
+          <a:fontRef idx="minor">
+            <a:schemeClr val="lt1"/>
+          </a:fontRef>
+        </p:style>
+        <p:txBody>
+          <a:bodyPr rtlCol="0" anchor="ctr"/>
+          <a:lstStyle/>
+          <a:p>
+            <a:pPr algn="ctr"/>
+          </a:p>
+        </p:txBody>
+      </p:sp>
+      <p:sp>
+        <p:nvSpPr>
+          <p:cNvPr id="14" name="TextBox 13"/>
+          <p:cNvSpPr txBox="1"/>
+          <p:nvPr/>
+        </p:nvSpPr>
+        <p:spPr>
+          <a:xfrm>
+            <a:off x="1914753" y="5385816"/>
+            <a:ext cx="1847088" cy="329184"/>
+          </a:xfrm>
+          <a:prstGeom prst="rect">
+            <a:avLst/>
+          </a:prstGeom>
+          <a:noFill/>
+        </p:spPr>
+        <p:txBody>
+          <a:bodyPr wrap="square">
+            <a:spAutoFit/>
+          </a:bodyPr>
+          <a:lstStyle/>
+          <a:p>
+            <a:pPr algn="ctr"/>
+            <a:r>
+              <a:rPr sz="1200" b="1">
+                <a:solidFill>
+                  <a:srgbClr val="1D1D1F"/>
+                </a:solidFill>
+                <a:latin typeface="Calibri"/>
+              </a:rPr>
+              <a:t>Google Analytics</a:t>
+            </a:r>
+          </a:p>
+        </p:txBody>
+      </p:sp>
+      <p:sp>
+        <p:nvSpPr>
+          <p:cNvPr id="15" name="Rounded Rectangle 14"/>
+          <p:cNvSpPr/>
+          <p:nvPr/>
+        </p:nvSpPr>
+        <p:spPr>
+          <a:xfrm>
+            <a:off x="3926433" y="5349240"/>
+            <a:ext cx="1175004" cy="384048"/>
+          </a:xfrm>
+          <a:prstGeom prst="roundRect">
+            <a:avLst/>
+          </a:prstGeom>
+          <a:solidFill>
+            <a:srgbClr val="E8E8ED"/>
+          </a:solidFill>
+          <a:ln>
+            <a:noFill/>
+          </a:ln>
+        </p:spPr>
+        <p:style>
+          <a:lnRef idx="1">
+            <a:schemeClr val="accent1"/>
+          </a:lnRef>
+          <a:fillRef idx="3">
+            <a:schemeClr val="accent1"/>
+          </a:fillRef>
+          <a:effectRef idx="2">
+            <a:schemeClr val="accent1"/>
+          </a:effectRef>
+          <a:fontRef idx="minor">
+            <a:schemeClr val="lt1"/>
+          </a:fontRef>
+        </p:style>
+        <p:txBody>
+          <a:bodyPr rtlCol="0" anchor="ctr"/>
+          <a:lstStyle/>
+          <a:p>
+            <a:pPr algn="ctr"/>
+          </a:p>
+        </p:txBody>
+      </p:sp>
+      <p:sp>
+        <p:nvSpPr>
+          <p:cNvPr id="16" name="TextBox 15"/>
+          <p:cNvSpPr txBox="1"/>
+          <p:nvPr/>
+        </p:nvSpPr>
+        <p:spPr>
+          <a:xfrm>
+            <a:off x="3926433" y="5385816"/>
+            <a:ext cx="1175004" cy="329184"/>
+          </a:xfrm>
+          <a:prstGeom prst="rect">
+            <a:avLst/>
+          </a:prstGeom>
+          <a:noFill/>
+        </p:spPr>
+        <p:txBody>
+          <a:bodyPr wrap="square">
+            <a:spAutoFit/>
+          </a:bodyPr>
+          <a:lstStyle/>
+          <a:p>
+            <a:pPr algn="ctr"/>
+            <a:r>
+              <a:rPr sz="1200" b="1">
+                <a:solidFill>
+                  <a:srgbClr val="1D1D1F"/>
+                </a:solidFill>
+                <a:latin typeface="Calibri"/>
+              </a:rPr>
+              <a:t>Plausible</a:t>
+            </a:r>
+          </a:p>
+        </p:txBody>
+      </p:sp>
+      <p:sp>
+        <p:nvSpPr>
+          <p:cNvPr id="17" name="Rounded Rectangle 16"/>
+          <p:cNvSpPr/>
+          <p:nvPr/>
+        </p:nvSpPr>
+        <p:spPr>
+          <a:xfrm>
+            <a:off x="5266029" y="5349240"/>
+            <a:ext cx="2039112" cy="384048"/>
+          </a:xfrm>
+          <a:prstGeom prst="roundRect">
+            <a:avLst/>
+          </a:prstGeom>
+          <a:solidFill>
+            <a:srgbClr val="E8E8ED"/>
+          </a:solidFill>
+          <a:ln>
+            <a:noFill/>
+          </a:ln>
+        </p:spPr>
+        <p:style>
+          <a:lnRef idx="1">
+            <a:schemeClr val="accent1"/>
+          </a:lnRef>
+          <a:fillRef idx="3">
+            <a:schemeClr val="accent1"/>
+          </a:fillRef>
+          <a:effectRef idx="2">
+            <a:schemeClr val="accent1"/>
+          </a:effectRef>
+          <a:fontRef idx="minor">
+            <a:schemeClr val="lt1"/>
+          </a:fontRef>
+        </p:style>
+        <p:txBody>
+          <a:bodyPr rtlCol="0" anchor="ctr"/>
+          <a:lstStyle/>
+          <a:p>
+            <a:pPr algn="ctr"/>
+          </a:p>
+        </p:txBody>
+      </p:sp>
+      <p:sp>
+        <p:nvSpPr>
+          <p:cNvPr id="18" name="TextBox 17"/>
+          <p:cNvSpPr txBox="1"/>
+          <p:nvPr/>
+        </p:nvSpPr>
+        <p:spPr>
+          <a:xfrm>
+            <a:off x="5266029" y="5385816"/>
+            <a:ext cx="2039112" cy="329184"/>
+          </a:xfrm>
+          <a:prstGeom prst="rect">
+            <a:avLst/>
+          </a:prstGeom>
+          <a:noFill/>
+        </p:spPr>
+        <p:txBody>
+          <a:bodyPr wrap="square">
+            <a:spAutoFit/>
+          </a:bodyPr>
+          <a:lstStyle/>
+          <a:p>
+            <a:pPr algn="ctr"/>
+            <a:r>
+              <a:rPr sz="1200" b="1">
+                <a:solidFill>
+                  <a:srgbClr val="1D1D1F"/>
+                </a:solidFill>
+                <a:latin typeface="Calibri"/>
+              </a:rPr>
+              <a:t>Firebase Analytics</a:t>
+            </a:r>
+          </a:p>
+        </p:txBody>
+      </p:sp>
+      <p:sp>
+        <p:nvSpPr>
+          <p:cNvPr id="19" name="Rounded Rectangle 18"/>
+          <p:cNvSpPr/>
+          <p:nvPr/>
+        </p:nvSpPr>
+        <p:spPr>
+          <a:xfrm>
+            <a:off x="7469733" y="5349240"/>
+            <a:ext cx="1367028" cy="384048"/>
+          </a:xfrm>
+          <a:prstGeom prst="roundRect">
+            <a:avLst/>
+          </a:prstGeom>
+          <a:solidFill>
+            <a:srgbClr val="E8E8ED"/>
+          </a:solidFill>
+          <a:ln>
+            <a:noFill/>
+          </a:ln>
+        </p:spPr>
+        <p:style>
+          <a:lnRef idx="1">
+            <a:schemeClr val="accent1"/>
+          </a:lnRef>
+          <a:fillRef idx="3">
+            <a:schemeClr val="accent1"/>
+          </a:fillRef>
+          <a:effectRef idx="2">
+            <a:schemeClr val="accent1"/>
+          </a:effectRef>
+          <a:fontRef idx="minor">
+            <a:schemeClr val="lt1"/>
+          </a:fontRef>
+        </p:style>
+        <p:txBody>
+          <a:bodyPr rtlCol="0" anchor="ctr"/>
+          <a:lstStyle/>
+          <a:p>
+            <a:pPr algn="ctr"/>
+          </a:p>
+        </p:txBody>
+      </p:sp>
+      <p:sp>
+        <p:nvSpPr>
+          <p:cNvPr id="20" name="TextBox 19"/>
+          <p:cNvSpPr txBox="1"/>
+          <p:nvPr/>
+        </p:nvSpPr>
+        <p:spPr>
+          <a:xfrm>
+            <a:off x="7469733" y="5385816"/>
+            <a:ext cx="1367028" cy="329184"/>
+          </a:xfrm>
+          <a:prstGeom prst="rect">
+            <a:avLst/>
+          </a:prstGeom>
+          <a:noFill/>
+        </p:spPr>
+        <p:txBody>
+          <a:bodyPr wrap="square">
+            <a:spAutoFit/>
+          </a:bodyPr>
+          <a:lstStyle/>
+          <a:p>
+            <a:pPr algn="ctr"/>
+            <a:r>
+              <a:rPr sz="1200" b="1">
+                <a:solidFill>
+                  <a:srgbClr val="1D1D1F"/>
+                </a:solidFill>
+                <a:latin typeface="Calibri"/>
+              </a:rPr>
+              <a:t>Crashlytics</a:t>
+            </a:r>
+          </a:p>
+        </p:txBody>
+      </p:sp>
+      <p:sp>
+        <p:nvSpPr>
+          <p:cNvPr id="21" name="Rounded Rectangle 20"/>
+          <p:cNvSpPr/>
+          <p:nvPr/>
+        </p:nvSpPr>
+        <p:spPr>
+          <a:xfrm>
+            <a:off x="9001353" y="5349240"/>
+            <a:ext cx="2423160" cy="384048"/>
+          </a:xfrm>
+          <a:prstGeom prst="roundRect">
+            <a:avLst/>
+          </a:prstGeom>
+          <a:solidFill>
+            <a:srgbClr val="E8E8ED"/>
+          </a:solidFill>
+          <a:ln>
+            <a:noFill/>
+          </a:ln>
+        </p:spPr>
+        <p:style>
+          <a:lnRef idx="1">
+            <a:schemeClr val="accent1"/>
+          </a:lnRef>
+          <a:fillRef idx="3">
+            <a:schemeClr val="accent1"/>
+          </a:fillRef>
+          <a:effectRef idx="2">
+            <a:schemeClr val="accent1"/>
+          </a:effectRef>
+          <a:fontRef idx="minor">
+            <a:schemeClr val="lt1"/>
+          </a:fontRef>
+        </p:style>
+        <p:txBody>
+          <a:bodyPr rtlCol="0" anchor="ctr"/>
+          <a:lstStyle/>
+          <a:p>
+            <a:pPr algn="ctr"/>
+          </a:p>
+        </p:txBody>
+      </p:sp>
+      <p:sp>
+        <p:nvSpPr>
+          <p:cNvPr id="22" name="TextBox 21"/>
+          <p:cNvSpPr txBox="1"/>
+          <p:nvPr/>
+        </p:nvSpPr>
+        <p:spPr>
+          <a:xfrm>
+            <a:off x="9001353" y="5385816"/>
+            <a:ext cx="2423160" cy="329184"/>
+          </a:xfrm>
+          <a:prstGeom prst="rect">
+            <a:avLst/>
+          </a:prstGeom>
+          <a:noFill/>
+        </p:spPr>
+        <p:txBody>
+          <a:bodyPr wrap="square">
+            <a:spAutoFit/>
+          </a:bodyPr>
+          <a:lstStyle/>
+          <a:p>
+            <a:pPr algn="ctr"/>
+            <a:r>
+              <a:rPr sz="1200" b="1">
+                <a:solidFill>
+                  <a:srgbClr val="1D1D1F"/>
+                </a:solidFill>
+                <a:latin typeface="Calibri"/>
+              </a:rPr>
+              <a:t>Performance Monitoring</a:t>
+            </a:r>
+          </a:p>
+        </p:txBody>
+      </p:sp>
+      <p:sp>
+        <p:nvSpPr>
+          <p:cNvPr id="23" name="TextBox 22"/>
+          <p:cNvSpPr txBox="1"/>
+          <p:nvPr/>
+        </p:nvSpPr>
+        <p:spPr>
+          <a:xfrm>
+            <a:off x="640080" y="5897880"/>
+            <a:ext cx="10881360" cy="457200"/>
+          </a:xfrm>
+          <a:prstGeom prst="rect">
+            <a:avLst/>
+          </a:prstGeom>
+          <a:noFill/>
+        </p:spPr>
+        <p:txBody>
+          <a:bodyPr wrap="square">
+            <a:spAutoFit/>
+          </a:bodyPr>
+          <a:lstStyle/>
+          <a:p>
+            <a:pPr algn="ctr"/>
+            <a:r>
+              <a:rPr sz="1600" b="0">
+                <a:solidFill>
+                  <a:srgbClr val="6E6E73"/>
+                </a:solidFill>
+                <a:latin typeface="Calibri"/>
+              </a:rPr>
+              <a:t>Most of these Firebase products are free.</a:t>
+            </a:r>
           </a:p>
         </p:txBody>
       </p:sp>
@@ -6601,7 +7511,7 @@
         </p:nvSpPr>
         <p:spPr>
           <a:xfrm>
-            <a:off x="640080" y="1874519"/>
+            <a:off x="640080" y="411480"/>
             <a:ext cx="10881360" cy="1737360"/>
           </a:xfrm>
           <a:prstGeom prst="rect">
@@ -6623,7 +7533,7 @@
                 </a:solidFill>
                 <a:latin typeface="Calibri"/>
               </a:rPr>
-              <a:t>They stay when you solve the next problem.</a:t>
+              <a:t>Growth is a system you can learn.</a:t>
             </a:r>
           </a:p>
         </p:txBody>
@@ -6636,7 +7546,7 @@
         </p:nvSpPr>
         <p:spPr>
           <a:xfrm>
-            <a:off x="640080" y="3657600"/>
+            <a:off x="640080" y="2194560"/>
             <a:ext cx="10881360" cy="777240"/>
           </a:xfrm>
           <a:prstGeom prst="rect">
@@ -6658,7 +7568,346 @@
                 </a:solidFill>
                 <a:latin typeface="Calibri"/>
               </a:rPr>
-              <a:t>Likes are not customers.</a:t>
+              <a:t>Ads, experiments, and the event stream.</a:t>
+            </a:r>
+          </a:p>
+        </p:txBody>
+      </p:sp>
+      <p:sp>
+        <p:nvSpPr>
+          <p:cNvPr id="5" name="Rounded Rectangle 4"/>
+          <p:cNvSpPr/>
+          <p:nvPr/>
+        </p:nvSpPr>
+        <p:spPr>
+          <a:xfrm>
+            <a:off x="1025499" y="3063240"/>
+            <a:ext cx="3246120" cy="2148840"/>
+          </a:xfrm>
+          <a:prstGeom prst="roundRect">
+            <a:avLst/>
+          </a:prstGeom>
+          <a:solidFill>
+            <a:srgbClr val="FFFFFF"/>
+          </a:solidFill>
+          <a:ln>
+            <a:noFill/>
+          </a:ln>
+        </p:spPr>
+        <p:style>
+          <a:lnRef idx="1">
+            <a:schemeClr val="accent1"/>
+          </a:lnRef>
+          <a:fillRef idx="3">
+            <a:schemeClr val="accent1"/>
+          </a:fillRef>
+          <a:effectRef idx="2">
+            <a:schemeClr val="accent1"/>
+          </a:effectRef>
+          <a:fontRef idx="minor">
+            <a:schemeClr val="lt1"/>
+          </a:fontRef>
+        </p:style>
+        <p:txBody>
+          <a:bodyPr rtlCol="0" anchor="ctr"/>
+          <a:lstStyle/>
+          <a:p>
+            <a:pPr algn="ctr"/>
+          </a:p>
+        </p:txBody>
+      </p:sp>
+      <p:sp>
+        <p:nvSpPr>
+          <p:cNvPr id="6" name="TextBox 5"/>
+          <p:cNvSpPr txBox="1"/>
+          <p:nvPr/>
+        </p:nvSpPr>
+        <p:spPr>
+          <a:xfrm>
+            <a:off x="1162659" y="3319272"/>
+            <a:ext cx="2971800" cy="411480"/>
+          </a:xfrm>
+          <a:prstGeom prst="rect">
+            <a:avLst/>
+          </a:prstGeom>
+          <a:noFill/>
+        </p:spPr>
+        <p:txBody>
+          <a:bodyPr wrap="square">
+            <a:spAutoFit/>
+          </a:bodyPr>
+          <a:lstStyle/>
+          <a:p>
+            <a:pPr algn="ctr"/>
+            <a:r>
+              <a:rPr sz="1800" b="1">
+                <a:solidFill>
+                  <a:srgbClr val="1D1D1F"/>
+                </a:solidFill>
+                <a:latin typeface="Calibri"/>
+              </a:rPr>
+              <a:t>Ads</a:t>
+            </a:r>
+          </a:p>
+        </p:txBody>
+      </p:sp>
+      <p:sp>
+        <p:nvSpPr>
+          <p:cNvPr id="7" name="TextBox 6"/>
+          <p:cNvSpPr txBox="1"/>
+          <p:nvPr/>
+        </p:nvSpPr>
+        <p:spPr>
+          <a:xfrm>
+            <a:off x="1190091" y="3840480"/>
+            <a:ext cx="2916936" cy="1143000"/>
+          </a:xfrm>
+          <a:prstGeom prst="rect">
+            <a:avLst/>
+          </a:prstGeom>
+          <a:noFill/>
+        </p:spPr>
+        <p:txBody>
+          <a:bodyPr wrap="square">
+            <a:spAutoFit/>
+          </a:bodyPr>
+          <a:lstStyle/>
+          <a:p>
+            <a:pPr algn="ctr"/>
+            <a:r>
+              <a:rPr sz="1400" b="0">
+                <a:solidFill>
+                  <a:srgbClr val="6E6E73"/>
+                </a:solidFill>
+                <a:latin typeface="Calibri"/>
+              </a:rPr>
+              <a:t>Google Ads. Meta ads. Apple Search Ads.</a:t>
+            </a:r>
+          </a:p>
+        </p:txBody>
+      </p:sp>
+      <p:sp>
+        <p:nvSpPr>
+          <p:cNvPr id="8" name="Rounded Rectangle 7"/>
+          <p:cNvSpPr/>
+          <p:nvPr/>
+        </p:nvSpPr>
+        <p:spPr>
+          <a:xfrm>
+            <a:off x="4472787" y="3063240"/>
+            <a:ext cx="3246120" cy="2148840"/>
+          </a:xfrm>
+          <a:prstGeom prst="roundRect">
+            <a:avLst/>
+          </a:prstGeom>
+          <a:solidFill>
+            <a:srgbClr val="FFFFFF"/>
+          </a:solidFill>
+          <a:ln>
+            <a:noFill/>
+          </a:ln>
+        </p:spPr>
+        <p:style>
+          <a:lnRef idx="1">
+            <a:schemeClr val="accent1"/>
+          </a:lnRef>
+          <a:fillRef idx="3">
+            <a:schemeClr val="accent1"/>
+          </a:fillRef>
+          <a:effectRef idx="2">
+            <a:schemeClr val="accent1"/>
+          </a:effectRef>
+          <a:fontRef idx="minor">
+            <a:schemeClr val="lt1"/>
+          </a:fontRef>
+        </p:style>
+        <p:txBody>
+          <a:bodyPr rtlCol="0" anchor="ctr"/>
+          <a:lstStyle/>
+          <a:p>
+            <a:pPr algn="ctr"/>
+          </a:p>
+        </p:txBody>
+      </p:sp>
+      <p:sp>
+        <p:nvSpPr>
+          <p:cNvPr id="9" name="TextBox 8"/>
+          <p:cNvSpPr txBox="1"/>
+          <p:nvPr/>
+        </p:nvSpPr>
+        <p:spPr>
+          <a:xfrm>
+            <a:off x="4609947" y="3319272"/>
+            <a:ext cx="2971800" cy="411480"/>
+          </a:xfrm>
+          <a:prstGeom prst="rect">
+            <a:avLst/>
+          </a:prstGeom>
+          <a:noFill/>
+        </p:spPr>
+        <p:txBody>
+          <a:bodyPr wrap="square">
+            <a:spAutoFit/>
+          </a:bodyPr>
+          <a:lstStyle/>
+          <a:p>
+            <a:pPr algn="ctr"/>
+            <a:r>
+              <a:rPr sz="1800" b="1">
+                <a:solidFill>
+                  <a:srgbClr val="1D1D1F"/>
+                </a:solidFill>
+                <a:latin typeface="Calibri"/>
+              </a:rPr>
+              <a:t>Experiments</a:t>
+            </a:r>
+          </a:p>
+        </p:txBody>
+      </p:sp>
+      <p:sp>
+        <p:nvSpPr>
+          <p:cNvPr id="10" name="TextBox 9"/>
+          <p:cNvSpPr txBox="1"/>
+          <p:nvPr/>
+        </p:nvSpPr>
+        <p:spPr>
+          <a:xfrm>
+            <a:off x="4637379" y="3840480"/>
+            <a:ext cx="2916936" cy="1143000"/>
+          </a:xfrm>
+          <a:prstGeom prst="rect">
+            <a:avLst/>
+          </a:prstGeom>
+          <a:noFill/>
+        </p:spPr>
+        <p:txBody>
+          <a:bodyPr wrap="square">
+            <a:spAutoFit/>
+          </a:bodyPr>
+          <a:lstStyle/>
+          <a:p>
+            <a:pPr algn="ctr"/>
+            <a:r>
+              <a:rPr sz="1400" b="0">
+                <a:solidFill>
+                  <a:srgbClr val="6E6E73"/>
+                </a:solidFill>
+                <a:latin typeface="Calibri"/>
+              </a:rPr>
+              <a:t>PostHog experiments. GrowthBook. Firebase A/B Testing.</a:t>
+            </a:r>
+          </a:p>
+        </p:txBody>
+      </p:sp>
+      <p:sp>
+        <p:nvSpPr>
+          <p:cNvPr id="11" name="Rounded Rectangle 10"/>
+          <p:cNvSpPr/>
+          <p:nvPr/>
+        </p:nvSpPr>
+        <p:spPr>
+          <a:xfrm>
+            <a:off x="7920075" y="3063240"/>
+            <a:ext cx="3246120" cy="2148840"/>
+          </a:xfrm>
+          <a:prstGeom prst="roundRect">
+            <a:avLst/>
+          </a:prstGeom>
+          <a:solidFill>
+            <a:srgbClr val="FFFFFF"/>
+          </a:solidFill>
+          <a:ln>
+            <a:noFill/>
+          </a:ln>
+        </p:spPr>
+        <p:style>
+          <a:lnRef idx="1">
+            <a:schemeClr val="accent1"/>
+          </a:lnRef>
+          <a:fillRef idx="3">
+            <a:schemeClr val="accent1"/>
+          </a:fillRef>
+          <a:effectRef idx="2">
+            <a:schemeClr val="accent1"/>
+          </a:effectRef>
+          <a:fontRef idx="minor">
+            <a:schemeClr val="lt1"/>
+          </a:fontRef>
+        </p:style>
+        <p:txBody>
+          <a:bodyPr rtlCol="0" anchor="ctr"/>
+          <a:lstStyle/>
+          <a:p>
+            <a:pPr algn="ctr"/>
+          </a:p>
+        </p:txBody>
+      </p:sp>
+      <p:sp>
+        <p:nvSpPr>
+          <p:cNvPr id="12" name="TextBox 11"/>
+          <p:cNvSpPr txBox="1"/>
+          <p:nvPr/>
+        </p:nvSpPr>
+        <p:spPr>
+          <a:xfrm>
+            <a:off x="8057235" y="3319272"/>
+            <a:ext cx="2971800" cy="411480"/>
+          </a:xfrm>
+          <a:prstGeom prst="rect">
+            <a:avLst/>
+          </a:prstGeom>
+          <a:noFill/>
+        </p:spPr>
+        <p:txBody>
+          <a:bodyPr wrap="square">
+            <a:spAutoFit/>
+          </a:bodyPr>
+          <a:lstStyle/>
+          <a:p>
+            <a:pPr algn="ctr"/>
+            <a:r>
+              <a:rPr sz="1800" b="1">
+                <a:solidFill>
+                  <a:srgbClr val="1D1D1F"/>
+                </a:solidFill>
+                <a:latin typeface="Calibri"/>
+              </a:rPr>
+              <a:t>The stream</a:t>
+            </a:r>
+          </a:p>
+        </p:txBody>
+      </p:sp>
+      <p:sp>
+        <p:nvSpPr>
+          <p:cNvPr id="13" name="TextBox 12"/>
+          <p:cNvSpPr txBox="1"/>
+          <p:nvPr/>
+        </p:nvSpPr>
+        <p:spPr>
+          <a:xfrm>
+            <a:off x="8084667" y="3840480"/>
+            <a:ext cx="2916936" cy="1143000"/>
+          </a:xfrm>
+          <a:prstGeom prst="rect">
+            <a:avLst/>
+          </a:prstGeom>
+          <a:noFill/>
+        </p:spPr>
+        <p:txBody>
+          <a:bodyPr wrap="square">
+            <a:spAutoFit/>
+          </a:bodyPr>
+          <a:lstStyle/>
+          <a:p>
+            <a:pPr algn="ctr"/>
+            <a:r>
+              <a:rPr sz="1400" b="0">
+                <a:solidFill>
+                  <a:srgbClr val="6E6E73"/>
+                </a:solidFill>
+                <a:latin typeface="Calibri"/>
+              </a:rPr>
+              <a:t>Events you already track. A flag ships a variant. Keep the winner.</a:t>
             </a:r>
           </a:p>
         </p:txBody>
@@ -6732,7 +7981,7 @@
         </p:nvSpPr>
         <p:spPr>
           <a:xfrm>
-            <a:off x="640080" y="1325880"/>
+            <a:off x="640080" y="1143000"/>
             <a:ext cx="10881360" cy="1737360"/>
           </a:xfrm>
           <a:prstGeom prst="rect">
@@ -6748,13 +7997,13 @@
           <a:p>
             <a:pPr algn="ctr"/>
             <a:r>
-              <a:rPr sz="2800" b="1">
+              <a:rPr sz="3200" b="1">
                 <a:solidFill>
                   <a:srgbClr val="1D1D1F"/>
                 </a:solidFill>
                 <a:latin typeface="Calibri"/>
               </a:rPr>
-              <a:t>Your first paying customer beats another feature.</a:t>
+              <a:t>Then give them a place to talk.</a:t>
             </a:r>
           </a:p>
         </p:txBody>
@@ -6767,7 +8016,7 @@
         </p:nvSpPr>
         <p:spPr>
           <a:xfrm>
-            <a:off x="640080" y="3108960"/>
+            <a:off x="640080" y="2926080"/>
             <a:ext cx="10881360" cy="777240"/>
           </a:xfrm>
           <a:prstGeom prst="rect">
@@ -6789,7 +8038,456 @@
                 </a:solidFill>
                 <a:latin typeface="Calibri"/>
               </a:rPr>
-              <a:t>Too simple is why it stays in GitHub.</a:t>
+              <a:t>Discord is enough.</a:t>
+            </a:r>
+          </a:p>
+        </p:txBody>
+      </p:sp>
+      <p:sp>
+        <p:nvSpPr>
+          <p:cNvPr id="5" name="Rounded Rectangle 4"/>
+          <p:cNvSpPr/>
+          <p:nvPr/>
+        </p:nvSpPr>
+        <p:spPr>
+          <a:xfrm>
+            <a:off x="4709160" y="3794760"/>
+            <a:ext cx="1554480" cy="777240"/>
+          </a:xfrm>
+          <a:prstGeom prst="roundRect">
+            <a:avLst/>
+          </a:prstGeom>
+          <a:noFill/>
+          <a:ln w="27940">
+            <a:solidFill>
+              <a:srgbClr val="7C5CFF"/>
+            </a:solidFill>
+          </a:ln>
+        </p:spPr>
+        <p:style>
+          <a:lnRef idx="1">
+            <a:schemeClr val="accent1"/>
+          </a:lnRef>
+          <a:fillRef idx="3">
+            <a:schemeClr val="accent1"/>
+          </a:fillRef>
+          <a:effectRef idx="2">
+            <a:schemeClr val="accent1"/>
+          </a:effectRef>
+          <a:fontRef idx="minor">
+            <a:schemeClr val="lt1"/>
+          </a:fontRef>
+        </p:style>
+        <p:txBody>
+          <a:bodyPr rtlCol="0" anchor="ctr"/>
+          <a:lstStyle/>
+          <a:p>
+            <a:pPr algn="ctr"/>
+          </a:p>
+        </p:txBody>
+      </p:sp>
+      <p:sp>
+        <p:nvSpPr>
+          <p:cNvPr id="6" name="Rounded Rectangle 5"/>
+          <p:cNvSpPr/>
+          <p:nvPr/>
+        </p:nvSpPr>
+        <p:spPr>
+          <a:xfrm>
+            <a:off x="5943600" y="4434840"/>
+            <a:ext cx="1554480" cy="658368"/>
+          </a:xfrm>
+          <a:prstGeom prst="roundRect">
+            <a:avLst/>
+          </a:prstGeom>
+          <a:noFill/>
+          <a:ln w="27940">
+            <a:solidFill>
+              <a:srgbClr val="1EC8E6"/>
+            </a:solidFill>
+          </a:ln>
+        </p:spPr>
+        <p:style>
+          <a:lnRef idx="1">
+            <a:schemeClr val="accent1"/>
+          </a:lnRef>
+          <a:fillRef idx="3">
+            <a:schemeClr val="accent1"/>
+          </a:fillRef>
+          <a:effectRef idx="2">
+            <a:schemeClr val="accent1"/>
+          </a:effectRef>
+          <a:fontRef idx="minor">
+            <a:schemeClr val="lt1"/>
+          </a:fontRef>
+        </p:style>
+        <p:txBody>
+          <a:bodyPr rtlCol="0" anchor="ctr"/>
+          <a:lstStyle/>
+          <a:p>
+            <a:pPr algn="ctr"/>
+          </a:p>
+        </p:txBody>
+      </p:sp>
+      <p:sp>
+        <p:nvSpPr>
+          <p:cNvPr id="7" name="Oval 6"/>
+          <p:cNvSpPr/>
+          <p:nvPr/>
+        </p:nvSpPr>
+        <p:spPr>
+          <a:xfrm>
+            <a:off x="4983480" y="4069080"/>
+            <a:ext cx="164592" cy="164592"/>
+          </a:xfrm>
+          <a:prstGeom prst="ellipse">
+            <a:avLst/>
+          </a:prstGeom>
+          <a:solidFill>
+            <a:srgbClr val="1EC8E6"/>
+          </a:solidFill>
+          <a:ln>
+            <a:noFill/>
+          </a:ln>
+        </p:spPr>
+        <p:style>
+          <a:lnRef idx="1">
+            <a:schemeClr val="accent1"/>
+          </a:lnRef>
+          <a:fillRef idx="3">
+            <a:schemeClr val="accent1"/>
+          </a:fillRef>
+          <a:effectRef idx="2">
+            <a:schemeClr val="accent1"/>
+          </a:effectRef>
+          <a:fontRef idx="minor">
+            <a:schemeClr val="lt1"/>
+          </a:fontRef>
+        </p:style>
+        <p:txBody>
+          <a:bodyPr rtlCol="0" anchor="ctr"/>
+          <a:lstStyle/>
+          <a:p>
+            <a:pPr algn="ctr"/>
+          </a:p>
+        </p:txBody>
+      </p:sp>
+      <p:sp>
+        <p:nvSpPr>
+          <p:cNvPr id="8" name="Oval 7"/>
+          <p:cNvSpPr/>
+          <p:nvPr/>
+        </p:nvSpPr>
+        <p:spPr>
+          <a:xfrm>
+            <a:off x="5276088" y="4069080"/>
+            <a:ext cx="164592" cy="164592"/>
+          </a:xfrm>
+          <a:prstGeom prst="ellipse">
+            <a:avLst/>
+          </a:prstGeom>
+          <a:solidFill>
+            <a:srgbClr val="7C5CFF"/>
+          </a:solidFill>
+          <a:ln>
+            <a:noFill/>
+          </a:ln>
+        </p:spPr>
+        <p:style>
+          <a:lnRef idx="1">
+            <a:schemeClr val="accent1"/>
+          </a:lnRef>
+          <a:fillRef idx="3">
+            <a:schemeClr val="accent1"/>
+          </a:fillRef>
+          <a:effectRef idx="2">
+            <a:schemeClr val="accent1"/>
+          </a:effectRef>
+          <a:fontRef idx="minor">
+            <a:schemeClr val="lt1"/>
+          </a:fontRef>
+        </p:style>
+        <p:txBody>
+          <a:bodyPr rtlCol="0" anchor="ctr"/>
+          <a:lstStyle/>
+          <a:p>
+            <a:pPr algn="ctr"/>
+          </a:p>
+        </p:txBody>
+      </p:sp>
+      <p:sp>
+        <p:nvSpPr>
+          <p:cNvPr id="9" name="Oval 8"/>
+          <p:cNvSpPr/>
+          <p:nvPr/>
+        </p:nvSpPr>
+        <p:spPr>
+          <a:xfrm>
+            <a:off x="5568696" y="4069080"/>
+            <a:ext cx="164592" cy="164592"/>
+          </a:xfrm>
+          <a:prstGeom prst="ellipse">
+            <a:avLst/>
+          </a:prstGeom>
+          <a:solidFill>
+            <a:srgbClr val="1EC8E6"/>
+          </a:solidFill>
+          <a:ln>
+            <a:noFill/>
+          </a:ln>
+        </p:spPr>
+        <p:style>
+          <a:lnRef idx="1">
+            <a:schemeClr val="accent1"/>
+          </a:lnRef>
+          <a:fillRef idx="3">
+            <a:schemeClr val="accent1"/>
+          </a:fillRef>
+          <a:effectRef idx="2">
+            <a:schemeClr val="accent1"/>
+          </a:effectRef>
+          <a:fontRef idx="minor">
+            <a:schemeClr val="lt1"/>
+          </a:fontRef>
+        </p:style>
+        <p:txBody>
+          <a:bodyPr rtlCol="0" anchor="ctr"/>
+          <a:lstStyle/>
+          <a:p>
+            <a:pPr algn="ctr"/>
+          </a:p>
+        </p:txBody>
+      </p:sp>
+      <p:sp>
+        <p:nvSpPr>
+          <p:cNvPr id="10" name="Rounded Rectangle 9"/>
+          <p:cNvSpPr/>
+          <p:nvPr/>
+        </p:nvSpPr>
+        <p:spPr>
+          <a:xfrm>
+            <a:off x="4024731" y="5806440"/>
+            <a:ext cx="982980" cy="384048"/>
+          </a:xfrm>
+          <a:prstGeom prst="roundRect">
+            <a:avLst/>
+          </a:prstGeom>
+          <a:solidFill>
+            <a:srgbClr val="E8E8ED"/>
+          </a:solidFill>
+          <a:ln>
+            <a:noFill/>
+          </a:ln>
+        </p:spPr>
+        <p:style>
+          <a:lnRef idx="1">
+            <a:schemeClr val="accent1"/>
+          </a:lnRef>
+          <a:fillRef idx="3">
+            <a:schemeClr val="accent1"/>
+          </a:fillRef>
+          <a:effectRef idx="2">
+            <a:schemeClr val="accent1"/>
+          </a:effectRef>
+          <a:fontRef idx="minor">
+            <a:schemeClr val="lt1"/>
+          </a:fontRef>
+        </p:style>
+        <p:txBody>
+          <a:bodyPr rtlCol="0" anchor="ctr"/>
+          <a:lstStyle/>
+          <a:p>
+            <a:pPr algn="ctr"/>
+          </a:p>
+        </p:txBody>
+      </p:sp>
+      <p:sp>
+        <p:nvSpPr>
+          <p:cNvPr id="11" name="TextBox 10"/>
+          <p:cNvSpPr txBox="1"/>
+          <p:nvPr/>
+        </p:nvSpPr>
+        <p:spPr>
+          <a:xfrm>
+            <a:off x="4024731" y="5843016"/>
+            <a:ext cx="982980" cy="329184"/>
+          </a:xfrm>
+          <a:prstGeom prst="rect">
+            <a:avLst/>
+          </a:prstGeom>
+          <a:noFill/>
+        </p:spPr>
+        <p:txBody>
+          <a:bodyPr wrap="square">
+            <a:spAutoFit/>
+          </a:bodyPr>
+          <a:lstStyle/>
+          <a:p>
+            <a:pPr algn="ctr"/>
+            <a:r>
+              <a:rPr sz="1200" b="1">
+                <a:solidFill>
+                  <a:srgbClr val="1D1D1F"/>
+                </a:solidFill>
+                <a:latin typeface="Calibri"/>
+              </a:rPr>
+              <a:t>Discord</a:t>
+            </a:r>
+          </a:p>
+        </p:txBody>
+      </p:sp>
+      <p:sp>
+        <p:nvSpPr>
+          <p:cNvPr id="12" name="Rounded Rectangle 11"/>
+          <p:cNvSpPr/>
+          <p:nvPr/>
+        </p:nvSpPr>
+        <p:spPr>
+          <a:xfrm>
+            <a:off x="5172303" y="5806440"/>
+            <a:ext cx="790956" cy="384048"/>
+          </a:xfrm>
+          <a:prstGeom prst="roundRect">
+            <a:avLst/>
+          </a:prstGeom>
+          <a:solidFill>
+            <a:srgbClr val="E8E8ED"/>
+          </a:solidFill>
+          <a:ln>
+            <a:noFill/>
+          </a:ln>
+        </p:spPr>
+        <p:style>
+          <a:lnRef idx="1">
+            <a:schemeClr val="accent1"/>
+          </a:lnRef>
+          <a:fillRef idx="3">
+            <a:schemeClr val="accent1"/>
+          </a:fillRef>
+          <a:effectRef idx="2">
+            <a:schemeClr val="accent1"/>
+          </a:effectRef>
+          <a:fontRef idx="minor">
+            <a:schemeClr val="lt1"/>
+          </a:fontRef>
+        </p:style>
+        <p:txBody>
+          <a:bodyPr rtlCol="0" anchor="ctr"/>
+          <a:lstStyle/>
+          <a:p>
+            <a:pPr algn="ctr"/>
+          </a:p>
+        </p:txBody>
+      </p:sp>
+      <p:sp>
+        <p:nvSpPr>
+          <p:cNvPr id="13" name="TextBox 12"/>
+          <p:cNvSpPr txBox="1"/>
+          <p:nvPr/>
+        </p:nvSpPr>
+        <p:spPr>
+          <a:xfrm>
+            <a:off x="5172303" y="5843016"/>
+            <a:ext cx="790956" cy="329184"/>
+          </a:xfrm>
+          <a:prstGeom prst="rect">
+            <a:avLst/>
+          </a:prstGeom>
+          <a:noFill/>
+        </p:spPr>
+        <p:txBody>
+          <a:bodyPr wrap="square">
+            <a:spAutoFit/>
+          </a:bodyPr>
+          <a:lstStyle/>
+          <a:p>
+            <a:pPr algn="ctr"/>
+            <a:r>
+              <a:rPr sz="1200" b="1">
+                <a:solidFill>
+                  <a:srgbClr val="1D1D1F"/>
+                </a:solidFill>
+                <a:latin typeface="Calibri"/>
+              </a:rPr>
+              <a:t>email</a:t>
+            </a:r>
+          </a:p>
+        </p:txBody>
+      </p:sp>
+      <p:sp>
+        <p:nvSpPr>
+          <p:cNvPr id="14" name="Rounded Rectangle 13"/>
+          <p:cNvSpPr/>
+          <p:nvPr/>
+        </p:nvSpPr>
+        <p:spPr>
+          <a:xfrm>
+            <a:off x="6127851" y="5806440"/>
+            <a:ext cx="2039112" cy="384048"/>
+          </a:xfrm>
+          <a:prstGeom prst="roundRect">
+            <a:avLst/>
+          </a:prstGeom>
+          <a:solidFill>
+            <a:srgbClr val="E8E8ED"/>
+          </a:solidFill>
+          <a:ln>
+            <a:noFill/>
+          </a:ln>
+        </p:spPr>
+        <p:style>
+          <a:lnRef idx="1">
+            <a:schemeClr val="accent1"/>
+          </a:lnRef>
+          <a:fillRef idx="3">
+            <a:schemeClr val="accent1"/>
+          </a:fillRef>
+          <a:effectRef idx="2">
+            <a:schemeClr val="accent1"/>
+          </a:effectRef>
+          <a:fontRef idx="minor">
+            <a:schemeClr val="lt1"/>
+          </a:fontRef>
+        </p:style>
+        <p:txBody>
+          <a:bodyPr rtlCol="0" anchor="ctr"/>
+          <a:lstStyle/>
+          <a:p>
+            <a:pPr algn="ctr"/>
+          </a:p>
+        </p:txBody>
+      </p:sp>
+      <p:sp>
+        <p:nvSpPr>
+          <p:cNvPr id="15" name="TextBox 14"/>
+          <p:cNvSpPr txBox="1"/>
+          <p:nvPr/>
+        </p:nvSpPr>
+        <p:spPr>
+          <a:xfrm>
+            <a:off x="6127851" y="5843016"/>
+            <a:ext cx="2039112" cy="329184"/>
+          </a:xfrm>
+          <a:prstGeom prst="rect">
+            <a:avLst/>
+          </a:prstGeom>
+          <a:noFill/>
+        </p:spPr>
+        <p:txBody>
+          <a:bodyPr wrap="square">
+            <a:spAutoFit/>
+          </a:bodyPr>
+          <a:lstStyle/>
+          <a:p>
+            <a:pPr algn="ctr"/>
+            <a:r>
+              <a:rPr sz="1200" b="1">
+                <a:solidFill>
+                  <a:srgbClr val="1D1D1F"/>
+                </a:solidFill>
+                <a:latin typeface="Calibri"/>
+              </a:rPr>
+              <a:t>GitHub Discussions</a:t>
             </a:r>
           </a:p>
         </p:txBody>
@@ -6863,7 +8561,7 @@
         </p:nvSpPr>
         <p:spPr>
           <a:xfrm>
-            <a:off x="640080" y="1554480"/>
+            <a:off x="640080" y="1874519"/>
             <a:ext cx="10881360" cy="1737360"/>
           </a:xfrm>
           <a:prstGeom prst="rect">
@@ -6879,13 +8577,13 @@
           <a:p>
             <a:pPr algn="ctr"/>
             <a:r>
-              <a:rPr sz="4000" b="1">
+              <a:rPr sz="3000" b="1">
                 <a:solidFill>
                   <a:srgbClr val="1D1D1F"/>
                 </a:solidFill>
                 <a:latin typeface="Calibri"/>
               </a:rPr>
-              <a:t>Five people × ₹199.</a:t>
+              <a:t>They stay when you solve the next problem.</a:t>
             </a:r>
           </a:p>
         </p:txBody>
@@ -6898,7 +8596,7 @@
         </p:nvSpPr>
         <p:spPr>
           <a:xfrm>
-            <a:off x="640080" y="3337560"/>
+            <a:off x="640080" y="3657600"/>
             <a:ext cx="10881360" cy="777240"/>
           </a:xfrm>
           <a:prstGeom prst="rect">
@@ -6920,319 +8618,7 @@
                 </a:solidFill>
                 <a:latin typeface="Calibri"/>
               </a:rPr>
-              <a:t>Your first ₹1,000.</a:t>
-            </a:r>
-          </a:p>
-        </p:txBody>
-      </p:sp>
-      <p:sp>
-        <p:nvSpPr>
-          <p:cNvPr id="5" name="Rounded Rectangle 4"/>
-          <p:cNvSpPr/>
-          <p:nvPr/>
-        </p:nvSpPr>
-        <p:spPr>
-          <a:xfrm>
-            <a:off x="3210915" y="5806440"/>
-            <a:ext cx="1655064" cy="384048"/>
-          </a:xfrm>
-          <a:prstGeom prst="roundRect">
-            <a:avLst/>
-          </a:prstGeom>
-          <a:solidFill>
-            <a:srgbClr val="E8E8ED"/>
-          </a:solidFill>
-          <a:ln>
-            <a:noFill/>
-          </a:ln>
-        </p:spPr>
-        <p:style>
-          <a:lnRef idx="1">
-            <a:schemeClr val="accent1"/>
-          </a:lnRef>
-          <a:fillRef idx="3">
-            <a:schemeClr val="accent1"/>
-          </a:fillRef>
-          <a:effectRef idx="2">
-            <a:schemeClr val="accent1"/>
-          </a:effectRef>
-          <a:fontRef idx="minor">
-            <a:schemeClr val="lt1"/>
-          </a:fontRef>
-        </p:style>
-        <p:txBody>
-          <a:bodyPr rtlCol="0" anchor="ctr"/>
-          <a:lstStyle/>
-          <a:p>
-            <a:pPr algn="ctr"/>
-          </a:p>
-        </p:txBody>
-      </p:sp>
-      <p:sp>
-        <p:nvSpPr>
-          <p:cNvPr id="6" name="TextBox 5"/>
-          <p:cNvSpPr txBox="1"/>
-          <p:nvPr/>
-        </p:nvSpPr>
-        <p:spPr>
-          <a:xfrm>
-            <a:off x="3210915" y="5843016"/>
-            <a:ext cx="1655064" cy="329184"/>
-          </a:xfrm>
-          <a:prstGeom prst="rect">
-            <a:avLst/>
-          </a:prstGeom>
-          <a:noFill/>
-        </p:spPr>
-        <p:txBody>
-          <a:bodyPr wrap="square">
-            <a:spAutoFit/>
-          </a:bodyPr>
-          <a:lstStyle/>
-          <a:p>
-            <a:pPr algn="ctr"/>
-            <a:r>
-              <a:rPr sz="1200" b="1">
-                <a:solidFill>
-                  <a:srgbClr val="1D1D1F"/>
-                </a:solidFill>
-                <a:latin typeface="Calibri"/>
-              </a:rPr>
-              <a:t>₹199 extension</a:t>
-            </a:r>
-          </a:p>
-        </p:txBody>
-      </p:sp>
-      <p:sp>
-        <p:nvSpPr>
-          <p:cNvPr id="7" name="Rounded Rectangle 6"/>
-          <p:cNvSpPr/>
-          <p:nvPr/>
-        </p:nvSpPr>
-        <p:spPr>
-          <a:xfrm>
-            <a:off x="5030571" y="5806440"/>
-            <a:ext cx="1078992" cy="384048"/>
-          </a:xfrm>
-          <a:prstGeom prst="roundRect">
-            <a:avLst/>
-          </a:prstGeom>
-          <a:solidFill>
-            <a:srgbClr val="E8E8ED"/>
-          </a:solidFill>
-          <a:ln>
-            <a:noFill/>
-          </a:ln>
-        </p:spPr>
-        <p:style>
-          <a:lnRef idx="1">
-            <a:schemeClr val="accent1"/>
-          </a:lnRef>
-          <a:fillRef idx="3">
-            <a:schemeClr val="accent1"/>
-          </a:fillRef>
-          <a:effectRef idx="2">
-            <a:schemeClr val="accent1"/>
-          </a:effectRef>
-          <a:fontRef idx="minor">
-            <a:schemeClr val="lt1"/>
-          </a:fontRef>
-        </p:style>
-        <p:txBody>
-          <a:bodyPr rtlCol="0" anchor="ctr"/>
-          <a:lstStyle/>
-          <a:p>
-            <a:pPr algn="ctr"/>
-          </a:p>
-        </p:txBody>
-      </p:sp>
-      <p:sp>
-        <p:nvSpPr>
-          <p:cNvPr id="8" name="TextBox 7"/>
-          <p:cNvSpPr txBox="1"/>
-          <p:nvPr/>
-        </p:nvSpPr>
-        <p:spPr>
-          <a:xfrm>
-            <a:off x="5030571" y="5843016"/>
-            <a:ext cx="1078992" cy="329184"/>
-          </a:xfrm>
-          <a:prstGeom prst="rect">
-            <a:avLst/>
-          </a:prstGeom>
-          <a:noFill/>
-        </p:spPr>
-        <p:txBody>
-          <a:bodyPr wrap="square">
-            <a:spAutoFit/>
-          </a:bodyPr>
-          <a:lstStyle/>
-          <a:p>
-            <a:pPr algn="ctr"/>
-            <a:r>
-              <a:rPr sz="1200" b="1">
-                <a:solidFill>
-                  <a:srgbClr val="1D1D1F"/>
-                </a:solidFill>
-                <a:latin typeface="Calibri"/>
-              </a:rPr>
-              <a:t>₹299 app</a:t>
-            </a:r>
-          </a:p>
-        </p:txBody>
-      </p:sp>
-      <p:sp>
-        <p:nvSpPr>
-          <p:cNvPr id="9" name="Rounded Rectangle 8"/>
-          <p:cNvSpPr/>
-          <p:nvPr/>
-        </p:nvSpPr>
-        <p:spPr>
-          <a:xfrm>
-            <a:off x="6274155" y="5806440"/>
-            <a:ext cx="1271016" cy="384048"/>
-          </a:xfrm>
-          <a:prstGeom prst="roundRect">
-            <a:avLst/>
-          </a:prstGeom>
-          <a:solidFill>
-            <a:srgbClr val="E8E8ED"/>
-          </a:solidFill>
-          <a:ln>
-            <a:noFill/>
-          </a:ln>
-        </p:spPr>
-        <p:style>
-          <a:lnRef idx="1">
-            <a:schemeClr val="accent1"/>
-          </a:lnRef>
-          <a:fillRef idx="3">
-            <a:schemeClr val="accent1"/>
-          </a:fillRef>
-          <a:effectRef idx="2">
-            <a:schemeClr val="accent1"/>
-          </a:effectRef>
-          <a:fontRef idx="minor">
-            <a:schemeClr val="lt1"/>
-          </a:fontRef>
-        </p:style>
-        <p:txBody>
-          <a:bodyPr rtlCol="0" anchor="ctr"/>
-          <a:lstStyle/>
-          <a:p>
-            <a:pPr algn="ctr"/>
-          </a:p>
-        </p:txBody>
-      </p:sp>
-      <p:sp>
-        <p:nvSpPr>
-          <p:cNvPr id="10" name="TextBox 9"/>
-          <p:cNvSpPr txBox="1"/>
-          <p:nvPr/>
-        </p:nvSpPr>
-        <p:spPr>
-          <a:xfrm>
-            <a:off x="6274155" y="5843016"/>
-            <a:ext cx="1271016" cy="329184"/>
-          </a:xfrm>
-          <a:prstGeom prst="rect">
-            <a:avLst/>
-          </a:prstGeom>
-          <a:noFill/>
-        </p:spPr>
-        <p:txBody>
-          <a:bodyPr wrap="square">
-            <a:spAutoFit/>
-          </a:bodyPr>
-          <a:lstStyle/>
-          <a:p>
-            <a:pPr algn="ctr"/>
-            <a:r>
-              <a:rPr sz="1200" b="1">
-                <a:solidFill>
-                  <a:srgbClr val="1D1D1F"/>
-                </a:solidFill>
-                <a:latin typeface="Calibri"/>
-              </a:rPr>
-              <a:t>₹499/month</a:t>
-            </a:r>
-          </a:p>
-        </p:txBody>
-      </p:sp>
-      <p:sp>
-        <p:nvSpPr>
-          <p:cNvPr id="11" name="Rounded Rectangle 10"/>
-          <p:cNvSpPr/>
-          <p:nvPr/>
-        </p:nvSpPr>
-        <p:spPr>
-          <a:xfrm>
-            <a:off x="7709763" y="5806440"/>
-            <a:ext cx="1271016" cy="384048"/>
-          </a:xfrm>
-          <a:prstGeom prst="roundRect">
-            <a:avLst/>
-          </a:prstGeom>
-          <a:solidFill>
-            <a:srgbClr val="E8E8ED"/>
-          </a:solidFill>
-          <a:ln>
-            <a:noFill/>
-          </a:ln>
-        </p:spPr>
-        <p:style>
-          <a:lnRef idx="1">
-            <a:schemeClr val="accent1"/>
-          </a:lnRef>
-          <a:fillRef idx="3">
-            <a:schemeClr val="accent1"/>
-          </a:fillRef>
-          <a:effectRef idx="2">
-            <a:schemeClr val="accent1"/>
-          </a:effectRef>
-          <a:fontRef idx="minor">
-            <a:schemeClr val="lt1"/>
-          </a:fontRef>
-        </p:style>
-        <p:txBody>
-          <a:bodyPr rtlCol="0" anchor="ctr"/>
-          <a:lstStyle/>
-          <a:p>
-            <a:pPr algn="ctr"/>
-          </a:p>
-        </p:txBody>
-      </p:sp>
-      <p:sp>
-        <p:nvSpPr>
-          <p:cNvPr id="12" name="TextBox 11"/>
-          <p:cNvSpPr txBox="1"/>
-          <p:nvPr/>
-        </p:nvSpPr>
-        <p:spPr>
-          <a:xfrm>
-            <a:off x="7709763" y="5843016"/>
-            <a:ext cx="1271016" cy="329184"/>
-          </a:xfrm>
-          <a:prstGeom prst="rect">
-            <a:avLst/>
-          </a:prstGeom>
-          <a:noFill/>
-        </p:spPr>
-        <p:txBody>
-          <a:bodyPr wrap="square">
-            <a:spAutoFit/>
-          </a:bodyPr>
-          <a:lstStyle/>
-          <a:p>
-            <a:pPr algn="ctr"/>
-            <a:r>
-              <a:rPr sz="1200" b="1">
-                <a:solidFill>
-                  <a:srgbClr val="1D1D1F"/>
-                </a:solidFill>
-                <a:latin typeface="Calibri"/>
-              </a:rPr>
-              <a:t>Level pack</a:t>
+              <a:t>Likes are not customers.</a:t>
             </a:r>
           </a:p>
         </p:txBody>
@@ -7306,7 +8692,7 @@
         </p:nvSpPr>
         <p:spPr>
           <a:xfrm>
-            <a:off x="640080" y="1783080"/>
+            <a:off x="640080" y="1325880"/>
             <a:ext cx="10881360" cy="1737360"/>
           </a:xfrm>
           <a:prstGeom prst="rect">
@@ -7322,13 +8708,13 @@
           <a:p>
             <a:pPr algn="ctr"/>
             <a:r>
-              <a:rPr sz="3600" b="1">
+              <a:rPr sz="2800" b="1">
                 <a:solidFill>
                   <a:srgbClr val="1D1D1F"/>
                 </a:solidFill>
                 <a:latin typeface="Calibri"/>
               </a:rPr>
-              <a:t>Build anything. Ship something.</a:t>
+              <a:t>Your first paying customer beats another feature.</a:t>
             </a:r>
           </a:p>
         </p:txBody>
@@ -7341,7 +8727,7 @@
         </p:nvSpPr>
         <p:spPr>
           <a:xfrm>
-            <a:off x="640080" y="3566160"/>
+            <a:off x="640080" y="3108960"/>
             <a:ext cx="10881360" cy="777240"/>
           </a:xfrm>
           <a:prstGeom prst="rect">
@@ -7363,319 +8749,7 @@
                 </a:solidFill>
                 <a:latin typeface="Calibri"/>
               </a:rPr>
-              <a:t>Solo or team.</a:t>
-            </a:r>
-          </a:p>
-        </p:txBody>
-      </p:sp>
-      <p:sp>
-        <p:nvSpPr>
-          <p:cNvPr id="5" name="Rounded Rectangle 4"/>
-          <p:cNvSpPr/>
-          <p:nvPr/>
-        </p:nvSpPr>
-        <p:spPr>
-          <a:xfrm>
-            <a:off x="4507077" y="5440680"/>
-            <a:ext cx="694944" cy="384048"/>
-          </a:xfrm>
-          <a:prstGeom prst="roundRect">
-            <a:avLst/>
-          </a:prstGeom>
-          <a:solidFill>
-            <a:srgbClr val="E8E8ED"/>
-          </a:solidFill>
-          <a:ln>
-            <a:noFill/>
-          </a:ln>
-        </p:spPr>
-        <p:style>
-          <a:lnRef idx="1">
-            <a:schemeClr val="accent1"/>
-          </a:lnRef>
-          <a:fillRef idx="3">
-            <a:schemeClr val="accent1"/>
-          </a:fillRef>
-          <a:effectRef idx="2">
-            <a:schemeClr val="accent1"/>
-          </a:effectRef>
-          <a:fontRef idx="minor">
-            <a:schemeClr val="lt1"/>
-          </a:fontRef>
-        </p:style>
-        <p:txBody>
-          <a:bodyPr rtlCol="0" anchor="ctr"/>
-          <a:lstStyle/>
-          <a:p>
-            <a:pPr algn="ctr"/>
-          </a:p>
-        </p:txBody>
-      </p:sp>
-      <p:sp>
-        <p:nvSpPr>
-          <p:cNvPr id="6" name="TextBox 5"/>
-          <p:cNvSpPr txBox="1"/>
-          <p:nvPr/>
-        </p:nvSpPr>
-        <p:spPr>
-          <a:xfrm>
-            <a:off x="4507077" y="5477256"/>
-            <a:ext cx="694944" cy="329184"/>
-          </a:xfrm>
-          <a:prstGeom prst="rect">
-            <a:avLst/>
-          </a:prstGeom>
-          <a:noFill/>
-        </p:spPr>
-        <p:txBody>
-          <a:bodyPr wrap="square">
-            <a:spAutoFit/>
-          </a:bodyPr>
-          <a:lstStyle/>
-          <a:p>
-            <a:pPr algn="ctr"/>
-            <a:r>
-              <a:rPr sz="1200" b="1">
-                <a:solidFill>
-                  <a:srgbClr val="1D1D1F"/>
-                </a:solidFill>
-                <a:latin typeface="Calibri"/>
-              </a:rPr>
-              <a:t>Game</a:t>
-            </a:r>
-          </a:p>
-        </p:txBody>
-      </p:sp>
-      <p:sp>
-        <p:nvSpPr>
-          <p:cNvPr id="7" name="Rounded Rectangle 6"/>
-          <p:cNvSpPr/>
-          <p:nvPr/>
-        </p:nvSpPr>
-        <p:spPr>
-          <a:xfrm>
-            <a:off x="5366613" y="5440680"/>
-            <a:ext cx="598932" cy="384048"/>
-          </a:xfrm>
-          <a:prstGeom prst="roundRect">
-            <a:avLst/>
-          </a:prstGeom>
-          <a:solidFill>
-            <a:srgbClr val="E8E8ED"/>
-          </a:solidFill>
-          <a:ln>
-            <a:noFill/>
-          </a:ln>
-        </p:spPr>
-        <p:style>
-          <a:lnRef idx="1">
-            <a:schemeClr val="accent1"/>
-          </a:lnRef>
-          <a:fillRef idx="3">
-            <a:schemeClr val="accent1"/>
-          </a:fillRef>
-          <a:effectRef idx="2">
-            <a:schemeClr val="accent1"/>
-          </a:effectRef>
-          <a:fontRef idx="minor">
-            <a:schemeClr val="lt1"/>
-          </a:fontRef>
-        </p:style>
-        <p:txBody>
-          <a:bodyPr rtlCol="0" anchor="ctr"/>
-          <a:lstStyle/>
-          <a:p>
-            <a:pPr algn="ctr"/>
-          </a:p>
-        </p:txBody>
-      </p:sp>
-      <p:sp>
-        <p:nvSpPr>
-          <p:cNvPr id="8" name="TextBox 7"/>
-          <p:cNvSpPr txBox="1"/>
-          <p:nvPr/>
-        </p:nvSpPr>
-        <p:spPr>
-          <a:xfrm>
-            <a:off x="5366613" y="5477256"/>
-            <a:ext cx="598932" cy="329184"/>
-          </a:xfrm>
-          <a:prstGeom prst="rect">
-            <a:avLst/>
-          </a:prstGeom>
-          <a:noFill/>
-        </p:spPr>
-        <p:txBody>
-          <a:bodyPr wrap="square">
-            <a:spAutoFit/>
-          </a:bodyPr>
-          <a:lstStyle/>
-          <a:p>
-            <a:pPr algn="ctr"/>
-            <a:r>
-              <a:rPr sz="1200" b="1">
-                <a:solidFill>
-                  <a:srgbClr val="1D1D1F"/>
-                </a:solidFill>
-                <a:latin typeface="Calibri"/>
-              </a:rPr>
-              <a:t>App</a:t>
-            </a:r>
-          </a:p>
-        </p:txBody>
-      </p:sp>
-      <p:sp>
-        <p:nvSpPr>
-          <p:cNvPr id="9" name="Rounded Rectangle 8"/>
-          <p:cNvSpPr/>
-          <p:nvPr/>
-        </p:nvSpPr>
-        <p:spPr>
-          <a:xfrm>
-            <a:off x="6130137" y="5440680"/>
-            <a:ext cx="694944" cy="384048"/>
-          </a:xfrm>
-          <a:prstGeom prst="roundRect">
-            <a:avLst/>
-          </a:prstGeom>
-          <a:solidFill>
-            <a:srgbClr val="E8E8ED"/>
-          </a:solidFill>
-          <a:ln>
-            <a:noFill/>
-          </a:ln>
-        </p:spPr>
-        <p:style>
-          <a:lnRef idx="1">
-            <a:schemeClr val="accent1"/>
-          </a:lnRef>
-          <a:fillRef idx="3">
-            <a:schemeClr val="accent1"/>
-          </a:fillRef>
-          <a:effectRef idx="2">
-            <a:schemeClr val="accent1"/>
-          </a:effectRef>
-          <a:fontRef idx="minor">
-            <a:schemeClr val="lt1"/>
-          </a:fontRef>
-        </p:style>
-        <p:txBody>
-          <a:bodyPr rtlCol="0" anchor="ctr"/>
-          <a:lstStyle/>
-          <a:p>
-            <a:pPr algn="ctr"/>
-          </a:p>
-        </p:txBody>
-      </p:sp>
-      <p:sp>
-        <p:nvSpPr>
-          <p:cNvPr id="10" name="TextBox 9"/>
-          <p:cNvSpPr txBox="1"/>
-          <p:nvPr/>
-        </p:nvSpPr>
-        <p:spPr>
-          <a:xfrm>
-            <a:off x="6130137" y="5477256"/>
-            <a:ext cx="694944" cy="329184"/>
-          </a:xfrm>
-          <a:prstGeom prst="rect">
-            <a:avLst/>
-          </a:prstGeom>
-          <a:noFill/>
-        </p:spPr>
-        <p:txBody>
-          <a:bodyPr wrap="square">
-            <a:spAutoFit/>
-          </a:bodyPr>
-          <a:lstStyle/>
-          <a:p>
-            <a:pPr algn="ctr"/>
-            <a:r>
-              <a:rPr sz="1200" b="1">
-                <a:solidFill>
-                  <a:srgbClr val="1D1D1F"/>
-                </a:solidFill>
-                <a:latin typeface="Calibri"/>
-              </a:rPr>
-              <a:t>Site</a:t>
-            </a:r>
-          </a:p>
-        </p:txBody>
-      </p:sp>
-      <p:sp>
-        <p:nvSpPr>
-          <p:cNvPr id="11" name="Rounded Rectangle 10"/>
-          <p:cNvSpPr/>
-          <p:nvPr/>
-        </p:nvSpPr>
-        <p:spPr>
-          <a:xfrm>
-            <a:off x="6989673" y="5440680"/>
-            <a:ext cx="694944" cy="384048"/>
-          </a:xfrm>
-          <a:prstGeom prst="roundRect">
-            <a:avLst/>
-          </a:prstGeom>
-          <a:solidFill>
-            <a:srgbClr val="E8E8ED"/>
-          </a:solidFill>
-          <a:ln>
-            <a:noFill/>
-          </a:ln>
-        </p:spPr>
-        <p:style>
-          <a:lnRef idx="1">
-            <a:schemeClr val="accent1"/>
-          </a:lnRef>
-          <a:fillRef idx="3">
-            <a:schemeClr val="accent1"/>
-          </a:fillRef>
-          <a:effectRef idx="2">
-            <a:schemeClr val="accent1"/>
-          </a:effectRef>
-          <a:fontRef idx="minor">
-            <a:schemeClr val="lt1"/>
-          </a:fontRef>
-        </p:style>
-        <p:txBody>
-          <a:bodyPr rtlCol="0" anchor="ctr"/>
-          <a:lstStyle/>
-          <a:p>
-            <a:pPr algn="ctr"/>
-          </a:p>
-        </p:txBody>
-      </p:sp>
-      <p:sp>
-        <p:nvSpPr>
-          <p:cNvPr id="12" name="TextBox 11"/>
-          <p:cNvSpPr txBox="1"/>
-          <p:nvPr/>
-        </p:nvSpPr>
-        <p:spPr>
-          <a:xfrm>
-            <a:off x="6989673" y="5477256"/>
-            <a:ext cx="694944" cy="329184"/>
-          </a:xfrm>
-          <a:prstGeom prst="rect">
-            <a:avLst/>
-          </a:prstGeom>
-          <a:noFill/>
-        </p:spPr>
-        <p:txBody>
-          <a:bodyPr wrap="square">
-            <a:spAutoFit/>
-          </a:bodyPr>
-          <a:lstStyle/>
-          <a:p>
-            <a:pPr algn="ctr"/>
-            <a:r>
-              <a:rPr sz="1200" b="1">
-                <a:solidFill>
-                  <a:srgbClr val="1D1D1F"/>
-                </a:solidFill>
-                <a:latin typeface="Calibri"/>
-              </a:rPr>
-              <a:t>Tool</a:t>
+              <a:t>Too simple is why it stays in GitHub.</a:t>
             </a:r>
           </a:p>
         </p:txBody>
@@ -7749,8 +8823,8 @@
         </p:nvSpPr>
         <p:spPr>
           <a:xfrm>
-            <a:off x="640080" y="640080"/>
-            <a:ext cx="10881360" cy="1143000"/>
+            <a:off x="640080" y="1554480"/>
+            <a:ext cx="10881360" cy="1737360"/>
           </a:xfrm>
           <a:prstGeom prst="rect">
             <a:avLst/>
@@ -7765,41 +8839,364 @@
           <a:p>
             <a:pPr algn="ctr"/>
             <a:r>
-              <a:rPr sz="3400" b="1">
+              <a:rPr sz="4000" b="1">
                 <a:solidFill>
                   <a:srgbClr val="1D1D1F"/>
                 </a:solidFill>
                 <a:latin typeface="Calibri"/>
               </a:rPr>
-              <a:t>One sheet. Set Review Ready.</a:t>
-            </a:r>
-          </a:p>
-        </p:txBody>
-      </p:sp>
-      <p:pic>
-        <p:nvPicPr>
-          <p:cNvPr id="4" name="Picture 3" descr="shipaton-sheet-qr.png"/>
-          <p:cNvPicPr>
-            <a:picLocks noChangeAspect="1"/>
-          </p:cNvPicPr>
-          <p:nvPr/>
-        </p:nvPicPr>
-        <p:blipFill>
-          <a:blip r:embed="rId2"/>
-          <a:stretch>
-            <a:fillRect/>
-          </a:stretch>
-        </p:blipFill>
-        <p:spPr>
-          <a:xfrm>
-            <a:off x="4160520" y="1965960"/>
-            <a:ext cx="3840480" cy="3840480"/>
-          </a:xfrm>
-          <a:prstGeom prst="rect">
-            <a:avLst/>
-          </a:prstGeom>
-        </p:spPr>
-      </p:pic>
+              <a:t>Five people × ₹199.</a:t>
+            </a:r>
+          </a:p>
+        </p:txBody>
+      </p:sp>
+      <p:sp>
+        <p:nvSpPr>
+          <p:cNvPr id="4" name="TextBox 3"/>
+          <p:cNvSpPr txBox="1"/>
+          <p:nvPr/>
+        </p:nvSpPr>
+        <p:spPr>
+          <a:xfrm>
+            <a:off x="640080" y="3337560"/>
+            <a:ext cx="10881360" cy="777240"/>
+          </a:xfrm>
+          <a:prstGeom prst="rect">
+            <a:avLst/>
+          </a:prstGeom>
+          <a:noFill/>
+        </p:spPr>
+        <p:txBody>
+          <a:bodyPr wrap="square">
+            <a:spAutoFit/>
+          </a:bodyPr>
+          <a:lstStyle/>
+          <a:p>
+            <a:pPr algn="ctr"/>
+            <a:r>
+              <a:rPr sz="2200" b="0">
+                <a:solidFill>
+                  <a:srgbClr val="6E6E73"/>
+                </a:solidFill>
+                <a:latin typeface="Calibri"/>
+              </a:rPr>
+              <a:t>Your first ₹1,000.</a:t>
+            </a:r>
+          </a:p>
+        </p:txBody>
+      </p:sp>
+      <p:sp>
+        <p:nvSpPr>
+          <p:cNvPr id="5" name="Rounded Rectangle 4"/>
+          <p:cNvSpPr/>
+          <p:nvPr/>
+        </p:nvSpPr>
+        <p:spPr>
+          <a:xfrm>
+            <a:off x="3210915" y="5806440"/>
+            <a:ext cx="1655064" cy="384048"/>
+          </a:xfrm>
+          <a:prstGeom prst="roundRect">
+            <a:avLst/>
+          </a:prstGeom>
+          <a:solidFill>
+            <a:srgbClr val="E8E8ED"/>
+          </a:solidFill>
+          <a:ln>
+            <a:noFill/>
+          </a:ln>
+        </p:spPr>
+        <p:style>
+          <a:lnRef idx="1">
+            <a:schemeClr val="accent1"/>
+          </a:lnRef>
+          <a:fillRef idx="3">
+            <a:schemeClr val="accent1"/>
+          </a:fillRef>
+          <a:effectRef idx="2">
+            <a:schemeClr val="accent1"/>
+          </a:effectRef>
+          <a:fontRef idx="minor">
+            <a:schemeClr val="lt1"/>
+          </a:fontRef>
+        </p:style>
+        <p:txBody>
+          <a:bodyPr rtlCol="0" anchor="ctr"/>
+          <a:lstStyle/>
+          <a:p>
+            <a:pPr algn="ctr"/>
+          </a:p>
+        </p:txBody>
+      </p:sp>
+      <p:sp>
+        <p:nvSpPr>
+          <p:cNvPr id="6" name="TextBox 5"/>
+          <p:cNvSpPr txBox="1"/>
+          <p:nvPr/>
+        </p:nvSpPr>
+        <p:spPr>
+          <a:xfrm>
+            <a:off x="3210915" y="5843016"/>
+            <a:ext cx="1655064" cy="329184"/>
+          </a:xfrm>
+          <a:prstGeom prst="rect">
+            <a:avLst/>
+          </a:prstGeom>
+          <a:noFill/>
+        </p:spPr>
+        <p:txBody>
+          <a:bodyPr wrap="square">
+            <a:spAutoFit/>
+          </a:bodyPr>
+          <a:lstStyle/>
+          <a:p>
+            <a:pPr algn="ctr"/>
+            <a:r>
+              <a:rPr sz="1200" b="1">
+                <a:solidFill>
+                  <a:srgbClr val="1D1D1F"/>
+                </a:solidFill>
+                <a:latin typeface="Calibri"/>
+              </a:rPr>
+              <a:t>₹199 extension</a:t>
+            </a:r>
+          </a:p>
+        </p:txBody>
+      </p:sp>
+      <p:sp>
+        <p:nvSpPr>
+          <p:cNvPr id="7" name="Rounded Rectangle 6"/>
+          <p:cNvSpPr/>
+          <p:nvPr/>
+        </p:nvSpPr>
+        <p:spPr>
+          <a:xfrm>
+            <a:off x="5030571" y="5806440"/>
+            <a:ext cx="1078992" cy="384048"/>
+          </a:xfrm>
+          <a:prstGeom prst="roundRect">
+            <a:avLst/>
+          </a:prstGeom>
+          <a:solidFill>
+            <a:srgbClr val="E8E8ED"/>
+          </a:solidFill>
+          <a:ln>
+            <a:noFill/>
+          </a:ln>
+        </p:spPr>
+        <p:style>
+          <a:lnRef idx="1">
+            <a:schemeClr val="accent1"/>
+          </a:lnRef>
+          <a:fillRef idx="3">
+            <a:schemeClr val="accent1"/>
+          </a:fillRef>
+          <a:effectRef idx="2">
+            <a:schemeClr val="accent1"/>
+          </a:effectRef>
+          <a:fontRef idx="minor">
+            <a:schemeClr val="lt1"/>
+          </a:fontRef>
+        </p:style>
+        <p:txBody>
+          <a:bodyPr rtlCol="0" anchor="ctr"/>
+          <a:lstStyle/>
+          <a:p>
+            <a:pPr algn="ctr"/>
+          </a:p>
+        </p:txBody>
+      </p:sp>
+      <p:sp>
+        <p:nvSpPr>
+          <p:cNvPr id="8" name="TextBox 7"/>
+          <p:cNvSpPr txBox="1"/>
+          <p:nvPr/>
+        </p:nvSpPr>
+        <p:spPr>
+          <a:xfrm>
+            <a:off x="5030571" y="5843016"/>
+            <a:ext cx="1078992" cy="329184"/>
+          </a:xfrm>
+          <a:prstGeom prst="rect">
+            <a:avLst/>
+          </a:prstGeom>
+          <a:noFill/>
+        </p:spPr>
+        <p:txBody>
+          <a:bodyPr wrap="square">
+            <a:spAutoFit/>
+          </a:bodyPr>
+          <a:lstStyle/>
+          <a:p>
+            <a:pPr algn="ctr"/>
+            <a:r>
+              <a:rPr sz="1200" b="1">
+                <a:solidFill>
+                  <a:srgbClr val="1D1D1F"/>
+                </a:solidFill>
+                <a:latin typeface="Calibri"/>
+              </a:rPr>
+              <a:t>₹299 app</a:t>
+            </a:r>
+          </a:p>
+        </p:txBody>
+      </p:sp>
+      <p:sp>
+        <p:nvSpPr>
+          <p:cNvPr id="9" name="Rounded Rectangle 8"/>
+          <p:cNvSpPr/>
+          <p:nvPr/>
+        </p:nvSpPr>
+        <p:spPr>
+          <a:xfrm>
+            <a:off x="6274155" y="5806440"/>
+            <a:ext cx="1271016" cy="384048"/>
+          </a:xfrm>
+          <a:prstGeom prst="roundRect">
+            <a:avLst/>
+          </a:prstGeom>
+          <a:solidFill>
+            <a:srgbClr val="E8E8ED"/>
+          </a:solidFill>
+          <a:ln>
+            <a:noFill/>
+          </a:ln>
+        </p:spPr>
+        <p:style>
+          <a:lnRef idx="1">
+            <a:schemeClr val="accent1"/>
+          </a:lnRef>
+          <a:fillRef idx="3">
+            <a:schemeClr val="accent1"/>
+          </a:fillRef>
+          <a:effectRef idx="2">
+            <a:schemeClr val="accent1"/>
+          </a:effectRef>
+          <a:fontRef idx="minor">
+            <a:schemeClr val="lt1"/>
+          </a:fontRef>
+        </p:style>
+        <p:txBody>
+          <a:bodyPr rtlCol="0" anchor="ctr"/>
+          <a:lstStyle/>
+          <a:p>
+            <a:pPr algn="ctr"/>
+          </a:p>
+        </p:txBody>
+      </p:sp>
+      <p:sp>
+        <p:nvSpPr>
+          <p:cNvPr id="10" name="TextBox 9"/>
+          <p:cNvSpPr txBox="1"/>
+          <p:nvPr/>
+        </p:nvSpPr>
+        <p:spPr>
+          <a:xfrm>
+            <a:off x="6274155" y="5843016"/>
+            <a:ext cx="1271016" cy="329184"/>
+          </a:xfrm>
+          <a:prstGeom prst="rect">
+            <a:avLst/>
+          </a:prstGeom>
+          <a:noFill/>
+        </p:spPr>
+        <p:txBody>
+          <a:bodyPr wrap="square">
+            <a:spAutoFit/>
+          </a:bodyPr>
+          <a:lstStyle/>
+          <a:p>
+            <a:pPr algn="ctr"/>
+            <a:r>
+              <a:rPr sz="1200" b="1">
+                <a:solidFill>
+                  <a:srgbClr val="1D1D1F"/>
+                </a:solidFill>
+                <a:latin typeface="Calibri"/>
+              </a:rPr>
+              <a:t>₹499/month</a:t>
+            </a:r>
+          </a:p>
+        </p:txBody>
+      </p:sp>
+      <p:sp>
+        <p:nvSpPr>
+          <p:cNvPr id="11" name="Rounded Rectangle 10"/>
+          <p:cNvSpPr/>
+          <p:nvPr/>
+        </p:nvSpPr>
+        <p:spPr>
+          <a:xfrm>
+            <a:off x="7709763" y="5806440"/>
+            <a:ext cx="1271016" cy="384048"/>
+          </a:xfrm>
+          <a:prstGeom prst="roundRect">
+            <a:avLst/>
+          </a:prstGeom>
+          <a:solidFill>
+            <a:srgbClr val="E8E8ED"/>
+          </a:solidFill>
+          <a:ln>
+            <a:noFill/>
+          </a:ln>
+        </p:spPr>
+        <p:style>
+          <a:lnRef idx="1">
+            <a:schemeClr val="accent1"/>
+          </a:lnRef>
+          <a:fillRef idx="3">
+            <a:schemeClr val="accent1"/>
+          </a:fillRef>
+          <a:effectRef idx="2">
+            <a:schemeClr val="accent1"/>
+          </a:effectRef>
+          <a:fontRef idx="minor">
+            <a:schemeClr val="lt1"/>
+          </a:fontRef>
+        </p:style>
+        <p:txBody>
+          <a:bodyPr rtlCol="0" anchor="ctr"/>
+          <a:lstStyle/>
+          <a:p>
+            <a:pPr algn="ctr"/>
+          </a:p>
+        </p:txBody>
+      </p:sp>
+      <p:sp>
+        <p:nvSpPr>
+          <p:cNvPr id="12" name="TextBox 11"/>
+          <p:cNvSpPr txBox="1"/>
+          <p:nvPr/>
+        </p:nvSpPr>
+        <p:spPr>
+          <a:xfrm>
+            <a:off x="7709763" y="5843016"/>
+            <a:ext cx="1271016" cy="329184"/>
+          </a:xfrm>
+          <a:prstGeom prst="rect">
+            <a:avLst/>
+          </a:prstGeom>
+          <a:noFill/>
+        </p:spPr>
+        <p:txBody>
+          <a:bodyPr wrap="square">
+            <a:spAutoFit/>
+          </a:bodyPr>
+          <a:lstStyle/>
+          <a:p>
+            <a:pPr algn="ctr"/>
+            <a:r>
+              <a:rPr sz="1200" b="1">
+                <a:solidFill>
+                  <a:srgbClr val="1D1D1F"/>
+                </a:solidFill>
+                <a:latin typeface="Calibri"/>
+              </a:rPr>
+              <a:t>Level pack</a:t>
+            </a:r>
+          </a:p>
+        </p:txBody>
+      </p:sp>
     </p:spTree>
   </p:cSld>
   <p:clrMapOvr>
@@ -7869,7 +9266,7 @@
         </p:nvSpPr>
         <p:spPr>
           <a:xfrm>
-            <a:off x="640080" y="1874519"/>
+            <a:off x="640080" y="1783080"/>
             <a:ext cx="10881360" cy="1737360"/>
           </a:xfrm>
           <a:prstGeom prst="rect">
@@ -7885,27 +9282,62 @@
           <a:p>
             <a:pPr algn="ctr"/>
             <a:r>
-              <a:rPr sz="4000" b="1">
+              <a:rPr sz="3600" b="1">
                 <a:solidFill>
                   <a:srgbClr val="1D1D1F"/>
                 </a:solidFill>
                 <a:latin typeface="Calibri"/>
               </a:rPr>
-              <a:t>Thursday. Make it live.</a:t>
-            </a:r>
-          </a:p>
-        </p:txBody>
-      </p:sp>
-      <p:sp>
-        <p:nvSpPr>
-          <p:cNvPr id="4" name="Rounded Rectangle 3"/>
+              <a:t>Build anything. Ship something.</a:t>
+            </a:r>
+          </a:p>
+        </p:txBody>
+      </p:sp>
+      <p:sp>
+        <p:nvSpPr>
+          <p:cNvPr id="4" name="TextBox 3"/>
+          <p:cNvSpPr txBox="1"/>
+          <p:nvPr/>
+        </p:nvSpPr>
+        <p:spPr>
+          <a:xfrm>
+            <a:off x="640080" y="3566160"/>
+            <a:ext cx="10881360" cy="777240"/>
+          </a:xfrm>
+          <a:prstGeom prst="rect">
+            <a:avLst/>
+          </a:prstGeom>
+          <a:noFill/>
+        </p:spPr>
+        <p:txBody>
+          <a:bodyPr wrap="square">
+            <a:spAutoFit/>
+          </a:bodyPr>
+          <a:lstStyle/>
+          <a:p>
+            <a:pPr algn="ctr"/>
+            <a:r>
+              <a:rPr sz="2200" b="0">
+                <a:solidFill>
+                  <a:srgbClr val="6E6E73"/>
+                </a:solidFill>
+                <a:latin typeface="Calibri"/>
+              </a:rPr>
+              <a:t>Solo or team.</a:t>
+            </a:r>
+          </a:p>
+        </p:txBody>
+      </p:sp>
+      <p:sp>
+        <p:nvSpPr>
+          <p:cNvPr id="5" name="Rounded Rectangle 4"/>
           <p:cNvSpPr/>
           <p:nvPr/>
         </p:nvSpPr>
         <p:spPr>
           <a:xfrm>
-            <a:off x="4168749" y="5257800"/>
-            <a:ext cx="1078992" cy="384048"/>
+            <a:off x="4507077" y="5440680"/>
+            <a:ext cx="694944" cy="384048"/>
           </a:xfrm>
           <a:prstGeom prst="roundRect">
             <a:avLst/>
@@ -7941,14 +9373,14 @@
       </p:sp>
       <p:sp>
         <p:nvSpPr>
-          <p:cNvPr id="5" name="TextBox 4"/>
+          <p:cNvPr id="6" name="TextBox 5"/>
           <p:cNvSpPr txBox="1"/>
           <p:nvPr/>
         </p:nvSpPr>
         <p:spPr>
           <a:xfrm>
-            <a:off x="4168749" y="5294376"/>
-            <a:ext cx="1078992" cy="329184"/>
+            <a:off x="4507077" y="5477256"/>
+            <a:ext cx="694944" cy="329184"/>
           </a:xfrm>
           <a:prstGeom prst="rect">
             <a:avLst/>
@@ -7969,21 +9401,21 @@
                 </a:solidFill>
                 <a:latin typeface="Calibri"/>
               </a:rPr>
-              <a:t>Deployed</a:t>
-            </a:r>
-          </a:p>
-        </p:txBody>
-      </p:sp>
-      <p:sp>
-        <p:nvSpPr>
-          <p:cNvPr id="6" name="Rounded Rectangle 5"/>
+              <a:t>Game</a:t>
+            </a:r>
+          </a:p>
+        </p:txBody>
+      </p:sp>
+      <p:sp>
+        <p:nvSpPr>
+          <p:cNvPr id="7" name="Rounded Rectangle 6"/>
           <p:cNvSpPr/>
           <p:nvPr/>
         </p:nvSpPr>
         <p:spPr>
           <a:xfrm>
-            <a:off x="5412333" y="5257800"/>
-            <a:ext cx="886968" cy="384048"/>
+            <a:off x="5366613" y="5440680"/>
+            <a:ext cx="598932" cy="384048"/>
           </a:xfrm>
           <a:prstGeom prst="roundRect">
             <a:avLst/>
@@ -8019,14 +9451,14 @@
       </p:sp>
       <p:sp>
         <p:nvSpPr>
-          <p:cNvPr id="7" name="TextBox 6"/>
+          <p:cNvPr id="8" name="TextBox 7"/>
           <p:cNvSpPr txBox="1"/>
           <p:nvPr/>
         </p:nvSpPr>
         <p:spPr>
           <a:xfrm>
-            <a:off x="5412333" y="5294376"/>
-            <a:ext cx="886968" cy="329184"/>
+            <a:off x="5366613" y="5477256"/>
+            <a:ext cx="598932" cy="329184"/>
           </a:xfrm>
           <a:prstGeom prst="rect">
             <a:avLst/>
@@ -8047,21 +9479,21 @@
                 </a:solidFill>
                 <a:latin typeface="Calibri"/>
               </a:rPr>
-              <a:t>Usable</a:t>
-            </a:r>
-          </a:p>
-        </p:txBody>
-      </p:sp>
-      <p:sp>
-        <p:nvSpPr>
-          <p:cNvPr id="8" name="Rounded Rectangle 7"/>
+              <a:t>App</a:t>
+            </a:r>
+          </a:p>
+        </p:txBody>
+      </p:sp>
+      <p:sp>
+        <p:nvSpPr>
+          <p:cNvPr id="9" name="Rounded Rectangle 8"/>
           <p:cNvSpPr/>
           <p:nvPr/>
         </p:nvSpPr>
         <p:spPr>
           <a:xfrm>
-            <a:off x="6463893" y="5257800"/>
-            <a:ext cx="1559052" cy="384048"/>
+            <a:off x="6130137" y="5440680"/>
+            <a:ext cx="694944" cy="384048"/>
           </a:xfrm>
           <a:prstGeom prst="roundRect">
             <a:avLst/>
@@ -8097,14 +9529,14 @@
       </p:sp>
       <p:sp>
         <p:nvSpPr>
-          <p:cNvPr id="9" name="TextBox 8"/>
+          <p:cNvPr id="10" name="TextBox 9"/>
           <p:cNvSpPr txBox="1"/>
           <p:nvPr/>
         </p:nvSpPr>
         <p:spPr>
           <a:xfrm>
-            <a:off x="6463893" y="5294376"/>
-            <a:ext cx="1559052" cy="329184"/>
+            <a:off x="6130137" y="5477256"/>
+            <a:ext cx="694944" cy="329184"/>
           </a:xfrm>
           <a:prstGeom prst="rect">
             <a:avLst/>
@@ -8125,7 +9557,85 @@
                 </a:solidFill>
                 <a:latin typeface="Calibri"/>
               </a:rPr>
-              <a:t>Payments work</a:t>
+              <a:t>Site</a:t>
+            </a:r>
+          </a:p>
+        </p:txBody>
+      </p:sp>
+      <p:sp>
+        <p:nvSpPr>
+          <p:cNvPr id="11" name="Rounded Rectangle 10"/>
+          <p:cNvSpPr/>
+          <p:nvPr/>
+        </p:nvSpPr>
+        <p:spPr>
+          <a:xfrm>
+            <a:off x="6989673" y="5440680"/>
+            <a:ext cx="694944" cy="384048"/>
+          </a:xfrm>
+          <a:prstGeom prst="roundRect">
+            <a:avLst/>
+          </a:prstGeom>
+          <a:solidFill>
+            <a:srgbClr val="E8E8ED"/>
+          </a:solidFill>
+          <a:ln>
+            <a:noFill/>
+          </a:ln>
+        </p:spPr>
+        <p:style>
+          <a:lnRef idx="1">
+            <a:schemeClr val="accent1"/>
+          </a:lnRef>
+          <a:fillRef idx="3">
+            <a:schemeClr val="accent1"/>
+          </a:fillRef>
+          <a:effectRef idx="2">
+            <a:schemeClr val="accent1"/>
+          </a:effectRef>
+          <a:fontRef idx="minor">
+            <a:schemeClr val="lt1"/>
+          </a:fontRef>
+        </p:style>
+        <p:txBody>
+          <a:bodyPr rtlCol="0" anchor="ctr"/>
+          <a:lstStyle/>
+          <a:p>
+            <a:pPr algn="ctr"/>
+          </a:p>
+        </p:txBody>
+      </p:sp>
+      <p:sp>
+        <p:nvSpPr>
+          <p:cNvPr id="12" name="TextBox 11"/>
+          <p:cNvSpPr txBox="1"/>
+          <p:nvPr/>
+        </p:nvSpPr>
+        <p:spPr>
+          <a:xfrm>
+            <a:off x="6989673" y="5477256"/>
+            <a:ext cx="694944" cy="329184"/>
+          </a:xfrm>
+          <a:prstGeom prst="rect">
+            <a:avLst/>
+          </a:prstGeom>
+          <a:noFill/>
+        </p:spPr>
+        <p:txBody>
+          <a:bodyPr wrap="square">
+            <a:spAutoFit/>
+          </a:bodyPr>
+          <a:lstStyle/>
+          <a:p>
+            <a:pPr algn="ctr"/>
+            <a:r>
+              <a:rPr sz="1200" b="1">
+                <a:solidFill>
+                  <a:srgbClr val="1D1D1F"/>
+                </a:solidFill>
+                <a:latin typeface="Calibri"/>
+              </a:rPr>
+              <a:t>Tool</a:t>
             </a:r>
           </a:p>
         </p:txBody>
@@ -8199,8 +9709,8 @@
         </p:nvSpPr>
         <p:spPr>
           <a:xfrm>
-            <a:off x="640080" y="1051560"/>
-            <a:ext cx="10881360" cy="1005840"/>
+            <a:off x="640080" y="640080"/>
+            <a:ext cx="10881360" cy="1143000"/>
           </a:xfrm>
           <a:prstGeom prst="rect">
             <a:avLst/>
@@ -8215,165 +9725,41 @@
           <a:p>
             <a:pPr algn="ctr"/>
             <a:r>
-              <a:rPr sz="3600" b="1">
+              <a:rPr sz="3400" b="1">
                 <a:solidFill>
                   <a:srgbClr val="1D1D1F"/>
                 </a:solidFill>
                 <a:latin typeface="Calibri"/>
               </a:rPr>
-              <a:t>Ship it. Get reviewed.</a:t>
-            </a:r>
-          </a:p>
-        </p:txBody>
-      </p:sp>
-      <p:sp>
-        <p:nvSpPr>
-          <p:cNvPr id="4" name="TextBox 3"/>
-          <p:cNvSpPr txBox="1"/>
-          <p:nvPr/>
-        </p:nvSpPr>
-        <p:spPr>
-          <a:xfrm>
-            <a:off x="822960" y="2331720"/>
-            <a:ext cx="10515600" cy="1828800"/>
-          </a:xfrm>
-          <a:prstGeom prst="rect">
-            <a:avLst/>
-          </a:prstGeom>
-          <a:noFill/>
-        </p:spPr>
-        <p:txBody>
-          <a:bodyPr wrap="square">
-            <a:spAutoFit/>
-          </a:bodyPr>
-          <a:lstStyle/>
-          <a:p>
-            <a:pPr algn="ctr"/>
-            <a:r>
-              <a:rPr sz="2400" b="1">
-                <a:solidFill>
-                  <a:srgbClr val="1D1D1F"/>
-                </a:solidFill>
-                <a:latin typeface="Calibri"/>
-              </a:rPr>
-              <a:t>We're going to see 10 person billion-dollar companies pretty soon.</a:t>
-            </a:r>
-          </a:p>
-        </p:txBody>
-      </p:sp>
-      <p:sp>
-        <p:nvSpPr>
-          <p:cNvPr id="5" name="TextBox 4"/>
-          <p:cNvSpPr txBox="1"/>
-          <p:nvPr/>
-        </p:nvSpPr>
-        <p:spPr>
-          <a:xfrm>
-            <a:off x="640080" y="4297680"/>
-            <a:ext cx="10881360" cy="365760"/>
-          </a:xfrm>
-          <a:prstGeom prst="rect">
-            <a:avLst/>
-          </a:prstGeom>
-          <a:noFill/>
-        </p:spPr>
-        <p:txBody>
-          <a:bodyPr wrap="square">
-            <a:spAutoFit/>
-          </a:bodyPr>
-          <a:lstStyle/>
-          <a:p>
-            <a:pPr algn="ctr"/>
-            <a:r>
-              <a:rPr sz="1400" b="1">
-                <a:solidFill>
-                  <a:srgbClr val="6E6E73"/>
-                </a:solidFill>
-                <a:latin typeface="Calibri"/>
-              </a:rPr>
-              <a:t>Sam Altman</a:t>
-            </a:r>
-          </a:p>
-        </p:txBody>
-      </p:sp>
-      <p:sp>
-        <p:nvSpPr>
-          <p:cNvPr id="6" name="Rounded Rectangle 5"/>
-          <p:cNvSpPr/>
-          <p:nvPr/>
-        </p:nvSpPr>
-        <p:spPr>
-          <a:xfrm>
-            <a:off x="5220309" y="5257800"/>
-            <a:ext cx="1751076" cy="384048"/>
-          </a:xfrm>
-          <a:prstGeom prst="roundRect">
-            <a:avLst/>
-          </a:prstGeom>
-          <a:solidFill>
-            <a:srgbClr val="E8E8ED"/>
-          </a:solidFill>
-          <a:ln>
-            <a:noFill/>
-          </a:ln>
-        </p:spPr>
-        <p:style>
-          <a:lnRef idx="1">
-            <a:schemeClr val="accent1"/>
-          </a:lnRef>
-          <a:fillRef idx="3">
-            <a:schemeClr val="accent1"/>
-          </a:fillRef>
-          <a:effectRef idx="2">
-            <a:schemeClr val="accent1"/>
-          </a:effectRef>
-          <a:fontRef idx="minor">
-            <a:schemeClr val="lt1"/>
-          </a:fontRef>
-        </p:style>
-        <p:txBody>
-          <a:bodyPr rtlCol="0" anchor="ctr"/>
-          <a:lstStyle/>
-          <a:p>
-            <a:pPr algn="ctr"/>
-          </a:p>
-        </p:txBody>
-      </p:sp>
-      <p:sp>
-        <p:nvSpPr>
-          <p:cNvPr id="7" name="TextBox 6"/>
-          <p:cNvSpPr txBox="1"/>
-          <p:nvPr/>
-        </p:nvSpPr>
-        <p:spPr>
-          <a:xfrm>
-            <a:off x="5220309" y="5294376"/>
-            <a:ext cx="1751076" cy="329184"/>
-          </a:xfrm>
-          <a:prstGeom prst="rect">
-            <a:avLst/>
-          </a:prstGeom>
-          <a:noFill/>
-        </p:spPr>
-        <p:txBody>
-          <a:bodyPr wrap="square">
-            <a:spAutoFit/>
-          </a:bodyPr>
-          <a:lstStyle/>
-          <a:p>
-            <a:pPr algn="ctr"/>
-            <a:r>
-              <a:rPr sz="1200" b="1">
-                <a:solidFill>
-                  <a:srgbClr val="1D1D1F"/>
-                </a:solidFill>
-                <a:latin typeface="Calibri"/>
-              </a:rPr>
-              <a:t>DevFest tickets</a:t>
-            </a:r>
-          </a:p>
-        </p:txBody>
-      </p:sp>
+              <a:t>One sheet. Set Review Ready.</a:t>
+            </a:r>
+          </a:p>
+        </p:txBody>
+      </p:sp>
+      <p:pic>
+        <p:nvPicPr>
+          <p:cNvPr id="4" name="Picture 3" descr="shipaton-sheet-qr.png"/>
+          <p:cNvPicPr>
+            <a:picLocks noChangeAspect="1"/>
+          </p:cNvPicPr>
+          <p:nvPr/>
+        </p:nvPicPr>
+        <p:blipFill>
+          <a:blip r:embed="rId2"/>
+          <a:stretch>
+            <a:fillRect/>
+          </a:stretch>
+        </p:blipFill>
+        <p:spPr>
+          <a:xfrm>
+            <a:off x="4160520" y="1965960"/>
+            <a:ext cx="3840480" cy="3840480"/>
+          </a:xfrm>
+          <a:prstGeom prst="rect">
+            <a:avLst/>
+          </a:prstGeom>
+        </p:spPr>
+      </p:pic>
     </p:spTree>
   </p:cSld>
   <p:clrMapOvr>
@@ -8616,7 +10002,7 @@
             <a:avLst/>
           </a:prstGeom>
           <a:solidFill>
-            <a:srgbClr val="070710"/>
+            <a:srgbClr val="F5F5F7"/>
           </a:solidFill>
           <a:ln>
             <a:noFill/>
@@ -8644,9 +10030,1018 @@
           </a:p>
         </p:txBody>
       </p:sp>
+      <p:sp>
+        <p:nvSpPr>
+          <p:cNvPr id="3" name="TextBox 2"/>
+          <p:cNvSpPr txBox="1"/>
+          <p:nvPr/>
+        </p:nvSpPr>
+        <p:spPr>
+          <a:xfrm>
+            <a:off x="640080" y="1874519"/>
+            <a:ext cx="10881360" cy="1737360"/>
+          </a:xfrm>
+          <a:prstGeom prst="rect">
+            <a:avLst/>
+          </a:prstGeom>
+          <a:noFill/>
+        </p:spPr>
+        <p:txBody>
+          <a:bodyPr wrap="square">
+            <a:spAutoFit/>
+          </a:bodyPr>
+          <a:lstStyle/>
+          <a:p>
+            <a:pPr algn="ctr"/>
+            <a:r>
+              <a:rPr sz="4000" b="1">
+                <a:solidFill>
+                  <a:srgbClr val="1D1D1F"/>
+                </a:solidFill>
+                <a:latin typeface="Calibri"/>
+              </a:rPr>
+              <a:t>Thursday. Make it live.</a:t>
+            </a:r>
+          </a:p>
+        </p:txBody>
+      </p:sp>
+      <p:sp>
+        <p:nvSpPr>
+          <p:cNvPr id="4" name="Rounded Rectangle 3"/>
+          <p:cNvSpPr/>
+          <p:nvPr/>
+        </p:nvSpPr>
+        <p:spPr>
+          <a:xfrm>
+            <a:off x="4168749" y="5257800"/>
+            <a:ext cx="1078992" cy="384048"/>
+          </a:xfrm>
+          <a:prstGeom prst="roundRect">
+            <a:avLst/>
+          </a:prstGeom>
+          <a:solidFill>
+            <a:srgbClr val="E8E8ED"/>
+          </a:solidFill>
+          <a:ln>
+            <a:noFill/>
+          </a:ln>
+        </p:spPr>
+        <p:style>
+          <a:lnRef idx="1">
+            <a:schemeClr val="accent1"/>
+          </a:lnRef>
+          <a:fillRef idx="3">
+            <a:schemeClr val="accent1"/>
+          </a:fillRef>
+          <a:effectRef idx="2">
+            <a:schemeClr val="accent1"/>
+          </a:effectRef>
+          <a:fontRef idx="minor">
+            <a:schemeClr val="lt1"/>
+          </a:fontRef>
+        </p:style>
+        <p:txBody>
+          <a:bodyPr rtlCol="0" anchor="ctr"/>
+          <a:lstStyle/>
+          <a:p>
+            <a:pPr algn="ctr"/>
+          </a:p>
+        </p:txBody>
+      </p:sp>
+      <p:sp>
+        <p:nvSpPr>
+          <p:cNvPr id="5" name="TextBox 4"/>
+          <p:cNvSpPr txBox="1"/>
+          <p:nvPr/>
+        </p:nvSpPr>
+        <p:spPr>
+          <a:xfrm>
+            <a:off x="4168749" y="5294376"/>
+            <a:ext cx="1078992" cy="329184"/>
+          </a:xfrm>
+          <a:prstGeom prst="rect">
+            <a:avLst/>
+          </a:prstGeom>
+          <a:noFill/>
+        </p:spPr>
+        <p:txBody>
+          <a:bodyPr wrap="square">
+            <a:spAutoFit/>
+          </a:bodyPr>
+          <a:lstStyle/>
+          <a:p>
+            <a:pPr algn="ctr"/>
+            <a:r>
+              <a:rPr sz="1200" b="1">
+                <a:solidFill>
+                  <a:srgbClr val="1D1D1F"/>
+                </a:solidFill>
+                <a:latin typeface="Calibri"/>
+              </a:rPr>
+              <a:t>Deployed</a:t>
+            </a:r>
+          </a:p>
+        </p:txBody>
+      </p:sp>
+      <p:sp>
+        <p:nvSpPr>
+          <p:cNvPr id="6" name="Rounded Rectangle 5"/>
+          <p:cNvSpPr/>
+          <p:nvPr/>
+        </p:nvSpPr>
+        <p:spPr>
+          <a:xfrm>
+            <a:off x="5412333" y="5257800"/>
+            <a:ext cx="886968" cy="384048"/>
+          </a:xfrm>
+          <a:prstGeom prst="roundRect">
+            <a:avLst/>
+          </a:prstGeom>
+          <a:solidFill>
+            <a:srgbClr val="E8E8ED"/>
+          </a:solidFill>
+          <a:ln>
+            <a:noFill/>
+          </a:ln>
+        </p:spPr>
+        <p:style>
+          <a:lnRef idx="1">
+            <a:schemeClr val="accent1"/>
+          </a:lnRef>
+          <a:fillRef idx="3">
+            <a:schemeClr val="accent1"/>
+          </a:fillRef>
+          <a:effectRef idx="2">
+            <a:schemeClr val="accent1"/>
+          </a:effectRef>
+          <a:fontRef idx="minor">
+            <a:schemeClr val="lt1"/>
+          </a:fontRef>
+        </p:style>
+        <p:txBody>
+          <a:bodyPr rtlCol="0" anchor="ctr"/>
+          <a:lstStyle/>
+          <a:p>
+            <a:pPr algn="ctr"/>
+          </a:p>
+        </p:txBody>
+      </p:sp>
+      <p:sp>
+        <p:nvSpPr>
+          <p:cNvPr id="7" name="TextBox 6"/>
+          <p:cNvSpPr txBox="1"/>
+          <p:nvPr/>
+        </p:nvSpPr>
+        <p:spPr>
+          <a:xfrm>
+            <a:off x="5412333" y="5294376"/>
+            <a:ext cx="886968" cy="329184"/>
+          </a:xfrm>
+          <a:prstGeom prst="rect">
+            <a:avLst/>
+          </a:prstGeom>
+          <a:noFill/>
+        </p:spPr>
+        <p:txBody>
+          <a:bodyPr wrap="square">
+            <a:spAutoFit/>
+          </a:bodyPr>
+          <a:lstStyle/>
+          <a:p>
+            <a:pPr algn="ctr"/>
+            <a:r>
+              <a:rPr sz="1200" b="1">
+                <a:solidFill>
+                  <a:srgbClr val="1D1D1F"/>
+                </a:solidFill>
+                <a:latin typeface="Calibri"/>
+              </a:rPr>
+              <a:t>Usable</a:t>
+            </a:r>
+          </a:p>
+        </p:txBody>
+      </p:sp>
+      <p:sp>
+        <p:nvSpPr>
+          <p:cNvPr id="8" name="Rounded Rectangle 7"/>
+          <p:cNvSpPr/>
+          <p:nvPr/>
+        </p:nvSpPr>
+        <p:spPr>
+          <a:xfrm>
+            <a:off x="6463893" y="5257800"/>
+            <a:ext cx="1559052" cy="384048"/>
+          </a:xfrm>
+          <a:prstGeom prst="roundRect">
+            <a:avLst/>
+          </a:prstGeom>
+          <a:solidFill>
+            <a:srgbClr val="E8E8ED"/>
+          </a:solidFill>
+          <a:ln>
+            <a:noFill/>
+          </a:ln>
+        </p:spPr>
+        <p:style>
+          <a:lnRef idx="1">
+            <a:schemeClr val="accent1"/>
+          </a:lnRef>
+          <a:fillRef idx="3">
+            <a:schemeClr val="accent1"/>
+          </a:fillRef>
+          <a:effectRef idx="2">
+            <a:schemeClr val="accent1"/>
+          </a:effectRef>
+          <a:fontRef idx="minor">
+            <a:schemeClr val="lt1"/>
+          </a:fontRef>
+        </p:style>
+        <p:txBody>
+          <a:bodyPr rtlCol="0" anchor="ctr"/>
+          <a:lstStyle/>
+          <a:p>
+            <a:pPr algn="ctr"/>
+          </a:p>
+        </p:txBody>
+      </p:sp>
+      <p:sp>
+        <p:nvSpPr>
+          <p:cNvPr id="9" name="TextBox 8"/>
+          <p:cNvSpPr txBox="1"/>
+          <p:nvPr/>
+        </p:nvSpPr>
+        <p:spPr>
+          <a:xfrm>
+            <a:off x="6463893" y="5294376"/>
+            <a:ext cx="1559052" cy="329184"/>
+          </a:xfrm>
+          <a:prstGeom prst="rect">
+            <a:avLst/>
+          </a:prstGeom>
+          <a:noFill/>
+        </p:spPr>
+        <p:txBody>
+          <a:bodyPr wrap="square">
+            <a:spAutoFit/>
+          </a:bodyPr>
+          <a:lstStyle/>
+          <a:p>
+            <a:pPr algn="ctr"/>
+            <a:r>
+              <a:rPr sz="1200" b="1">
+                <a:solidFill>
+                  <a:srgbClr val="1D1D1F"/>
+                </a:solidFill>
+                <a:latin typeface="Calibri"/>
+              </a:rPr>
+              <a:t>Payments work</a:t>
+            </a:r>
+          </a:p>
+        </p:txBody>
+      </p:sp>
+    </p:spTree>
+  </p:cSld>
+  <p:clrMapOvr>
+    <a:masterClrMapping/>
+  </p:clrMapOvr>
+</p:sld>
+</file>
+
+<file path=ppt/slides/slide21.xml><?xml version="1.0" encoding="utf-8"?>
+<p:sld xmlns:a="http://schemas.openxmlformats.org/drawingml/2006/main" xmlns:p="http://schemas.openxmlformats.org/presentationml/2006/main" xmlns:r="http://schemas.openxmlformats.org/officeDocument/2006/relationships">
+  <p:cSld>
+    <p:spTree>
+      <p:nvGrpSpPr>
+        <p:cNvPr id="1" name=""/>
+        <p:cNvGrpSpPr/>
+        <p:nvPr/>
+      </p:nvGrpSpPr>
+      <p:grpSpPr/>
+      <p:sp>
+        <p:nvSpPr>
+          <p:cNvPr id="2" name="Rectangle 1"/>
+          <p:cNvSpPr/>
+          <p:nvPr/>
+        </p:nvSpPr>
+        <p:spPr>
+          <a:xfrm>
+            <a:off x="0" y="0"/>
+            <a:ext cx="12191695" cy="6858000"/>
+          </a:xfrm>
+          <a:prstGeom prst="rect">
+            <a:avLst/>
+          </a:prstGeom>
+          <a:solidFill>
+            <a:srgbClr val="F5F5F7"/>
+          </a:solidFill>
+          <a:ln>
+            <a:noFill/>
+          </a:ln>
+        </p:spPr>
+        <p:style>
+          <a:lnRef idx="1">
+            <a:schemeClr val="accent1"/>
+          </a:lnRef>
+          <a:fillRef idx="3">
+            <a:schemeClr val="accent1"/>
+          </a:fillRef>
+          <a:effectRef idx="2">
+            <a:schemeClr val="accent1"/>
+          </a:effectRef>
+          <a:fontRef idx="minor">
+            <a:schemeClr val="lt1"/>
+          </a:fontRef>
+        </p:style>
+        <p:txBody>
+          <a:bodyPr rtlCol="0" anchor="ctr"/>
+          <a:lstStyle/>
+          <a:p>
+            <a:pPr algn="ctr"/>
+          </a:p>
+        </p:txBody>
+      </p:sp>
+      <p:sp>
+        <p:nvSpPr>
+          <p:cNvPr id="3" name="TextBox 2"/>
+          <p:cNvSpPr txBox="1"/>
+          <p:nvPr/>
+        </p:nvSpPr>
+        <p:spPr>
+          <a:xfrm>
+            <a:off x="640080" y="1051560"/>
+            <a:ext cx="10881360" cy="1005840"/>
+          </a:xfrm>
+          <a:prstGeom prst="rect">
+            <a:avLst/>
+          </a:prstGeom>
+          <a:noFill/>
+        </p:spPr>
+        <p:txBody>
+          <a:bodyPr wrap="square">
+            <a:spAutoFit/>
+          </a:bodyPr>
+          <a:lstStyle/>
+          <a:p>
+            <a:pPr algn="ctr"/>
+            <a:r>
+              <a:rPr sz="3600" b="1">
+                <a:solidFill>
+                  <a:srgbClr val="1D1D1F"/>
+                </a:solidFill>
+                <a:latin typeface="Calibri"/>
+              </a:rPr>
+              <a:t>Ship it. Get reviewed.</a:t>
+            </a:r>
+          </a:p>
+        </p:txBody>
+      </p:sp>
+      <p:sp>
+        <p:nvSpPr>
+          <p:cNvPr id="4" name="TextBox 3"/>
+          <p:cNvSpPr txBox="1"/>
+          <p:nvPr/>
+        </p:nvSpPr>
+        <p:spPr>
+          <a:xfrm>
+            <a:off x="822960" y="2331720"/>
+            <a:ext cx="10515600" cy="1828800"/>
+          </a:xfrm>
+          <a:prstGeom prst="rect">
+            <a:avLst/>
+          </a:prstGeom>
+          <a:noFill/>
+        </p:spPr>
+        <p:txBody>
+          <a:bodyPr wrap="square">
+            <a:spAutoFit/>
+          </a:bodyPr>
+          <a:lstStyle/>
+          <a:p>
+            <a:pPr algn="ctr"/>
+            <a:r>
+              <a:rPr sz="2400" b="1">
+                <a:solidFill>
+                  <a:srgbClr val="1D1D1F"/>
+                </a:solidFill>
+                <a:latin typeface="Calibri"/>
+              </a:rPr>
+              <a:t>We're going to see 10 person billion-dollar companies pretty soon.</a:t>
+            </a:r>
+          </a:p>
+        </p:txBody>
+      </p:sp>
+      <p:sp>
+        <p:nvSpPr>
+          <p:cNvPr id="5" name="TextBox 4"/>
+          <p:cNvSpPr txBox="1"/>
+          <p:nvPr/>
+        </p:nvSpPr>
+        <p:spPr>
+          <a:xfrm>
+            <a:off x="640080" y="4297680"/>
+            <a:ext cx="10881360" cy="365760"/>
+          </a:xfrm>
+          <a:prstGeom prst="rect">
+            <a:avLst/>
+          </a:prstGeom>
+          <a:noFill/>
+        </p:spPr>
+        <p:txBody>
+          <a:bodyPr wrap="square">
+            <a:spAutoFit/>
+          </a:bodyPr>
+          <a:lstStyle/>
+          <a:p>
+            <a:pPr algn="ctr"/>
+            <a:r>
+              <a:rPr sz="1400" b="1">
+                <a:solidFill>
+                  <a:srgbClr val="6E6E73"/>
+                </a:solidFill>
+                <a:latin typeface="Calibri"/>
+              </a:rPr>
+              <a:t>Sam Altman</a:t>
+            </a:r>
+          </a:p>
+        </p:txBody>
+      </p:sp>
+      <p:sp>
+        <p:nvSpPr>
+          <p:cNvPr id="6" name="Rounded Rectangle 5"/>
+          <p:cNvSpPr/>
+          <p:nvPr/>
+        </p:nvSpPr>
+        <p:spPr>
+          <a:xfrm>
+            <a:off x="5220309" y="5257800"/>
+            <a:ext cx="1751076" cy="384048"/>
+          </a:xfrm>
+          <a:prstGeom prst="roundRect">
+            <a:avLst/>
+          </a:prstGeom>
+          <a:solidFill>
+            <a:srgbClr val="E8E8ED"/>
+          </a:solidFill>
+          <a:ln>
+            <a:noFill/>
+          </a:ln>
+        </p:spPr>
+        <p:style>
+          <a:lnRef idx="1">
+            <a:schemeClr val="accent1"/>
+          </a:lnRef>
+          <a:fillRef idx="3">
+            <a:schemeClr val="accent1"/>
+          </a:fillRef>
+          <a:effectRef idx="2">
+            <a:schemeClr val="accent1"/>
+          </a:effectRef>
+          <a:fontRef idx="minor">
+            <a:schemeClr val="lt1"/>
+          </a:fontRef>
+        </p:style>
+        <p:txBody>
+          <a:bodyPr rtlCol="0" anchor="ctr"/>
+          <a:lstStyle/>
+          <a:p>
+            <a:pPr algn="ctr"/>
+          </a:p>
+        </p:txBody>
+      </p:sp>
+      <p:sp>
+        <p:nvSpPr>
+          <p:cNvPr id="7" name="TextBox 6"/>
+          <p:cNvSpPr txBox="1"/>
+          <p:nvPr/>
+        </p:nvSpPr>
+        <p:spPr>
+          <a:xfrm>
+            <a:off x="5220309" y="5294376"/>
+            <a:ext cx="1751076" cy="329184"/>
+          </a:xfrm>
+          <a:prstGeom prst="rect">
+            <a:avLst/>
+          </a:prstGeom>
+          <a:noFill/>
+        </p:spPr>
+        <p:txBody>
+          <a:bodyPr wrap="square">
+            <a:spAutoFit/>
+          </a:bodyPr>
+          <a:lstStyle/>
+          <a:p>
+            <a:pPr algn="ctr"/>
+            <a:r>
+              <a:rPr sz="1200" b="1">
+                <a:solidFill>
+                  <a:srgbClr val="1D1D1F"/>
+                </a:solidFill>
+                <a:latin typeface="Calibri"/>
+              </a:rPr>
+              <a:t>DevFest tickets</a:t>
+            </a:r>
+          </a:p>
+        </p:txBody>
+      </p:sp>
+    </p:spTree>
+  </p:cSld>
+  <p:clrMapOvr>
+    <a:masterClrMapping/>
+  </p:clrMapOvr>
+</p:sld>
+</file>
+
+<file path=ppt/slides/slide22.xml><?xml version="1.0" encoding="utf-8"?>
+<p:sld xmlns:a="http://schemas.openxmlformats.org/drawingml/2006/main" xmlns:p="http://schemas.openxmlformats.org/presentationml/2006/main" xmlns:r="http://schemas.openxmlformats.org/officeDocument/2006/relationships">
+  <p:cSld>
+    <p:spTree>
+      <p:nvGrpSpPr>
+        <p:cNvPr id="1" name=""/>
+        <p:cNvGrpSpPr/>
+        <p:nvPr/>
+      </p:nvGrpSpPr>
+      <p:grpSpPr/>
+      <p:sp>
+        <p:nvSpPr>
+          <p:cNvPr id="2" name="Rectangle 1"/>
+          <p:cNvSpPr/>
+          <p:nvPr/>
+        </p:nvSpPr>
+        <p:spPr>
+          <a:xfrm>
+            <a:off x="0" y="0"/>
+            <a:ext cx="12191695" cy="6858000"/>
+          </a:xfrm>
+          <a:prstGeom prst="rect">
+            <a:avLst/>
+          </a:prstGeom>
+          <a:solidFill>
+            <a:srgbClr val="F5F5F7"/>
+          </a:solidFill>
+          <a:ln>
+            <a:noFill/>
+          </a:ln>
+        </p:spPr>
+        <p:style>
+          <a:lnRef idx="1">
+            <a:schemeClr val="accent1"/>
+          </a:lnRef>
+          <a:fillRef idx="3">
+            <a:schemeClr val="accent1"/>
+          </a:fillRef>
+          <a:effectRef idx="2">
+            <a:schemeClr val="accent1"/>
+          </a:effectRef>
+          <a:fontRef idx="minor">
+            <a:schemeClr val="lt1"/>
+          </a:fontRef>
+        </p:style>
+        <p:txBody>
+          <a:bodyPr rtlCol="0" anchor="ctr"/>
+          <a:lstStyle/>
+          <a:p>
+            <a:pPr algn="ctr"/>
+          </a:p>
+        </p:txBody>
+      </p:sp>
+      <p:sp>
+        <p:nvSpPr>
+          <p:cNvPr id="3" name="TextBox 2"/>
+          <p:cNvSpPr txBox="1"/>
+          <p:nvPr/>
+        </p:nvSpPr>
+        <p:spPr>
+          <a:xfrm>
+            <a:off x="640080" y="1554480"/>
+            <a:ext cx="10881360" cy="1737360"/>
+          </a:xfrm>
+          <a:prstGeom prst="rect">
+            <a:avLst/>
+          </a:prstGeom>
+          <a:noFill/>
+        </p:spPr>
+        <p:txBody>
+          <a:bodyPr wrap="square">
+            <a:spAutoFit/>
+          </a:bodyPr>
+          <a:lstStyle/>
+          <a:p>
+            <a:pPr algn="ctr"/>
+            <a:r>
+              <a:rPr sz="3400" b="1">
+                <a:solidFill>
+                  <a:srgbClr val="1D1D1F"/>
+                </a:solidFill>
+                <a:latin typeface="Calibri"/>
+              </a:rPr>
+              <a:t>Just follow these for now.</a:t>
+            </a:r>
+          </a:p>
+        </p:txBody>
+      </p:sp>
+      <p:sp>
+        <p:nvSpPr>
+          <p:cNvPr id="4" name="TextBox 3"/>
+          <p:cNvSpPr txBox="1"/>
+          <p:nvPr/>
+        </p:nvSpPr>
+        <p:spPr>
+          <a:xfrm>
+            <a:off x="640080" y="3337560"/>
+            <a:ext cx="10881360" cy="777240"/>
+          </a:xfrm>
+          <a:prstGeom prst="rect">
+            <a:avLst/>
+          </a:prstGeom>
+          <a:noFill/>
+        </p:spPr>
+        <p:txBody>
+          <a:bodyPr wrap="square">
+            <a:spAutoFit/>
+          </a:bodyPr>
+          <a:lstStyle/>
+          <a:p>
+            <a:pPr algn="ctr"/>
+            <a:r>
+              <a:rPr sz="2200" b="0">
+                <a:solidFill>
+                  <a:srgbClr val="6E6E73"/>
+                </a:solidFill>
+                <a:latin typeface="Calibri"/>
+              </a:rPr>
+              <a:t>Don't get overwhelmed.</a:t>
+            </a:r>
+          </a:p>
+        </p:txBody>
+      </p:sp>
+      <p:sp>
+        <p:nvSpPr>
+          <p:cNvPr id="5" name="Rounded Rectangle 4"/>
+          <p:cNvSpPr/>
+          <p:nvPr/>
+        </p:nvSpPr>
+        <p:spPr>
+          <a:xfrm>
+            <a:off x="4168749" y="5074920"/>
+            <a:ext cx="406908" cy="384048"/>
+          </a:xfrm>
+          <a:prstGeom prst="roundRect">
+            <a:avLst/>
+          </a:prstGeom>
+          <a:solidFill>
+            <a:srgbClr val="E8E8ED"/>
+          </a:solidFill>
+          <a:ln>
+            <a:noFill/>
+          </a:ln>
+        </p:spPr>
+        <p:style>
+          <a:lnRef idx="1">
+            <a:schemeClr val="accent1"/>
+          </a:lnRef>
+          <a:fillRef idx="3">
+            <a:schemeClr val="accent1"/>
+          </a:fillRef>
+          <a:effectRef idx="2">
+            <a:schemeClr val="accent1"/>
+          </a:effectRef>
+          <a:fontRef idx="minor">
+            <a:schemeClr val="lt1"/>
+          </a:fontRef>
+        </p:style>
+        <p:txBody>
+          <a:bodyPr rtlCol="0" anchor="ctr"/>
+          <a:lstStyle/>
+          <a:p>
+            <a:pPr algn="ctr"/>
+          </a:p>
+        </p:txBody>
+      </p:sp>
+      <p:sp>
+        <p:nvSpPr>
+          <p:cNvPr id="6" name="TextBox 5"/>
+          <p:cNvSpPr txBox="1"/>
+          <p:nvPr/>
+        </p:nvSpPr>
+        <p:spPr>
+          <a:xfrm>
+            <a:off x="4168749" y="5111496"/>
+            <a:ext cx="406908" cy="329184"/>
+          </a:xfrm>
+          <a:prstGeom prst="rect">
+            <a:avLst/>
+          </a:prstGeom>
+          <a:noFill/>
+        </p:spPr>
+        <p:txBody>
+          <a:bodyPr wrap="square">
+            <a:spAutoFit/>
+          </a:bodyPr>
+          <a:lstStyle/>
+          <a:p>
+            <a:pPr algn="ctr"/>
+            <a:r>
+              <a:rPr sz="1200" b="1">
+                <a:solidFill>
+                  <a:srgbClr val="1D1D1F"/>
+                </a:solidFill>
+                <a:latin typeface="Calibri"/>
+              </a:rPr>
+              <a:t>X</a:t>
+            </a:r>
+          </a:p>
+        </p:txBody>
+      </p:sp>
+      <p:sp>
+        <p:nvSpPr>
+          <p:cNvPr id="7" name="Rounded Rectangle 6"/>
+          <p:cNvSpPr/>
+          <p:nvPr/>
+        </p:nvSpPr>
+        <p:spPr>
+          <a:xfrm>
+            <a:off x="4740249" y="5074920"/>
+            <a:ext cx="1463040" cy="384048"/>
+          </a:xfrm>
+          <a:prstGeom prst="roundRect">
+            <a:avLst/>
+          </a:prstGeom>
+          <a:solidFill>
+            <a:srgbClr val="E8E8ED"/>
+          </a:solidFill>
+          <a:ln>
+            <a:noFill/>
+          </a:ln>
+        </p:spPr>
+        <p:style>
+          <a:lnRef idx="1">
+            <a:schemeClr val="accent1"/>
+          </a:lnRef>
+          <a:fillRef idx="3">
+            <a:schemeClr val="accent1"/>
+          </a:fillRef>
+          <a:effectRef idx="2">
+            <a:schemeClr val="accent1"/>
+          </a:effectRef>
+          <a:fontRef idx="minor">
+            <a:schemeClr val="lt1"/>
+          </a:fontRef>
+        </p:style>
+        <p:txBody>
+          <a:bodyPr rtlCol="0" anchor="ctr"/>
+          <a:lstStyle/>
+          <a:p>
+            <a:pPr algn="ctr"/>
+          </a:p>
+        </p:txBody>
+      </p:sp>
+      <p:sp>
+        <p:nvSpPr>
+          <p:cNvPr id="8" name="TextBox 7"/>
+          <p:cNvSpPr txBox="1"/>
+          <p:nvPr/>
+        </p:nvSpPr>
+        <p:spPr>
+          <a:xfrm>
+            <a:off x="4740249" y="5111496"/>
+            <a:ext cx="1463040" cy="329184"/>
+          </a:xfrm>
+          <a:prstGeom prst="rect">
+            <a:avLst/>
+          </a:prstGeom>
+          <a:noFill/>
+        </p:spPr>
+        <p:txBody>
+          <a:bodyPr wrap="square">
+            <a:spAutoFit/>
+          </a:bodyPr>
+          <a:lstStyle/>
+          <a:p>
+            <a:pPr algn="ctr"/>
+            <a:r>
+              <a:rPr sz="1200" b="1">
+                <a:solidFill>
+                  <a:srgbClr val="1D1D1F"/>
+                </a:solidFill>
+                <a:latin typeface="Calibri"/>
+              </a:rPr>
+              <a:t>Product Hunt</a:t>
+            </a:r>
+          </a:p>
+        </p:txBody>
+      </p:sp>
+      <p:sp>
+        <p:nvSpPr>
+          <p:cNvPr id="9" name="Rounded Rectangle 8"/>
+          <p:cNvSpPr/>
+          <p:nvPr/>
+        </p:nvSpPr>
+        <p:spPr>
+          <a:xfrm>
+            <a:off x="6367881" y="5074920"/>
+            <a:ext cx="1655064" cy="384048"/>
+          </a:xfrm>
+          <a:prstGeom prst="roundRect">
+            <a:avLst/>
+          </a:prstGeom>
+          <a:solidFill>
+            <a:srgbClr val="E8E8ED"/>
+          </a:solidFill>
+          <a:ln>
+            <a:noFill/>
+          </a:ln>
+        </p:spPr>
+        <p:style>
+          <a:lnRef idx="1">
+            <a:schemeClr val="accent1"/>
+          </a:lnRef>
+          <a:fillRef idx="3">
+            <a:schemeClr val="accent1"/>
+          </a:fillRef>
+          <a:effectRef idx="2">
+            <a:schemeClr val="accent1"/>
+          </a:effectRef>
+          <a:fontRef idx="minor">
+            <a:schemeClr val="lt1"/>
+          </a:fontRef>
+        </p:style>
+        <p:txBody>
+          <a:bodyPr rtlCol="0" anchor="ctr"/>
+          <a:lstStyle/>
+          <a:p>
+            <a:pPr algn="ctr"/>
+          </a:p>
+        </p:txBody>
+      </p:sp>
+      <p:sp>
+        <p:nvSpPr>
+          <p:cNvPr id="10" name="TextBox 9"/>
+          <p:cNvSpPr txBox="1"/>
+          <p:nvPr/>
+        </p:nvSpPr>
+        <p:spPr>
+          <a:xfrm>
+            <a:off x="6367881" y="5111496"/>
+            <a:ext cx="1655064" cy="329184"/>
+          </a:xfrm>
+          <a:prstGeom prst="rect">
+            <a:avLst/>
+          </a:prstGeom>
+          <a:noFill/>
+        </p:spPr>
+        <p:txBody>
+          <a:bodyPr wrap="square">
+            <a:spAutoFit/>
+          </a:bodyPr>
+          <a:lstStyle/>
+          <a:p>
+            <a:pPr algn="ctr"/>
+            <a:r>
+              <a:rPr sz="1200" b="1">
+                <a:solidFill>
+                  <a:srgbClr val="1D1D1F"/>
+                </a:solidFill>
+                <a:latin typeface="Calibri"/>
+              </a:rPr>
+              <a:t>Startup School</a:t>
+            </a:r>
+          </a:p>
+        </p:txBody>
+      </p:sp>
+    </p:spTree>
+  </p:cSld>
+  <p:clrMapOvr>
+    <a:masterClrMapping/>
+  </p:clrMapOvr>
+</p:sld>
+</file>
+
+<file path=ppt/slides/slide23.xml><?xml version="1.0" encoding="utf-8"?>
+<p:sld xmlns:a="http://schemas.openxmlformats.org/drawingml/2006/main" xmlns:p="http://schemas.openxmlformats.org/presentationml/2006/main" xmlns:r="http://schemas.openxmlformats.org/officeDocument/2006/relationships">
+  <p:cSld>
+    <p:spTree>
+      <p:nvGrpSpPr>
+        <p:cNvPr id="1" name=""/>
+        <p:cNvGrpSpPr/>
+        <p:nvPr/>
+      </p:nvGrpSpPr>
+      <p:grpSpPr/>
+      <p:sp>
+        <p:nvSpPr>
+          <p:cNvPr id="2" name="Rectangle 1"/>
+          <p:cNvSpPr/>
+          <p:nvPr/>
+        </p:nvSpPr>
+        <p:spPr>
+          <a:xfrm>
+            <a:off x="0" y="0"/>
+            <a:ext cx="12191695" cy="6858000"/>
+          </a:xfrm>
+          <a:prstGeom prst="rect">
+            <a:avLst/>
+          </a:prstGeom>
+          <a:solidFill>
+            <a:srgbClr val="F5F5F7"/>
+          </a:solidFill>
+          <a:ln>
+            <a:noFill/>
+          </a:ln>
+        </p:spPr>
+        <p:style>
+          <a:lnRef idx="1">
+            <a:schemeClr val="accent1"/>
+          </a:lnRef>
+          <a:fillRef idx="3">
+            <a:schemeClr val="accent1"/>
+          </a:fillRef>
+          <a:effectRef idx="2">
+            <a:schemeClr val="accent1"/>
+          </a:effectRef>
+          <a:fontRef idx="minor">
+            <a:schemeClr val="lt1"/>
+          </a:fontRef>
+        </p:style>
+        <p:txBody>
+          <a:bodyPr rtlCol="0" anchor="ctr"/>
+          <a:lstStyle/>
+          <a:p>
+            <a:pPr algn="ctr"/>
+          </a:p>
+        </p:txBody>
+      </p:sp>
+      <p:sp>
+        <p:nvSpPr>
+          <p:cNvPr id="3" name="TextBox 2"/>
+          <p:cNvSpPr txBox="1"/>
+          <p:nvPr/>
+        </p:nvSpPr>
+        <p:spPr>
+          <a:xfrm>
+            <a:off x="640080" y="640080"/>
+            <a:ext cx="10881360" cy="1051560"/>
+          </a:xfrm>
+          <a:prstGeom prst="rect">
+            <a:avLst/>
+          </a:prstGeom>
+          <a:noFill/>
+        </p:spPr>
+        <p:txBody>
+          <a:bodyPr wrap="square">
+            <a:spAutoFit/>
+          </a:bodyPr>
+          <a:lstStyle/>
+          <a:p>
+            <a:pPr algn="ctr"/>
+            <a:r>
+              <a:rPr sz="3600" b="1">
+                <a:solidFill>
+                  <a:srgbClr val="1D1D1F"/>
+                </a:solidFill>
+                <a:latin typeface="Calibri"/>
+              </a:rPr>
+              <a:t>Take Startup School.</a:t>
+            </a:r>
+          </a:p>
+        </p:txBody>
+      </p:sp>
+      <p:sp>
+        <p:nvSpPr>
+          <p:cNvPr id="4" name="TextBox 3"/>
+          <p:cNvSpPr txBox="1"/>
+          <p:nvPr/>
+        </p:nvSpPr>
+        <p:spPr>
+          <a:xfrm>
+            <a:off x="640080" y="1737360"/>
+            <a:ext cx="10881360" cy="502920"/>
+          </a:xfrm>
+          <a:prstGeom prst="rect">
+            <a:avLst/>
+          </a:prstGeom>
+          <a:noFill/>
+        </p:spPr>
+        <p:txBody>
+          <a:bodyPr wrap="square">
+            <a:spAutoFit/>
+          </a:bodyPr>
+          <a:lstStyle/>
+          <a:p>
+            <a:pPr algn="ctr"/>
+            <a:r>
+              <a:rPr sz="2200" b="0">
+                <a:solidFill>
+                  <a:srgbClr val="6E6E73"/>
+                </a:solidFill>
+                <a:latin typeface="Calibri"/>
+              </a:rPr>
+              <a:t>Free. Online. From YC.</a:t>
+            </a:r>
+          </a:p>
+        </p:txBody>
+      </p:sp>
       <p:pic>
         <p:nvPicPr>
-          <p:cNvPr id="3" name="Picture 2" descr="kug-chennai-banner.jpg"/>
+          <p:cNvPr id="5" name="Picture 4" descr="startup-school-qr.png"/>
           <p:cNvPicPr>
             <a:picLocks noChangeAspect="1"/>
           </p:cNvPicPr>
@@ -8660,6 +11055,91 @@
         </p:blipFill>
         <p:spPr>
           <a:xfrm>
+            <a:off x="4160520" y="2331720"/>
+            <a:ext cx="3840480" cy="3840480"/>
+          </a:xfrm>
+          <a:prstGeom prst="rect">
+            <a:avLst/>
+          </a:prstGeom>
+        </p:spPr>
+      </p:pic>
+    </p:spTree>
+  </p:cSld>
+  <p:clrMapOvr>
+    <a:masterClrMapping/>
+  </p:clrMapOvr>
+</p:sld>
+</file>
+
+<file path=ppt/slides/slide24.xml><?xml version="1.0" encoding="utf-8"?>
+<p:sld xmlns:a="http://schemas.openxmlformats.org/drawingml/2006/main" xmlns:p="http://schemas.openxmlformats.org/presentationml/2006/main" xmlns:r="http://schemas.openxmlformats.org/officeDocument/2006/relationships">
+  <p:cSld>
+    <p:spTree>
+      <p:nvGrpSpPr>
+        <p:cNvPr id="1" name=""/>
+        <p:cNvGrpSpPr/>
+        <p:nvPr/>
+      </p:nvGrpSpPr>
+      <p:grpSpPr/>
+      <p:sp>
+        <p:nvSpPr>
+          <p:cNvPr id="2" name="Rectangle 1"/>
+          <p:cNvSpPr/>
+          <p:nvPr/>
+        </p:nvSpPr>
+        <p:spPr>
+          <a:xfrm>
+            <a:off x="0" y="0"/>
+            <a:ext cx="12191695" cy="6858000"/>
+          </a:xfrm>
+          <a:prstGeom prst="rect">
+            <a:avLst/>
+          </a:prstGeom>
+          <a:solidFill>
+            <a:srgbClr val="070710"/>
+          </a:solidFill>
+          <a:ln>
+            <a:noFill/>
+          </a:ln>
+        </p:spPr>
+        <p:style>
+          <a:lnRef idx="1">
+            <a:schemeClr val="accent1"/>
+          </a:lnRef>
+          <a:fillRef idx="3">
+            <a:schemeClr val="accent1"/>
+          </a:fillRef>
+          <a:effectRef idx="2">
+            <a:schemeClr val="accent1"/>
+          </a:effectRef>
+          <a:fontRef idx="minor">
+            <a:schemeClr val="lt1"/>
+          </a:fontRef>
+        </p:style>
+        <p:txBody>
+          <a:bodyPr rtlCol="0" anchor="ctr"/>
+          <a:lstStyle/>
+          <a:p>
+            <a:pPr algn="ctr"/>
+          </a:p>
+        </p:txBody>
+      </p:sp>
+      <p:pic>
+        <p:nvPicPr>
+          <p:cNvPr id="3" name="Picture 2" descr="kug-chennai-banner.jpg"/>
+          <p:cNvPicPr>
+            <a:picLocks noChangeAspect="1"/>
+          </p:cNvPicPr>
+          <p:nvPr/>
+        </p:nvPicPr>
+        <p:blipFill>
+          <a:blip r:embed="rId2"/>
+          <a:stretch>
+            <a:fillRect/>
+          </a:stretch>
+        </p:blipFill>
+        <p:spPr>
+          <a:xfrm>
             <a:off x="0" y="85"/>
             <a:ext cx="12191695" cy="6857828"/>
           </a:xfrm>
@@ -8668,6 +11148,137 @@
           </a:prstGeom>
         </p:spPr>
       </p:pic>
+    </p:spTree>
+  </p:cSld>
+  <p:clrMapOvr>
+    <a:masterClrMapping/>
+  </p:clrMapOvr>
+</p:sld>
+</file>
+
+<file path=ppt/slides/slide25.xml><?xml version="1.0" encoding="utf-8"?>
+<p:sld xmlns:a="http://schemas.openxmlformats.org/drawingml/2006/main" xmlns:p="http://schemas.openxmlformats.org/presentationml/2006/main" xmlns:r="http://schemas.openxmlformats.org/officeDocument/2006/relationships">
+  <p:cSld>
+    <p:spTree>
+      <p:nvGrpSpPr>
+        <p:cNvPr id="1" name=""/>
+        <p:cNvGrpSpPr/>
+        <p:nvPr/>
+      </p:nvGrpSpPr>
+      <p:grpSpPr/>
+      <p:sp>
+        <p:nvSpPr>
+          <p:cNvPr id="2" name="Rectangle 1"/>
+          <p:cNvSpPr/>
+          <p:nvPr/>
+        </p:nvSpPr>
+        <p:spPr>
+          <a:xfrm>
+            <a:off x="0" y="0"/>
+            <a:ext cx="12191695" cy="6858000"/>
+          </a:xfrm>
+          <a:prstGeom prst="rect">
+            <a:avLst/>
+          </a:prstGeom>
+          <a:solidFill>
+            <a:srgbClr val="070710"/>
+          </a:solidFill>
+          <a:ln>
+            <a:noFill/>
+          </a:ln>
+        </p:spPr>
+        <p:style>
+          <a:lnRef idx="1">
+            <a:schemeClr val="accent1"/>
+          </a:lnRef>
+          <a:fillRef idx="3">
+            <a:schemeClr val="accent1"/>
+          </a:fillRef>
+          <a:effectRef idx="2">
+            <a:schemeClr val="accent1"/>
+          </a:effectRef>
+          <a:fontRef idx="minor">
+            <a:schemeClr val="lt1"/>
+          </a:fontRef>
+        </p:style>
+        <p:txBody>
+          <a:bodyPr rtlCol="0" anchor="ctr"/>
+          <a:lstStyle/>
+          <a:p>
+            <a:pPr algn="ctr"/>
+          </a:p>
+        </p:txBody>
+      </p:sp>
+      <p:sp>
+        <p:nvSpPr>
+          <p:cNvPr id="3" name="TextBox 2"/>
+          <p:cNvSpPr txBox="1"/>
+          <p:nvPr/>
+        </p:nvSpPr>
+        <p:spPr>
+          <a:xfrm>
+            <a:off x="1097280" y="1874519"/>
+            <a:ext cx="9966960" cy="2377440"/>
+          </a:xfrm>
+          <a:prstGeom prst="rect">
+            <a:avLst/>
+          </a:prstGeom>
+          <a:noFill/>
+        </p:spPr>
+        <p:txBody>
+          <a:bodyPr wrap="square">
+            <a:spAutoFit/>
+          </a:bodyPr>
+          <a:lstStyle/>
+          <a:p>
+            <a:pPr algn="ctr"/>
+            <a:r>
+              <a:rPr sz="2800" b="1">
+                <a:solidFill>
+                  <a:srgbClr val="F5F5F7"/>
+                </a:solidFill>
+                <a:latin typeface="Calibri"/>
+              </a:rPr>
+              <a:t>The people who are crazy enough to think they can change the world are the ones who do.</a:t>
+            </a:r>
+          </a:p>
+        </p:txBody>
+      </p:sp>
+      <p:sp>
+        <p:nvSpPr>
+          <p:cNvPr id="4" name="TextBox 3"/>
+          <p:cNvSpPr txBox="1"/>
+          <p:nvPr/>
+        </p:nvSpPr>
+        <p:spPr>
+          <a:xfrm>
+            <a:off x="1097280" y="4434840"/>
+            <a:ext cx="9966960" cy="411480"/>
+          </a:xfrm>
+          <a:prstGeom prst="rect">
+            <a:avLst/>
+          </a:prstGeom>
+          <a:noFill/>
+        </p:spPr>
+        <p:txBody>
+          <a:bodyPr wrap="square">
+            <a:spAutoFit/>
+          </a:bodyPr>
+          <a:lstStyle/>
+          <a:p>
+            <a:pPr algn="ctr"/>
+            <a:r>
+              <a:rPr sz="1400" b="1">
+                <a:solidFill>
+                  <a:srgbClr val="A1A1A6"/>
+                </a:solidFill>
+                <a:latin typeface="Calibri"/>
+              </a:rPr>
+              <a:t>Steve Jobs</a:t>
+            </a:r>
+          </a:p>
+        </p:txBody>
+      </p:sp>
     </p:spTree>
   </p:cSld>
   <p:clrMapOvr>
@@ -8737,8 +11348,8 @@
         </p:nvSpPr>
         <p:spPr>
           <a:xfrm>
-            <a:off x="640080" y="640080"/>
-            <a:ext cx="10881360" cy="1051560"/>
+            <a:off x="640080" y="502920"/>
+            <a:ext cx="10881360" cy="1737360"/>
           </a:xfrm>
           <a:prstGeom prst="rect">
             <a:avLst/>
@@ -8753,13 +11364,13 @@
           <a:p>
             <a:pPr algn="ctr"/>
             <a:r>
-              <a:rPr sz="3600" b="1">
+              <a:rPr sz="3200" b="1">
                 <a:solidFill>
                   <a:srgbClr val="1D1D1F"/>
                 </a:solidFill>
                 <a:latin typeface="Calibri"/>
               </a:rPr>
-              <a:t>Take Startup School.</a:t>
+              <a:t>You don't need a big team.</a:t>
             </a:r>
           </a:p>
         </p:txBody>
@@ -8772,8 +11383,8 @@
         </p:nvSpPr>
         <p:spPr>
           <a:xfrm>
-            <a:off x="640080" y="1737360"/>
-            <a:ext cx="10881360" cy="502920"/>
+            <a:off x="640080" y="2286000"/>
+            <a:ext cx="10881360" cy="777240"/>
           </a:xfrm>
           <a:prstGeom prst="rect">
             <a:avLst/>
@@ -8794,14 +11405,14 @@
                 </a:solidFill>
                 <a:latin typeface="Calibri"/>
               </a:rPr>
-              <a:t>Free. Online. From YC.</a:t>
+              <a:t>Or months. Or an ad budget.</a:t>
             </a:r>
           </a:p>
         </p:txBody>
       </p:sp>
       <p:pic>
         <p:nvPicPr>
-          <p:cNvPr id="5" name="Picture 4" descr="startup-school-qr.png"/>
+          <p:cNvPr id="5" name="Picture 4" descr="shot-supermeme.jpg"/>
           <p:cNvPicPr>
             <a:picLocks noChangeAspect="1"/>
           </p:cNvPicPr>
@@ -8815,14 +11426,194 @@
         </p:blipFill>
         <p:spPr>
           <a:xfrm>
-            <a:off x="4160520" y="2331720"/>
-            <a:ext cx="3840480" cy="3840480"/>
+            <a:off x="1990191" y="3246120"/>
+            <a:ext cx="4023360" cy="1874519"/>
           </a:xfrm>
           <a:prstGeom prst="rect">
             <a:avLst/>
           </a:prstGeom>
         </p:spPr>
       </p:pic>
+      <p:pic>
+        <p:nvPicPr>
+          <p:cNvPr id="6" name="Picture 5" descr="shot-droidclaw.jpg"/>
+          <p:cNvPicPr>
+            <a:picLocks noChangeAspect="1"/>
+          </p:cNvPicPr>
+          <p:nvPr/>
+        </p:nvPicPr>
+        <p:blipFill>
+          <a:blip r:embed="rId3"/>
+          <a:stretch>
+            <a:fillRect/>
+          </a:stretch>
+        </p:blipFill>
+        <p:spPr>
+          <a:xfrm>
+            <a:off x="6178143" y="3246120"/>
+            <a:ext cx="4023360" cy="1874519"/>
+          </a:xfrm>
+          <a:prstGeom prst="rect">
+            <a:avLst/>
+          </a:prstGeom>
+        </p:spPr>
+      </p:pic>
+      <p:sp>
+        <p:nvSpPr>
+          <p:cNvPr id="7" name="Rounded Rectangle 6"/>
+          <p:cNvSpPr/>
+          <p:nvPr/>
+        </p:nvSpPr>
+        <p:spPr>
+          <a:xfrm>
+            <a:off x="4790541" y="5806440"/>
+            <a:ext cx="1271016" cy="384048"/>
+          </a:xfrm>
+          <a:prstGeom prst="roundRect">
+            <a:avLst/>
+          </a:prstGeom>
+          <a:solidFill>
+            <a:srgbClr val="E8E8ED"/>
+          </a:solidFill>
+          <a:ln>
+            <a:noFill/>
+          </a:ln>
+        </p:spPr>
+        <p:style>
+          <a:lnRef idx="1">
+            <a:schemeClr val="accent1"/>
+          </a:lnRef>
+          <a:fillRef idx="3">
+            <a:schemeClr val="accent1"/>
+          </a:fillRef>
+          <a:effectRef idx="2">
+            <a:schemeClr val="accent1"/>
+          </a:effectRef>
+          <a:fontRef idx="minor">
+            <a:schemeClr val="lt1"/>
+          </a:fontRef>
+        </p:style>
+        <p:txBody>
+          <a:bodyPr rtlCol="0" anchor="ctr"/>
+          <a:lstStyle/>
+          <a:p>
+            <a:pPr algn="ctr"/>
+          </a:p>
+        </p:txBody>
+      </p:sp>
+      <p:sp>
+        <p:nvSpPr>
+          <p:cNvPr id="8" name="TextBox 7"/>
+          <p:cNvSpPr txBox="1"/>
+          <p:nvPr/>
+        </p:nvSpPr>
+        <p:spPr>
+          <a:xfrm>
+            <a:off x="4790541" y="5843016"/>
+            <a:ext cx="1271016" cy="329184"/>
+          </a:xfrm>
+          <a:prstGeom prst="rect">
+            <a:avLst/>
+          </a:prstGeom>
+          <a:noFill/>
+        </p:spPr>
+        <p:txBody>
+          <a:bodyPr wrap="square">
+            <a:spAutoFit/>
+          </a:bodyPr>
+          <a:lstStyle/>
+          <a:p>
+            <a:pPr algn="ctr"/>
+            <a:r>
+              <a:rPr sz="1200" b="1">
+                <a:solidFill>
+                  <a:srgbClr val="1D1D1F"/>
+                </a:solidFill>
+                <a:latin typeface="Calibri"/>
+              </a:rPr>
+              <a:t>Super Meme</a:t>
+            </a:r>
+          </a:p>
+        </p:txBody>
+      </p:sp>
+      <p:sp>
+        <p:nvSpPr>
+          <p:cNvPr id="9" name="Rounded Rectangle 8"/>
+          <p:cNvSpPr/>
+          <p:nvPr/>
+        </p:nvSpPr>
+        <p:spPr>
+          <a:xfrm>
+            <a:off x="6226149" y="5806440"/>
+            <a:ext cx="1175004" cy="384048"/>
+          </a:xfrm>
+          <a:prstGeom prst="roundRect">
+            <a:avLst/>
+          </a:prstGeom>
+          <a:solidFill>
+            <a:srgbClr val="E8E8ED"/>
+          </a:solidFill>
+          <a:ln>
+            <a:noFill/>
+          </a:ln>
+        </p:spPr>
+        <p:style>
+          <a:lnRef idx="1">
+            <a:schemeClr val="accent1"/>
+          </a:lnRef>
+          <a:fillRef idx="3">
+            <a:schemeClr val="accent1"/>
+          </a:fillRef>
+          <a:effectRef idx="2">
+            <a:schemeClr val="accent1"/>
+          </a:effectRef>
+          <a:fontRef idx="minor">
+            <a:schemeClr val="lt1"/>
+          </a:fontRef>
+        </p:style>
+        <p:txBody>
+          <a:bodyPr rtlCol="0" anchor="ctr"/>
+          <a:lstStyle/>
+          <a:p>
+            <a:pPr algn="ctr"/>
+          </a:p>
+        </p:txBody>
+      </p:sp>
+      <p:sp>
+        <p:nvSpPr>
+          <p:cNvPr id="10" name="TextBox 9"/>
+          <p:cNvSpPr txBox="1"/>
+          <p:nvPr/>
+        </p:nvSpPr>
+        <p:spPr>
+          <a:xfrm>
+            <a:off x="6226149" y="5843016"/>
+            <a:ext cx="1175004" cy="329184"/>
+          </a:xfrm>
+          <a:prstGeom prst="rect">
+            <a:avLst/>
+          </a:prstGeom>
+          <a:noFill/>
+        </p:spPr>
+        <p:txBody>
+          <a:bodyPr wrap="square">
+            <a:spAutoFit/>
+          </a:bodyPr>
+          <a:lstStyle/>
+          <a:p>
+            <a:pPr algn="ctr"/>
+            <a:r>
+              <a:rPr sz="1200" b="1">
+                <a:solidFill>
+                  <a:srgbClr val="1D1D1F"/>
+                </a:solidFill>
+                <a:latin typeface="Calibri"/>
+              </a:rPr>
+              <a:t>DroidClaw</a:t>
+            </a:r>
+          </a:p>
+        </p:txBody>
+      </p:sp>
     </p:spTree>
   </p:cSld>
   <p:clrMapOvr>
@@ -8892,7 +11683,7 @@
         </p:nvSpPr>
         <p:spPr>
           <a:xfrm>
-            <a:off x="640080" y="502920"/>
+            <a:off x="640080" y="1554480"/>
             <a:ext cx="10881360" cy="1737360"/>
           </a:xfrm>
           <a:prstGeom prst="rect">
@@ -8908,13 +11699,13 @@
           <a:p>
             <a:pPr algn="ctr"/>
             <a:r>
-              <a:rPr sz="3200" b="1">
+              <a:rPr sz="3400" b="1">
                 <a:solidFill>
                   <a:srgbClr val="1D1D1F"/>
                 </a:solidFill>
                 <a:latin typeface="Calibri"/>
               </a:rPr>
-              <a:t>You don't need a big team.</a:t>
+              <a:t>You don't need the next Instagram.</a:t>
             </a:r>
           </a:p>
         </p:txBody>
@@ -8927,7 +11718,7 @@
         </p:nvSpPr>
         <p:spPr>
           <a:xfrm>
-            <a:off x="640080" y="2286000"/>
+            <a:off x="640080" y="3337560"/>
             <a:ext cx="10881360" cy="777240"/>
           </a:xfrm>
           <a:prstGeom prst="rect">
@@ -8949,69 +11740,21 @@
                 </a:solidFill>
                 <a:latin typeface="Calibri"/>
               </a:rPr>
-              <a:t>Or months. Or an ad budget.</a:t>
-            </a:r>
-          </a:p>
-        </p:txBody>
-      </p:sp>
-      <p:pic>
-        <p:nvPicPr>
-          <p:cNvPr id="5" name="Picture 4" descr="shot-supermeme.jpg"/>
-          <p:cNvPicPr>
-            <a:picLocks noChangeAspect="1"/>
-          </p:cNvPicPr>
-          <p:nvPr/>
-        </p:nvPicPr>
-        <p:blipFill>
-          <a:blip r:embed="rId2"/>
-          <a:stretch>
-            <a:fillRect/>
-          </a:stretch>
-        </p:blipFill>
-        <p:spPr>
-          <a:xfrm>
-            <a:off x="1990191" y="3246120"/>
-            <a:ext cx="4023360" cy="1874519"/>
-          </a:xfrm>
-          <a:prstGeom prst="rect">
-            <a:avLst/>
-          </a:prstGeom>
-        </p:spPr>
-      </p:pic>
-      <p:pic>
-        <p:nvPicPr>
-          <p:cNvPr id="6" name="Picture 5" descr="shot-droidclaw.jpg"/>
-          <p:cNvPicPr>
-            <a:picLocks noChangeAspect="1"/>
-          </p:cNvPicPr>
-          <p:nvPr/>
-        </p:nvPicPr>
-        <p:blipFill>
-          <a:blip r:embed="rId3"/>
-          <a:stretch>
-            <a:fillRect/>
-          </a:stretch>
-        </p:blipFill>
-        <p:spPr>
-          <a:xfrm>
-            <a:off x="6178143" y="3246120"/>
-            <a:ext cx="4023360" cy="1874519"/>
-          </a:xfrm>
-          <a:prstGeom prst="rect">
-            <a:avLst/>
-          </a:prstGeom>
-        </p:spPr>
-      </p:pic>
-      <p:sp>
-        <p:nvSpPr>
-          <p:cNvPr id="7" name="Rounded Rectangle 6"/>
+              <a:t>One problem. A few people.</a:t>
+            </a:r>
+          </a:p>
+        </p:txBody>
+      </p:sp>
+      <p:sp>
+        <p:nvSpPr>
+          <p:cNvPr id="5" name="Rounded Rectangle 4"/>
           <p:cNvSpPr/>
           <p:nvPr/>
         </p:nvSpPr>
         <p:spPr>
           <a:xfrm>
-            <a:off x="4790541" y="5806440"/>
-            <a:ext cx="1271016" cy="384048"/>
+            <a:off x="2538831" y="5074920"/>
+            <a:ext cx="1367028" cy="384048"/>
           </a:xfrm>
           <a:prstGeom prst="roundRect">
             <a:avLst/>
@@ -9047,14 +11790,14 @@
       </p:sp>
       <p:sp>
         <p:nvSpPr>
-          <p:cNvPr id="8" name="TextBox 7"/>
+          <p:cNvPr id="6" name="TextBox 5"/>
           <p:cNvSpPr txBox="1"/>
           <p:nvPr/>
         </p:nvSpPr>
         <p:spPr>
           <a:xfrm>
-            <a:off x="4790541" y="5843016"/>
-            <a:ext cx="1271016" cy="329184"/>
+            <a:off x="2538831" y="5111496"/>
+            <a:ext cx="1367028" cy="329184"/>
           </a:xfrm>
           <a:prstGeom prst="rect">
             <a:avLst/>
@@ -9075,21 +11818,21 @@
                 </a:solidFill>
                 <a:latin typeface="Calibri"/>
               </a:rPr>
-              <a:t>Super Meme</a:t>
-            </a:r>
-          </a:p>
-        </p:txBody>
-      </p:sp>
-      <p:sp>
-        <p:nvSpPr>
-          <p:cNvPr id="9" name="Rounded Rectangle 8"/>
+              <a:t>Puzzle game</a:t>
+            </a:r>
+          </a:p>
+        </p:txBody>
+      </p:sp>
+      <p:sp>
+        <p:nvSpPr>
+          <p:cNvPr id="7" name="Rounded Rectangle 6"/>
           <p:cNvSpPr/>
           <p:nvPr/>
         </p:nvSpPr>
         <p:spPr>
           <a:xfrm>
-            <a:off x="6226149" y="5806440"/>
-            <a:ext cx="1175004" cy="384048"/>
+            <a:off x="4070451" y="5074920"/>
+            <a:ext cx="1847088" cy="384048"/>
           </a:xfrm>
           <a:prstGeom prst="roundRect">
             <a:avLst/>
@@ -9125,14 +11868,14 @@
       </p:sp>
       <p:sp>
         <p:nvSpPr>
-          <p:cNvPr id="10" name="TextBox 9"/>
+          <p:cNvPr id="8" name="TextBox 7"/>
           <p:cNvSpPr txBox="1"/>
           <p:nvPr/>
         </p:nvSpPr>
         <p:spPr>
           <a:xfrm>
-            <a:off x="6226149" y="5843016"/>
-            <a:ext cx="1175004" cy="329184"/>
+            <a:off x="4070451" y="5111496"/>
+            <a:ext cx="1847088" cy="329184"/>
           </a:xfrm>
           <a:prstGeom prst="rect">
             <a:avLst/>
@@ -9153,7 +11896,163 @@
                 </a:solidFill>
                 <a:latin typeface="Calibri"/>
               </a:rPr>
-              <a:t>DroidClaw</a:t>
+              <a:t>Resume formatter</a:t>
+            </a:r>
+          </a:p>
+        </p:txBody>
+      </p:sp>
+      <p:sp>
+        <p:nvSpPr>
+          <p:cNvPr id="9" name="Rounded Rectangle 8"/>
+          <p:cNvSpPr/>
+          <p:nvPr/>
+        </p:nvSpPr>
+        <p:spPr>
+          <a:xfrm>
+            <a:off x="6082131" y="5074920"/>
+            <a:ext cx="1943100" cy="384048"/>
+          </a:xfrm>
+          <a:prstGeom prst="roundRect">
+            <a:avLst/>
+          </a:prstGeom>
+          <a:solidFill>
+            <a:srgbClr val="E8E8ED"/>
+          </a:solidFill>
+          <a:ln>
+            <a:noFill/>
+          </a:ln>
+        </p:spPr>
+        <p:style>
+          <a:lnRef idx="1">
+            <a:schemeClr val="accent1"/>
+          </a:lnRef>
+          <a:fillRef idx="3">
+            <a:schemeClr val="accent1"/>
+          </a:fillRef>
+          <a:effectRef idx="2">
+            <a:schemeClr val="accent1"/>
+          </a:effectRef>
+          <a:fontRef idx="minor">
+            <a:schemeClr val="lt1"/>
+          </a:fontRef>
+        </p:style>
+        <p:txBody>
+          <a:bodyPr rtlCol="0" anchor="ctr"/>
+          <a:lstStyle/>
+          <a:p>
+            <a:pPr algn="ctr"/>
+          </a:p>
+        </p:txBody>
+      </p:sp>
+      <p:sp>
+        <p:nvSpPr>
+          <p:cNvPr id="10" name="TextBox 9"/>
+          <p:cNvSpPr txBox="1"/>
+          <p:nvPr/>
+        </p:nvSpPr>
+        <p:spPr>
+          <a:xfrm>
+            <a:off x="6082131" y="5111496"/>
+            <a:ext cx="1943100" cy="329184"/>
+          </a:xfrm>
+          <a:prstGeom prst="rect">
+            <a:avLst/>
+          </a:prstGeom>
+          <a:noFill/>
+        </p:spPr>
+        <p:txBody>
+          <a:bodyPr wrap="square">
+            <a:spAutoFit/>
+          </a:bodyPr>
+          <a:lstStyle/>
+          <a:p>
+            <a:pPr algn="ctr"/>
+            <a:r>
+              <a:rPr sz="1200" b="1">
+                <a:solidFill>
+                  <a:srgbClr val="1D1D1F"/>
+                </a:solidFill>
+                <a:latin typeface="Calibri"/>
+              </a:rPr>
+              <a:t>Invoice reminders</a:t>
+            </a:r>
+          </a:p>
+        </p:txBody>
+      </p:sp>
+      <p:sp>
+        <p:nvSpPr>
+          <p:cNvPr id="11" name="Rounded Rectangle 10"/>
+          <p:cNvSpPr/>
+          <p:nvPr/>
+        </p:nvSpPr>
+        <p:spPr>
+          <a:xfrm>
+            <a:off x="8189823" y="5074920"/>
+            <a:ext cx="1463040" cy="384048"/>
+          </a:xfrm>
+          <a:prstGeom prst="roundRect">
+            <a:avLst/>
+          </a:prstGeom>
+          <a:solidFill>
+            <a:srgbClr val="E8E8ED"/>
+          </a:solidFill>
+          <a:ln>
+            <a:noFill/>
+          </a:ln>
+        </p:spPr>
+        <p:style>
+          <a:lnRef idx="1">
+            <a:schemeClr val="accent1"/>
+          </a:lnRef>
+          <a:fillRef idx="3">
+            <a:schemeClr val="accent1"/>
+          </a:fillRef>
+          <a:effectRef idx="2">
+            <a:schemeClr val="accent1"/>
+          </a:effectRef>
+          <a:fontRef idx="minor">
+            <a:schemeClr val="lt1"/>
+          </a:fontRef>
+        </p:style>
+        <p:txBody>
+          <a:bodyPr rtlCol="0" anchor="ctr"/>
+          <a:lstStyle/>
+          <a:p>
+            <a:pPr algn="ctr"/>
+          </a:p>
+        </p:txBody>
+      </p:sp>
+      <p:sp>
+        <p:nvSpPr>
+          <p:cNvPr id="12" name="TextBox 11"/>
+          <p:cNvSpPr txBox="1"/>
+          <p:nvPr/>
+        </p:nvSpPr>
+        <p:spPr>
+          <a:xfrm>
+            <a:off x="8189823" y="5111496"/>
+            <a:ext cx="1463040" cy="329184"/>
+          </a:xfrm>
+          <a:prstGeom prst="rect">
+            <a:avLst/>
+          </a:prstGeom>
+          <a:noFill/>
+        </p:spPr>
+        <p:txBody>
+          <a:bodyPr wrap="square">
+            <a:spAutoFit/>
+          </a:bodyPr>
+          <a:lstStyle/>
+          <a:p>
+            <a:pPr algn="ctr"/>
+            <a:r>
+              <a:rPr sz="1200" b="1">
+                <a:solidFill>
+                  <a:srgbClr val="1D1D1F"/>
+                </a:solidFill>
+                <a:latin typeface="Calibri"/>
+              </a:rPr>
+              <a:t>CI dashboard</a:t>
             </a:r>
           </a:p>
         </p:txBody>
@@ -9227,7 +12126,7 @@
         </p:nvSpPr>
         <p:spPr>
           <a:xfrm>
-            <a:off x="640080" y="1554480"/>
+            <a:off x="640080" y="411480"/>
             <a:ext cx="10881360" cy="1737360"/>
           </a:xfrm>
           <a:prstGeom prst="rect">
@@ -9243,13 +12142,13 @@
           <a:p>
             <a:pPr algn="ctr"/>
             <a:r>
-              <a:rPr sz="3400" b="1">
+              <a:rPr sz="3200" b="1">
                 <a:solidFill>
                   <a:srgbClr val="1D1D1F"/>
                 </a:solidFill>
                 <a:latin typeface="Calibri"/>
               </a:rPr>
-              <a:t>You don't need the next Instagram.</a:t>
+              <a:t>These already exist.</a:t>
             </a:r>
           </a:p>
         </p:txBody>
@@ -9262,7 +12161,7 @@
         </p:nvSpPr>
         <p:spPr>
           <a:xfrm>
-            <a:off x="640080" y="3337560"/>
+            <a:off x="640080" y="2194560"/>
             <a:ext cx="10881360" cy="777240"/>
           </a:xfrm>
           <a:prstGeom prst="rect">
@@ -9284,21 +12183,93 @@
                 </a:solidFill>
                 <a:latin typeface="Calibri"/>
               </a:rPr>
-              <a:t>One problem. A few people.</a:t>
-            </a:r>
-          </a:p>
-        </p:txBody>
-      </p:sp>
-      <p:sp>
-        <p:nvSpPr>
-          <p:cNvPr id="5" name="Rounded Rectangle 4"/>
+              <a:t>One job. A real price.</a:t>
+            </a:r>
+          </a:p>
+        </p:txBody>
+      </p:sp>
+      <p:pic>
+        <p:nvPicPr>
+          <p:cNvPr id="5" name="Picture 4" descr="shot-maaa.jpg"/>
+          <p:cNvPicPr>
+            <a:picLocks noChangeAspect="1"/>
+          </p:cNvPicPr>
+          <p:nvPr/>
+        </p:nvPicPr>
+        <p:blipFill>
+          <a:blip r:embed="rId2"/>
+          <a:stretch>
+            <a:fillRect/>
+          </a:stretch>
+        </p:blipFill>
+        <p:spPr>
+          <a:xfrm>
+            <a:off x="2175643" y="3063240"/>
+            <a:ext cx="3063240" cy="1719072"/>
+          </a:xfrm>
+          <a:prstGeom prst="rect">
+            <a:avLst/>
+          </a:prstGeom>
+        </p:spPr>
+      </p:pic>
+      <p:pic>
+        <p:nvPicPr>
+          <p:cNvPr id="6" name="Picture 5" descr="shot-luckycharm-phone.jpg"/>
+          <p:cNvPicPr>
+            <a:picLocks noChangeAspect="1"/>
+          </p:cNvPicPr>
+          <p:nvPr/>
+        </p:nvPicPr>
+        <p:blipFill>
+          <a:blip r:embed="rId3"/>
+          <a:stretch>
+            <a:fillRect/>
+          </a:stretch>
+        </p:blipFill>
+        <p:spPr>
+          <a:xfrm>
+            <a:off x="5440051" y="2953512"/>
+            <a:ext cx="1311592" cy="2331720"/>
+          </a:xfrm>
+          <a:prstGeom prst="rect">
+            <a:avLst/>
+          </a:prstGeom>
+        </p:spPr>
+      </p:pic>
+      <p:pic>
+        <p:nvPicPr>
+          <p:cNvPr id="7" name="Picture 6" descr="shot-carrd.jpg"/>
+          <p:cNvPicPr>
+            <a:picLocks noChangeAspect="1"/>
+          </p:cNvPicPr>
+          <p:nvPr/>
+        </p:nvPicPr>
+        <p:blipFill>
+          <a:blip r:embed="rId4"/>
+          <a:stretch>
+            <a:fillRect/>
+          </a:stretch>
+        </p:blipFill>
+        <p:spPr>
+          <a:xfrm>
+            <a:off x="6952811" y="3063240"/>
+            <a:ext cx="3063240" cy="1719072"/>
+          </a:xfrm>
+          <a:prstGeom prst="rect">
+            <a:avLst/>
+          </a:prstGeom>
+        </p:spPr>
+      </p:pic>
+      <p:sp>
+        <p:nvSpPr>
+          <p:cNvPr id="8" name="Rounded Rectangle 7"/>
           <p:cNvSpPr/>
           <p:nvPr/>
         </p:nvSpPr>
         <p:spPr>
           <a:xfrm>
-            <a:off x="2538831" y="5074920"/>
-            <a:ext cx="1367028" cy="384048"/>
+            <a:off x="4504791" y="5806440"/>
+            <a:ext cx="694944" cy="384048"/>
           </a:xfrm>
           <a:prstGeom prst="roundRect">
             <a:avLst/>
@@ -9334,14 +12305,14 @@
       </p:sp>
       <p:sp>
         <p:nvSpPr>
-          <p:cNvPr id="6" name="TextBox 5"/>
+          <p:cNvPr id="9" name="TextBox 8"/>
           <p:cNvSpPr txBox="1"/>
           <p:nvPr/>
         </p:nvSpPr>
         <p:spPr>
           <a:xfrm>
-            <a:off x="2538831" y="5111496"/>
-            <a:ext cx="1367028" cy="329184"/>
+            <a:off x="4504791" y="5843016"/>
+            <a:ext cx="694944" cy="329184"/>
           </a:xfrm>
           <a:prstGeom prst="rect">
             <a:avLst/>
@@ -9362,21 +12333,21 @@
                 </a:solidFill>
                 <a:latin typeface="Calibri"/>
               </a:rPr>
-              <a:t>Puzzle game</a:t>
-            </a:r>
-          </a:p>
-        </p:txBody>
-      </p:sp>
-      <p:sp>
-        <p:nvSpPr>
-          <p:cNvPr id="7" name="Rounded Rectangle 6"/>
+              <a:t>Maaa</a:t>
+            </a:r>
+          </a:p>
+        </p:txBody>
+      </p:sp>
+      <p:sp>
+        <p:nvSpPr>
+          <p:cNvPr id="10" name="Rounded Rectangle 9"/>
           <p:cNvSpPr/>
           <p:nvPr/>
         </p:nvSpPr>
         <p:spPr>
           <a:xfrm>
-            <a:off x="4070451" y="5074920"/>
-            <a:ext cx="1847088" cy="384048"/>
+            <a:off x="5364327" y="5806440"/>
+            <a:ext cx="1367028" cy="384048"/>
           </a:xfrm>
           <a:prstGeom prst="roundRect">
             <a:avLst/>
@@ -9412,14 +12383,14 @@
       </p:sp>
       <p:sp>
         <p:nvSpPr>
-          <p:cNvPr id="8" name="TextBox 7"/>
+          <p:cNvPr id="11" name="TextBox 10"/>
           <p:cNvSpPr txBox="1"/>
           <p:nvPr/>
         </p:nvSpPr>
         <p:spPr>
           <a:xfrm>
-            <a:off x="4070451" y="5111496"/>
-            <a:ext cx="1847088" cy="329184"/>
+            <a:off x="5364327" y="5843016"/>
+            <a:ext cx="1367028" cy="329184"/>
           </a:xfrm>
           <a:prstGeom prst="rect">
             <a:avLst/>
@@ -9440,21 +12411,21 @@
                 </a:solidFill>
                 <a:latin typeface="Calibri"/>
               </a:rPr>
-              <a:t>Resume formatter</a:t>
-            </a:r>
-          </a:p>
-        </p:txBody>
-      </p:sp>
-      <p:sp>
-        <p:nvSpPr>
-          <p:cNvPr id="9" name="Rounded Rectangle 8"/>
+              <a:t>Lucky Charm</a:t>
+            </a:r>
+          </a:p>
+        </p:txBody>
+      </p:sp>
+      <p:sp>
+        <p:nvSpPr>
+          <p:cNvPr id="12" name="Rounded Rectangle 11"/>
           <p:cNvSpPr/>
           <p:nvPr/>
         </p:nvSpPr>
         <p:spPr>
           <a:xfrm>
-            <a:off x="6082131" y="5074920"/>
-            <a:ext cx="1943100" cy="384048"/>
+            <a:off x="6895947" y="5806440"/>
+            <a:ext cx="790956" cy="384048"/>
           </a:xfrm>
           <a:prstGeom prst="roundRect">
             <a:avLst/>
@@ -9490,14 +12461,14 @@
       </p:sp>
       <p:sp>
         <p:nvSpPr>
-          <p:cNvPr id="10" name="TextBox 9"/>
+          <p:cNvPr id="13" name="TextBox 12"/>
           <p:cNvSpPr txBox="1"/>
           <p:nvPr/>
         </p:nvSpPr>
         <p:spPr>
           <a:xfrm>
-            <a:off x="6082131" y="5111496"/>
-            <a:ext cx="1943100" cy="329184"/>
+            <a:off x="6895947" y="5843016"/>
+            <a:ext cx="790956" cy="329184"/>
           </a:xfrm>
           <a:prstGeom prst="rect">
             <a:avLst/>
@@ -9518,85 +12489,7 @@
                 </a:solidFill>
                 <a:latin typeface="Calibri"/>
               </a:rPr>
-              <a:t>Invoice reminders</a:t>
-            </a:r>
-          </a:p>
-        </p:txBody>
-      </p:sp>
-      <p:sp>
-        <p:nvSpPr>
-          <p:cNvPr id="11" name="Rounded Rectangle 10"/>
-          <p:cNvSpPr/>
-          <p:nvPr/>
-        </p:nvSpPr>
-        <p:spPr>
-          <a:xfrm>
-            <a:off x="8189823" y="5074920"/>
-            <a:ext cx="1463040" cy="384048"/>
-          </a:xfrm>
-          <a:prstGeom prst="roundRect">
-            <a:avLst/>
-          </a:prstGeom>
-          <a:solidFill>
-            <a:srgbClr val="E8E8ED"/>
-          </a:solidFill>
-          <a:ln>
-            <a:noFill/>
-          </a:ln>
-        </p:spPr>
-        <p:style>
-          <a:lnRef idx="1">
-            <a:schemeClr val="accent1"/>
-          </a:lnRef>
-          <a:fillRef idx="3">
-            <a:schemeClr val="accent1"/>
-          </a:fillRef>
-          <a:effectRef idx="2">
-            <a:schemeClr val="accent1"/>
-          </a:effectRef>
-          <a:fontRef idx="minor">
-            <a:schemeClr val="lt1"/>
-          </a:fontRef>
-        </p:style>
-        <p:txBody>
-          <a:bodyPr rtlCol="0" anchor="ctr"/>
-          <a:lstStyle/>
-          <a:p>
-            <a:pPr algn="ctr"/>
-          </a:p>
-        </p:txBody>
-      </p:sp>
-      <p:sp>
-        <p:nvSpPr>
-          <p:cNvPr id="12" name="TextBox 11"/>
-          <p:cNvSpPr txBox="1"/>
-          <p:nvPr/>
-        </p:nvSpPr>
-        <p:spPr>
-          <a:xfrm>
-            <a:off x="8189823" y="5111496"/>
-            <a:ext cx="1463040" cy="329184"/>
-          </a:xfrm>
-          <a:prstGeom prst="rect">
-            <a:avLst/>
-          </a:prstGeom>
-          <a:noFill/>
-        </p:spPr>
-        <p:txBody>
-          <a:bodyPr wrap="square">
-            <a:spAutoFit/>
-          </a:bodyPr>
-          <a:lstStyle/>
-          <a:p>
-            <a:pPr algn="ctr"/>
-            <a:r>
-              <a:rPr sz="1200" b="1">
-                <a:solidFill>
-                  <a:srgbClr val="1D1D1F"/>
-                </a:solidFill>
-                <a:latin typeface="Calibri"/>
-              </a:rPr>
-              <a:t>CI dashboard</a:t>
+              <a:t>Carrd</a:t>
             </a:r>
           </a:p>
         </p:txBody>
@@ -9670,7 +12563,7 @@
         </p:nvSpPr>
         <p:spPr>
           <a:xfrm>
-            <a:off x="640080" y="411480"/>
+            <a:off x="640080" y="502920"/>
             <a:ext cx="10881360" cy="1737360"/>
           </a:xfrm>
           <a:prstGeom prst="rect">
@@ -9692,7 +12585,7 @@
                 </a:solidFill>
                 <a:latin typeface="Calibri"/>
               </a:rPr>
-              <a:t>These already exist.</a:t>
+              <a:t>You don't have to invent it.</a:t>
             </a:r>
           </a:p>
         </p:txBody>
@@ -9705,7 +12598,7 @@
         </p:nvSpPr>
         <p:spPr>
           <a:xfrm>
-            <a:off x="640080" y="2194560"/>
+            <a:off x="640080" y="2286000"/>
             <a:ext cx="10881360" cy="777240"/>
           </a:xfrm>
           <a:prstGeom prst="rect">
@@ -9727,14 +12620,14 @@
                 </a:solidFill>
                 <a:latin typeface="Calibri"/>
               </a:rPr>
-              <a:t>One job. A real price.</a:t>
+              <a:t>A better version is enough.</a:t>
             </a:r>
           </a:p>
         </p:txBody>
       </p:sp>
       <p:pic>
         <p:nvPicPr>
-          <p:cNvPr id="5" name="Picture 4" descr="shot-maaa.jpg"/>
+          <p:cNvPr id="5" name="Picture 4" descr="shot-dunsocial.jpg"/>
           <p:cNvPicPr>
             <a:picLocks noChangeAspect="1"/>
           </p:cNvPicPr>
@@ -9748,296 +12641,14 @@
         </p:blipFill>
         <p:spPr>
           <a:xfrm>
-            <a:off x="1062075" y="3154680"/>
-            <a:ext cx="3246120" cy="1783080"/>
+            <a:off x="3626967" y="3063240"/>
+            <a:ext cx="4937760" cy="2148840"/>
           </a:xfrm>
           <a:prstGeom prst="rect">
             <a:avLst/>
           </a:prstGeom>
         </p:spPr>
       </p:pic>
-      <p:pic>
-        <p:nvPicPr>
-          <p:cNvPr id="6" name="Picture 5" descr="shot-luckycharm.jpg"/>
-          <p:cNvPicPr>
-            <a:picLocks noChangeAspect="1"/>
-          </p:cNvPicPr>
-          <p:nvPr/>
-        </p:nvPicPr>
-        <p:blipFill>
-          <a:blip r:embed="rId3"/>
-          <a:stretch>
-            <a:fillRect/>
-          </a:stretch>
-        </p:blipFill>
-        <p:spPr>
-          <a:xfrm>
-            <a:off x="4472787" y="3154680"/>
-            <a:ext cx="3246120" cy="1783080"/>
-          </a:xfrm>
-          <a:prstGeom prst="rect">
-            <a:avLst/>
-          </a:prstGeom>
-        </p:spPr>
-      </p:pic>
-      <p:pic>
-        <p:nvPicPr>
-          <p:cNvPr id="7" name="Picture 6" descr="shot-carrd.jpg"/>
-          <p:cNvPicPr>
-            <a:picLocks noChangeAspect="1"/>
-          </p:cNvPicPr>
-          <p:nvPr/>
-        </p:nvPicPr>
-        <p:blipFill>
-          <a:blip r:embed="rId4"/>
-          <a:stretch>
-            <a:fillRect/>
-          </a:stretch>
-        </p:blipFill>
-        <p:spPr>
-          <a:xfrm>
-            <a:off x="7883499" y="3154680"/>
-            <a:ext cx="3246120" cy="1783080"/>
-          </a:xfrm>
-          <a:prstGeom prst="rect">
-            <a:avLst/>
-          </a:prstGeom>
-        </p:spPr>
-      </p:pic>
-      <p:sp>
-        <p:nvSpPr>
-          <p:cNvPr id="8" name="Rounded Rectangle 7"/>
-          <p:cNvSpPr/>
-          <p:nvPr/>
-        </p:nvSpPr>
-        <p:spPr>
-          <a:xfrm>
-            <a:off x="4504791" y="5806440"/>
-            <a:ext cx="694944" cy="384048"/>
-          </a:xfrm>
-          <a:prstGeom prst="roundRect">
-            <a:avLst/>
-          </a:prstGeom>
-          <a:solidFill>
-            <a:srgbClr val="E8E8ED"/>
-          </a:solidFill>
-          <a:ln>
-            <a:noFill/>
-          </a:ln>
-        </p:spPr>
-        <p:style>
-          <a:lnRef idx="1">
-            <a:schemeClr val="accent1"/>
-          </a:lnRef>
-          <a:fillRef idx="3">
-            <a:schemeClr val="accent1"/>
-          </a:fillRef>
-          <a:effectRef idx="2">
-            <a:schemeClr val="accent1"/>
-          </a:effectRef>
-          <a:fontRef idx="minor">
-            <a:schemeClr val="lt1"/>
-          </a:fontRef>
-        </p:style>
-        <p:txBody>
-          <a:bodyPr rtlCol="0" anchor="ctr"/>
-          <a:lstStyle/>
-          <a:p>
-            <a:pPr algn="ctr"/>
-          </a:p>
-        </p:txBody>
-      </p:sp>
-      <p:sp>
-        <p:nvSpPr>
-          <p:cNvPr id="9" name="TextBox 8"/>
-          <p:cNvSpPr txBox="1"/>
-          <p:nvPr/>
-        </p:nvSpPr>
-        <p:spPr>
-          <a:xfrm>
-            <a:off x="4504791" y="5843016"/>
-            <a:ext cx="694944" cy="329184"/>
-          </a:xfrm>
-          <a:prstGeom prst="rect">
-            <a:avLst/>
-          </a:prstGeom>
-          <a:noFill/>
-        </p:spPr>
-        <p:txBody>
-          <a:bodyPr wrap="square">
-            <a:spAutoFit/>
-          </a:bodyPr>
-          <a:lstStyle/>
-          <a:p>
-            <a:pPr algn="ctr"/>
-            <a:r>
-              <a:rPr sz="1200" b="1">
-                <a:solidFill>
-                  <a:srgbClr val="1D1D1F"/>
-                </a:solidFill>
-                <a:latin typeface="Calibri"/>
-              </a:rPr>
-              <a:t>Maaa</a:t>
-            </a:r>
-          </a:p>
-        </p:txBody>
-      </p:sp>
-      <p:sp>
-        <p:nvSpPr>
-          <p:cNvPr id="10" name="Rounded Rectangle 9"/>
-          <p:cNvSpPr/>
-          <p:nvPr/>
-        </p:nvSpPr>
-        <p:spPr>
-          <a:xfrm>
-            <a:off x="5364327" y="5806440"/>
-            <a:ext cx="1367028" cy="384048"/>
-          </a:xfrm>
-          <a:prstGeom prst="roundRect">
-            <a:avLst/>
-          </a:prstGeom>
-          <a:solidFill>
-            <a:srgbClr val="E8E8ED"/>
-          </a:solidFill>
-          <a:ln>
-            <a:noFill/>
-          </a:ln>
-        </p:spPr>
-        <p:style>
-          <a:lnRef idx="1">
-            <a:schemeClr val="accent1"/>
-          </a:lnRef>
-          <a:fillRef idx="3">
-            <a:schemeClr val="accent1"/>
-          </a:fillRef>
-          <a:effectRef idx="2">
-            <a:schemeClr val="accent1"/>
-          </a:effectRef>
-          <a:fontRef idx="minor">
-            <a:schemeClr val="lt1"/>
-          </a:fontRef>
-        </p:style>
-        <p:txBody>
-          <a:bodyPr rtlCol="0" anchor="ctr"/>
-          <a:lstStyle/>
-          <a:p>
-            <a:pPr algn="ctr"/>
-          </a:p>
-        </p:txBody>
-      </p:sp>
-      <p:sp>
-        <p:nvSpPr>
-          <p:cNvPr id="11" name="TextBox 10"/>
-          <p:cNvSpPr txBox="1"/>
-          <p:nvPr/>
-        </p:nvSpPr>
-        <p:spPr>
-          <a:xfrm>
-            <a:off x="5364327" y="5843016"/>
-            <a:ext cx="1367028" cy="329184"/>
-          </a:xfrm>
-          <a:prstGeom prst="rect">
-            <a:avLst/>
-          </a:prstGeom>
-          <a:noFill/>
-        </p:spPr>
-        <p:txBody>
-          <a:bodyPr wrap="square">
-            <a:spAutoFit/>
-          </a:bodyPr>
-          <a:lstStyle/>
-          <a:p>
-            <a:pPr algn="ctr"/>
-            <a:r>
-              <a:rPr sz="1200" b="1">
-                <a:solidFill>
-                  <a:srgbClr val="1D1D1F"/>
-                </a:solidFill>
-                <a:latin typeface="Calibri"/>
-              </a:rPr>
-              <a:t>Lucky Charm</a:t>
-            </a:r>
-          </a:p>
-        </p:txBody>
-      </p:sp>
-      <p:sp>
-        <p:nvSpPr>
-          <p:cNvPr id="12" name="Rounded Rectangle 11"/>
-          <p:cNvSpPr/>
-          <p:nvPr/>
-        </p:nvSpPr>
-        <p:spPr>
-          <a:xfrm>
-            <a:off x="6895947" y="5806440"/>
-            <a:ext cx="790956" cy="384048"/>
-          </a:xfrm>
-          <a:prstGeom prst="roundRect">
-            <a:avLst/>
-          </a:prstGeom>
-          <a:solidFill>
-            <a:srgbClr val="E8E8ED"/>
-          </a:solidFill>
-          <a:ln>
-            <a:noFill/>
-          </a:ln>
-        </p:spPr>
-        <p:style>
-          <a:lnRef idx="1">
-            <a:schemeClr val="accent1"/>
-          </a:lnRef>
-          <a:fillRef idx="3">
-            <a:schemeClr val="accent1"/>
-          </a:fillRef>
-          <a:effectRef idx="2">
-            <a:schemeClr val="accent1"/>
-          </a:effectRef>
-          <a:fontRef idx="minor">
-            <a:schemeClr val="lt1"/>
-          </a:fontRef>
-        </p:style>
-        <p:txBody>
-          <a:bodyPr rtlCol="0" anchor="ctr"/>
-          <a:lstStyle/>
-          <a:p>
-            <a:pPr algn="ctr"/>
-          </a:p>
-        </p:txBody>
-      </p:sp>
-      <p:sp>
-        <p:nvSpPr>
-          <p:cNvPr id="13" name="TextBox 12"/>
-          <p:cNvSpPr txBox="1"/>
-          <p:nvPr/>
-        </p:nvSpPr>
-        <p:spPr>
-          <a:xfrm>
-            <a:off x="6895947" y="5843016"/>
-            <a:ext cx="790956" cy="329184"/>
-          </a:xfrm>
-          <a:prstGeom prst="rect">
-            <a:avLst/>
-          </a:prstGeom>
-          <a:noFill/>
-        </p:spPr>
-        <p:txBody>
-          <a:bodyPr wrap="square">
-            <a:spAutoFit/>
-          </a:bodyPr>
-          <a:lstStyle/>
-          <a:p>
-            <a:pPr algn="ctr"/>
-            <a:r>
-              <a:rPr sz="1200" b="1">
-                <a:solidFill>
-                  <a:srgbClr val="1D1D1F"/>
-                </a:solidFill>
-                <a:latin typeface="Calibri"/>
-              </a:rPr>
-              <a:t>Carrd</a:t>
-            </a:r>
-          </a:p>
-        </p:txBody>
-      </p:sp>
     </p:spTree>
   </p:cSld>
   <p:clrMapOvr>
@@ -10107,7 +12718,7 @@
         </p:nvSpPr>
         <p:spPr>
           <a:xfrm>
-            <a:off x="640080" y="502920"/>
+            <a:off x="640080" y="411480"/>
             <a:ext cx="10881360" cy="1737360"/>
           </a:xfrm>
           <a:prstGeom prst="rect">
@@ -10129,7 +12740,7 @@
                 </a:solidFill>
                 <a:latin typeface="Calibri"/>
               </a:rPr>
-              <a:t>You don't have to invent it.</a:t>
+              <a:t>One job. People know these.</a:t>
             </a:r>
           </a:p>
         </p:txBody>
@@ -10142,7 +12753,7 @@
         </p:nvSpPr>
         <p:spPr>
           <a:xfrm>
-            <a:off x="640080" y="2286000"/>
+            <a:off x="640080" y="2194560"/>
             <a:ext cx="10881360" cy="777240"/>
           </a:xfrm>
           <a:prstGeom prst="rect">
@@ -10164,14 +12775,14 @@
                 </a:solidFill>
                 <a:latin typeface="Calibri"/>
               </a:rPr>
-              <a:t>A better version is enough.</a:t>
+              <a:t>A launcher. An editor. A store.</a:t>
             </a:r>
           </a:p>
         </p:txBody>
       </p:sp>
       <p:pic>
         <p:nvPicPr>
-          <p:cNvPr id="5" name="Picture 4" descr="shot-dunsocial.jpg"/>
+          <p:cNvPr id="5" name="Picture 4" descr="shot-raycast.jpg"/>
           <p:cNvPicPr>
             <a:picLocks noChangeAspect="1"/>
           </p:cNvPicPr>
@@ -10185,8 +12796,56 @@
         </p:blipFill>
         <p:spPr>
           <a:xfrm>
-            <a:off x="3626967" y="3063240"/>
-            <a:ext cx="4937760" cy="2148840"/>
+            <a:off x="1062075" y="3154680"/>
+            <a:ext cx="3246120" cy="1783080"/>
+          </a:xfrm>
+          <a:prstGeom prst="rect">
+            <a:avLst/>
+          </a:prstGeom>
+        </p:spPr>
+      </p:pic>
+      <p:pic>
+        <p:nvPicPr>
+          <p:cNvPr id="6" name="Picture 5" descr="shot-photopea.jpg"/>
+          <p:cNvPicPr>
+            <a:picLocks noChangeAspect="1"/>
+          </p:cNvPicPr>
+          <p:nvPr/>
+        </p:nvPicPr>
+        <p:blipFill>
+          <a:blip r:embed="rId3"/>
+          <a:stretch>
+            <a:fillRect/>
+          </a:stretch>
+        </p:blipFill>
+        <p:spPr>
+          <a:xfrm>
+            <a:off x="4472787" y="3154680"/>
+            <a:ext cx="3246120" cy="1783080"/>
+          </a:xfrm>
+          <a:prstGeom prst="rect">
+            <a:avLst/>
+          </a:prstGeom>
+        </p:spPr>
+      </p:pic>
+      <p:pic>
+        <p:nvPicPr>
+          <p:cNvPr id="7" name="Picture 6" descr="shot-gumroad.jpg"/>
+          <p:cNvPicPr>
+            <a:picLocks noChangeAspect="1"/>
+          </p:cNvPicPr>
+          <p:nvPr/>
+        </p:nvPicPr>
+        <p:blipFill>
+          <a:blip r:embed="rId4"/>
+          <a:stretch>
+            <a:fillRect/>
+          </a:stretch>
+        </p:blipFill>
+        <p:spPr>
+          <a:xfrm>
+            <a:off x="7883499" y="3154680"/>
+            <a:ext cx="3246120" cy="1783080"/>
           </a:xfrm>
           <a:prstGeom prst="rect">
             <a:avLst/>
@@ -10262,7 +12921,7 @@
         </p:nvSpPr>
         <p:spPr>
           <a:xfrm>
-            <a:off x="640080" y="411480"/>
+            <a:off x="640080" y="502920"/>
             <a:ext cx="10881360" cy="1737360"/>
           </a:xfrm>
           <a:prstGeom prst="rect">
@@ -10284,7 +12943,7 @@
                 </a:solidFill>
                 <a:latin typeface="Calibri"/>
               </a:rPr>
-              <a:t>One job. People know these.</a:t>
+              <a:t>You don't need Shark Tank.</a:t>
             </a:r>
           </a:p>
         </p:txBody>
@@ -10297,7 +12956,7 @@
         </p:nvSpPr>
         <p:spPr>
           <a:xfrm>
-            <a:off x="640080" y="2194560"/>
+            <a:off x="640080" y="2286000"/>
             <a:ext cx="10881360" cy="777240"/>
           </a:xfrm>
           <a:prstGeom prst="rect">
@@ -10319,83 +12978,350 @@
                 </a:solidFill>
                 <a:latin typeface="Calibri"/>
               </a:rPr>
-              <a:t>A launcher. An editor. A store.</a:t>
-            </a:r>
-          </a:p>
-        </p:txBody>
-      </p:sp>
-      <p:pic>
-        <p:nvPicPr>
-          <p:cNvPr id="5" name="Picture 4" descr="shot-raycast.jpg"/>
-          <p:cNvPicPr>
-            <a:picLocks noChangeAspect="1"/>
-          </p:cNvPicPr>
-          <p:nvPr/>
-        </p:nvPicPr>
-        <p:blipFill>
-          <a:blip r:embed="rId2"/>
-          <a:stretch>
-            <a:fillRect/>
-          </a:stretch>
-        </p:blipFill>
-        <p:spPr>
-          <a:xfrm>
-            <a:off x="1062075" y="3154680"/>
-            <a:ext cx="3246120" cy="1783080"/>
-          </a:xfrm>
-          <a:prstGeom prst="rect">
-            <a:avLst/>
-          </a:prstGeom>
-        </p:spPr>
-      </p:pic>
-      <p:pic>
-        <p:nvPicPr>
-          <p:cNvPr id="6" name="Picture 5" descr="shot-photopea.jpg"/>
-          <p:cNvPicPr>
-            <a:picLocks noChangeAspect="1"/>
-          </p:cNvPicPr>
-          <p:nvPr/>
-        </p:nvPicPr>
-        <p:blipFill>
-          <a:blip r:embed="rId3"/>
-          <a:stretch>
-            <a:fillRect/>
-          </a:stretch>
-        </p:blipFill>
-        <p:spPr>
-          <a:xfrm>
-            <a:off x="4472787" y="3154680"/>
-            <a:ext cx="3246120" cy="1783080"/>
-          </a:xfrm>
-          <a:prstGeom prst="rect">
-            <a:avLst/>
-          </a:prstGeom>
-        </p:spPr>
-      </p:pic>
-      <p:pic>
-        <p:nvPicPr>
-          <p:cNvPr id="7" name="Picture 6" descr="shot-gumroad.jpg"/>
-          <p:cNvPicPr>
-            <a:picLocks noChangeAspect="1"/>
-          </p:cNvPicPr>
-          <p:nvPr/>
-        </p:nvPicPr>
-        <p:blipFill>
-          <a:blip r:embed="rId4"/>
-          <a:stretch>
-            <a:fillRect/>
-          </a:stretch>
-        </p:blipFill>
-        <p:spPr>
-          <a:xfrm>
-            <a:off x="7883499" y="3154680"/>
-            <a:ext cx="3246120" cy="1783080"/>
-          </a:xfrm>
-          <a:prstGeom prst="rect">
-            <a:avLst/>
-          </a:prstGeom>
-        </p:spPr>
-      </p:pic>
+              <a:t>We have Startup Singam.</a:t>
+            </a:r>
+          </a:p>
+        </p:txBody>
+      </p:sp>
+      <p:sp>
+        <p:nvSpPr>
+          <p:cNvPr id="5" name="Rounded Rectangle 4"/>
+          <p:cNvSpPr/>
+          <p:nvPr/>
+        </p:nvSpPr>
+        <p:spPr>
+          <a:xfrm>
+            <a:off x="1025499" y="3246120"/>
+            <a:ext cx="3246120" cy="1965960"/>
+          </a:xfrm>
+          <a:prstGeom prst="roundRect">
+            <a:avLst/>
+          </a:prstGeom>
+          <a:solidFill>
+            <a:srgbClr val="FFFFFF"/>
+          </a:solidFill>
+          <a:ln>
+            <a:noFill/>
+          </a:ln>
+        </p:spPr>
+        <p:style>
+          <a:lnRef idx="1">
+            <a:schemeClr val="accent1"/>
+          </a:lnRef>
+          <a:fillRef idx="3">
+            <a:schemeClr val="accent1"/>
+          </a:fillRef>
+          <a:effectRef idx="2">
+            <a:schemeClr val="accent1"/>
+          </a:effectRef>
+          <a:fontRef idx="minor">
+            <a:schemeClr val="lt1"/>
+          </a:fontRef>
+        </p:style>
+        <p:txBody>
+          <a:bodyPr rtlCol="0" anchor="ctr"/>
+          <a:lstStyle/>
+          <a:p>
+            <a:pPr algn="ctr"/>
+          </a:p>
+        </p:txBody>
+      </p:sp>
+      <p:sp>
+        <p:nvSpPr>
+          <p:cNvPr id="6" name="TextBox 5"/>
+          <p:cNvSpPr txBox="1"/>
+          <p:nvPr/>
+        </p:nvSpPr>
+        <p:spPr>
+          <a:xfrm>
+            <a:off x="1162659" y="3566160"/>
+            <a:ext cx="2971800" cy="502920"/>
+          </a:xfrm>
+          <a:prstGeom prst="rect">
+            <a:avLst/>
+          </a:prstGeom>
+          <a:noFill/>
+        </p:spPr>
+        <p:txBody>
+          <a:bodyPr wrap="square">
+            <a:spAutoFit/>
+          </a:bodyPr>
+          <a:lstStyle/>
+          <a:p>
+            <a:pPr algn="ctr"/>
+            <a:r>
+              <a:rPr sz="2000" b="1">
+                <a:solidFill>
+                  <a:srgbClr val="1D1D1F"/>
+                </a:solidFill>
+                <a:latin typeface="Calibri"/>
+              </a:rPr>
+              <a:t>Creedom</a:t>
+            </a:r>
+          </a:p>
+        </p:txBody>
+      </p:sp>
+      <p:sp>
+        <p:nvSpPr>
+          <p:cNvPr id="7" name="TextBox 6"/>
+          <p:cNvSpPr txBox="1"/>
+          <p:nvPr/>
+        </p:nvSpPr>
+        <p:spPr>
+          <a:xfrm>
+            <a:off x="1190091" y="4160520"/>
+            <a:ext cx="2916936" cy="777240"/>
+          </a:xfrm>
+          <a:prstGeom prst="rect">
+            <a:avLst/>
+          </a:prstGeom>
+          <a:noFill/>
+        </p:spPr>
+        <p:txBody>
+          <a:bodyPr wrap="square">
+            <a:spAutoFit/>
+          </a:bodyPr>
+          <a:lstStyle/>
+          <a:p>
+            <a:pPr algn="ctr"/>
+            <a:r>
+              <a:rPr sz="1400" b="0">
+                <a:solidFill>
+                  <a:srgbClr val="6E6E73"/>
+                </a:solidFill>
+                <a:latin typeface="Calibri"/>
+              </a:rPr>
+              <a:t>AI for creators. ₹1.9 crore deployed.</a:t>
+            </a:r>
+          </a:p>
+        </p:txBody>
+      </p:sp>
+      <p:sp>
+        <p:nvSpPr>
+          <p:cNvPr id="8" name="Rounded Rectangle 7"/>
+          <p:cNvSpPr/>
+          <p:nvPr/>
+        </p:nvSpPr>
+        <p:spPr>
+          <a:xfrm>
+            <a:off x="4472787" y="3246120"/>
+            <a:ext cx="3246120" cy="1965960"/>
+          </a:xfrm>
+          <a:prstGeom prst="roundRect">
+            <a:avLst/>
+          </a:prstGeom>
+          <a:solidFill>
+            <a:srgbClr val="FFFFFF"/>
+          </a:solidFill>
+          <a:ln>
+            <a:noFill/>
+          </a:ln>
+        </p:spPr>
+        <p:style>
+          <a:lnRef idx="1">
+            <a:schemeClr val="accent1"/>
+          </a:lnRef>
+          <a:fillRef idx="3">
+            <a:schemeClr val="accent1"/>
+          </a:fillRef>
+          <a:effectRef idx="2">
+            <a:schemeClr val="accent1"/>
+          </a:effectRef>
+          <a:fontRef idx="minor">
+            <a:schemeClr val="lt1"/>
+          </a:fontRef>
+        </p:style>
+        <p:txBody>
+          <a:bodyPr rtlCol="0" anchor="ctr"/>
+          <a:lstStyle/>
+          <a:p>
+            <a:pPr algn="ctr"/>
+          </a:p>
+        </p:txBody>
+      </p:sp>
+      <p:sp>
+        <p:nvSpPr>
+          <p:cNvPr id="9" name="TextBox 8"/>
+          <p:cNvSpPr txBox="1"/>
+          <p:nvPr/>
+        </p:nvSpPr>
+        <p:spPr>
+          <a:xfrm>
+            <a:off x="4609947" y="3566160"/>
+            <a:ext cx="2971800" cy="502920"/>
+          </a:xfrm>
+          <a:prstGeom prst="rect">
+            <a:avLst/>
+          </a:prstGeom>
+          <a:noFill/>
+        </p:spPr>
+        <p:txBody>
+          <a:bodyPr wrap="square">
+            <a:spAutoFit/>
+          </a:bodyPr>
+          <a:lstStyle/>
+          <a:p>
+            <a:pPr algn="ctr"/>
+            <a:r>
+              <a:rPr sz="2000" b="1">
+                <a:solidFill>
+                  <a:srgbClr val="1D1D1F"/>
+                </a:solidFill>
+                <a:latin typeface="Calibri"/>
+              </a:rPr>
+              <a:t>GrooveBook</a:t>
+            </a:r>
+          </a:p>
+        </p:txBody>
+      </p:sp>
+      <p:sp>
+        <p:nvSpPr>
+          <p:cNvPr id="10" name="TextBox 9"/>
+          <p:cNvSpPr txBox="1"/>
+          <p:nvPr/>
+        </p:nvSpPr>
+        <p:spPr>
+          <a:xfrm>
+            <a:off x="4637379" y="4160520"/>
+            <a:ext cx="2916936" cy="777240"/>
+          </a:xfrm>
+          <a:prstGeom prst="rect">
+            <a:avLst/>
+          </a:prstGeom>
+          <a:noFill/>
+        </p:spPr>
+        <p:txBody>
+          <a:bodyPr wrap="square">
+            <a:spAutoFit/>
+          </a:bodyPr>
+          <a:lstStyle/>
+          <a:p>
+            <a:pPr algn="ctr"/>
+            <a:r>
+              <a:rPr sz="1400" b="0">
+                <a:solidFill>
+                  <a:srgbClr val="6E6E73"/>
+                </a:solidFill>
+                <a:latin typeface="Calibri"/>
+              </a:rPr>
+              <a:t>Photo app. Acquired for $14.5M.</a:t>
+            </a:r>
+          </a:p>
+        </p:txBody>
+      </p:sp>
+      <p:sp>
+        <p:nvSpPr>
+          <p:cNvPr id="11" name="Rounded Rectangle 10"/>
+          <p:cNvSpPr/>
+          <p:nvPr/>
+        </p:nvSpPr>
+        <p:spPr>
+          <a:xfrm>
+            <a:off x="7920075" y="3246120"/>
+            <a:ext cx="3246120" cy="1965960"/>
+          </a:xfrm>
+          <a:prstGeom prst="roundRect">
+            <a:avLst/>
+          </a:prstGeom>
+          <a:solidFill>
+            <a:srgbClr val="FFFFFF"/>
+          </a:solidFill>
+          <a:ln>
+            <a:noFill/>
+          </a:ln>
+        </p:spPr>
+        <p:style>
+          <a:lnRef idx="1">
+            <a:schemeClr val="accent1"/>
+          </a:lnRef>
+          <a:fillRef idx="3">
+            <a:schemeClr val="accent1"/>
+          </a:fillRef>
+          <a:effectRef idx="2">
+            <a:schemeClr val="accent1"/>
+          </a:effectRef>
+          <a:fontRef idx="minor">
+            <a:schemeClr val="lt1"/>
+          </a:fontRef>
+        </p:style>
+        <p:txBody>
+          <a:bodyPr rtlCol="0" anchor="ctr"/>
+          <a:lstStyle/>
+          <a:p>
+            <a:pPr algn="ctr"/>
+          </a:p>
+        </p:txBody>
+      </p:sp>
+      <p:sp>
+        <p:nvSpPr>
+          <p:cNvPr id="12" name="TextBox 11"/>
+          <p:cNvSpPr txBox="1"/>
+          <p:nvPr/>
+        </p:nvSpPr>
+        <p:spPr>
+          <a:xfrm>
+            <a:off x="8057235" y="3566160"/>
+            <a:ext cx="2971800" cy="502920"/>
+          </a:xfrm>
+          <a:prstGeom prst="rect">
+            <a:avLst/>
+          </a:prstGeom>
+          <a:noFill/>
+        </p:spPr>
+        <p:txBody>
+          <a:bodyPr wrap="square">
+            <a:spAutoFit/>
+          </a:bodyPr>
+          <a:lstStyle/>
+          <a:p>
+            <a:pPr algn="ctr"/>
+            <a:r>
+              <a:rPr sz="2000" b="1">
+                <a:solidFill>
+                  <a:srgbClr val="1D1D1F"/>
+                </a:solidFill>
+                <a:latin typeface="Calibri"/>
+              </a:rPr>
+              <a:t>Scholly</a:t>
+            </a:r>
+          </a:p>
+        </p:txBody>
+      </p:sp>
+      <p:sp>
+        <p:nvSpPr>
+          <p:cNvPr id="13" name="TextBox 12"/>
+          <p:cNvSpPr txBox="1"/>
+          <p:nvPr/>
+        </p:nvSpPr>
+        <p:spPr>
+          <a:xfrm>
+            <a:off x="8084667" y="4160520"/>
+            <a:ext cx="2916936" cy="777240"/>
+          </a:xfrm>
+          <a:prstGeom prst="rect">
+            <a:avLst/>
+          </a:prstGeom>
+          <a:noFill/>
+        </p:spPr>
+        <p:txBody>
+          <a:bodyPr wrap="square">
+            <a:spAutoFit/>
+          </a:bodyPr>
+          <a:lstStyle/>
+          <a:p>
+            <a:pPr algn="ctr"/>
+            <a:r>
+              <a:rPr sz="1400" b="0">
+                <a:solidFill>
+                  <a:srgbClr val="6E6E73"/>
+                </a:solidFill>
+                <a:latin typeface="Calibri"/>
+              </a:rPr>
+              <a:t>Scholarship app. Shark Tank, later acquired.</a:t>
+            </a:r>
+          </a:p>
+        </p:txBody>
+      </p:sp>
     </p:spTree>
   </p:cSld>
   <p:clrMapOvr>

--- a/talks/whats-stopping-us-from-building-great-products-and-monetizing-them/whats-stopping-us-from-building-great-products-and-monetizing-them.pptx
+++ b/talks/whats-stopping-us-from-building-great-products-and-monetizing-them/whats-stopping-us-from-building-great-products-and-monetizing-them.pptx
@@ -921,12 +921,17 @@
           <a:lstStyle/>
           <a:p>
             <a:r>
-              <a:t>Tanglish: Growth team-oda velai-nu theriyum. AI era-la neenga pick up panna mudiyum.</a:t>
+              <a:t>Tanglish: Growth team-oda velai-nu theriyum. AI era-la neenga pick up panna mudiyum. First product-ah valarunga. Use pannanavanga irukanum. Appuram ads.</a:t>
             </a:r>
           </a:p>
           <a:p>
             <a:r>
               <a:t>These used to look like a growth team's job. In the AI era you can pick them up.</a:t>
+            </a:r>
+          </a:p>
+          <a:p>
+            <a:r>
+              <a:t>Grow the product first. Then revenue, like ads. When the topic is making money from the product, people have to be using it before ads. Do not skip the earlier payment slides. Customer checkout and ad revenue are different.</a:t>
             </a:r>
           </a:p>
           <a:p>
@@ -7511,7 +7516,7 @@
         </p:nvSpPr>
         <p:spPr>
           <a:xfrm>
-            <a:off x="640080" y="411480"/>
+            <a:off x="640080" y="256032"/>
             <a:ext cx="10881360" cy="1737360"/>
           </a:xfrm>
           <a:prstGeom prst="rect">
@@ -7527,7 +7532,7 @@
           <a:p>
             <a:pPr algn="ctr"/>
             <a:r>
-              <a:rPr sz="3000" b="1">
+              <a:rPr sz="2800" b="1">
                 <a:solidFill>
                   <a:srgbClr val="1D1D1F"/>
                 </a:solidFill>
@@ -7546,7 +7551,7 @@
         </p:nvSpPr>
         <p:spPr>
           <a:xfrm>
-            <a:off x="640080" y="2194560"/>
+            <a:off x="640080" y="2039112"/>
             <a:ext cx="10881360" cy="777240"/>
           </a:xfrm>
           <a:prstGeom prst="rect">
@@ -7575,14 +7580,49 @@
       </p:sp>
       <p:sp>
         <p:nvSpPr>
-          <p:cNvPr id="5" name="Rounded Rectangle 4"/>
+          <p:cNvPr id="5" name="TextBox 4"/>
+          <p:cNvSpPr txBox="1"/>
+          <p:nvPr/>
+        </p:nvSpPr>
+        <p:spPr>
+          <a:xfrm>
+            <a:off x="640080" y="2697480"/>
+            <a:ext cx="10881360" cy="502920"/>
+          </a:xfrm>
+          <a:prstGeom prst="rect">
+            <a:avLst/>
+          </a:prstGeom>
+          <a:noFill/>
+        </p:spPr>
+        <p:txBody>
+          <a:bodyPr wrap="square">
+            <a:spAutoFit/>
+          </a:bodyPr>
+          <a:lstStyle/>
+          <a:p>
+            <a:pPr algn="ctr"/>
+            <a:r>
+              <a:rPr sz="2000" b="1">
+                <a:solidFill>
+                  <a:srgbClr val="1D1D1F"/>
+                </a:solidFill>
+                <a:latin typeface="Calibri"/>
+              </a:rPr>
+              <a:t>Grow the product first. Then revenue, like ads.</a:t>
+            </a:r>
+          </a:p>
+        </p:txBody>
+      </p:sp>
+      <p:sp>
+        <p:nvSpPr>
+          <p:cNvPr id="6" name="Rounded Rectangle 5"/>
           <p:cNvSpPr/>
           <p:nvPr/>
         </p:nvSpPr>
         <p:spPr>
           <a:xfrm>
-            <a:off x="1025499" y="3063240"/>
-            <a:ext cx="3246120" cy="2148840"/>
+            <a:off x="1025499" y="3383280"/>
+            <a:ext cx="3246120" cy="2011680"/>
           </a:xfrm>
           <a:prstGeom prst="roundRect">
             <a:avLst/>
@@ -7618,13 +7658,13 @@
       </p:sp>
       <p:sp>
         <p:nvSpPr>
-          <p:cNvPr id="6" name="TextBox 5"/>
+          <p:cNvPr id="7" name="TextBox 6"/>
           <p:cNvSpPr txBox="1"/>
           <p:nvPr/>
         </p:nvSpPr>
         <p:spPr>
           <a:xfrm>
-            <a:off x="1162659" y="3319272"/>
+            <a:off x="1162659" y="3639312"/>
             <a:ext cx="2971800" cy="411480"/>
           </a:xfrm>
           <a:prstGeom prst="rect">
@@ -7653,13 +7693,13 @@
       </p:sp>
       <p:sp>
         <p:nvSpPr>
-          <p:cNvPr id="7" name="TextBox 6"/>
+          <p:cNvPr id="8" name="TextBox 7"/>
           <p:cNvSpPr txBox="1"/>
           <p:nvPr/>
         </p:nvSpPr>
         <p:spPr>
           <a:xfrm>
-            <a:off x="1190091" y="3840480"/>
+            <a:off x="1190091" y="4160520"/>
             <a:ext cx="2916936" cy="1143000"/>
           </a:xfrm>
           <a:prstGeom prst="rect">
@@ -7688,14 +7728,14 @@
       </p:sp>
       <p:sp>
         <p:nvSpPr>
-          <p:cNvPr id="8" name="Rounded Rectangle 7"/>
+          <p:cNvPr id="9" name="Rounded Rectangle 8"/>
           <p:cNvSpPr/>
           <p:nvPr/>
         </p:nvSpPr>
         <p:spPr>
           <a:xfrm>
-            <a:off x="4472787" y="3063240"/>
-            <a:ext cx="3246120" cy="2148840"/>
+            <a:off x="4472787" y="3383280"/>
+            <a:ext cx="3246120" cy="2011680"/>
           </a:xfrm>
           <a:prstGeom prst="roundRect">
             <a:avLst/>
@@ -7731,13 +7771,13 @@
       </p:sp>
       <p:sp>
         <p:nvSpPr>
-          <p:cNvPr id="9" name="TextBox 8"/>
+          <p:cNvPr id="10" name="TextBox 9"/>
           <p:cNvSpPr txBox="1"/>
           <p:nvPr/>
         </p:nvSpPr>
         <p:spPr>
           <a:xfrm>
-            <a:off x="4609947" y="3319272"/>
+            <a:off x="4609947" y="3639312"/>
             <a:ext cx="2971800" cy="411480"/>
           </a:xfrm>
           <a:prstGeom prst="rect">
@@ -7766,13 +7806,13 @@
       </p:sp>
       <p:sp>
         <p:nvSpPr>
-          <p:cNvPr id="10" name="TextBox 9"/>
+          <p:cNvPr id="11" name="TextBox 10"/>
           <p:cNvSpPr txBox="1"/>
           <p:nvPr/>
         </p:nvSpPr>
         <p:spPr>
           <a:xfrm>
-            <a:off x="4637379" y="3840480"/>
+            <a:off x="4637379" y="4160520"/>
             <a:ext cx="2916936" cy="1143000"/>
           </a:xfrm>
           <a:prstGeom prst="rect">
@@ -7801,14 +7841,14 @@
       </p:sp>
       <p:sp>
         <p:nvSpPr>
-          <p:cNvPr id="11" name="Rounded Rectangle 10"/>
+          <p:cNvPr id="12" name="Rounded Rectangle 11"/>
           <p:cNvSpPr/>
           <p:nvPr/>
         </p:nvSpPr>
         <p:spPr>
           <a:xfrm>
-            <a:off x="7920075" y="3063240"/>
-            <a:ext cx="3246120" cy="2148840"/>
+            <a:off x="7920075" y="3383280"/>
+            <a:ext cx="3246120" cy="2011680"/>
           </a:xfrm>
           <a:prstGeom prst="roundRect">
             <a:avLst/>
@@ -7844,13 +7884,13 @@
       </p:sp>
       <p:sp>
         <p:nvSpPr>
-          <p:cNvPr id="12" name="TextBox 11"/>
+          <p:cNvPr id="13" name="TextBox 12"/>
           <p:cNvSpPr txBox="1"/>
           <p:nvPr/>
         </p:nvSpPr>
         <p:spPr>
           <a:xfrm>
-            <a:off x="8057235" y="3319272"/>
+            <a:off x="8057235" y="3639312"/>
             <a:ext cx="2971800" cy="411480"/>
           </a:xfrm>
           <a:prstGeom prst="rect">
@@ -7879,13 +7919,13 @@
       </p:sp>
       <p:sp>
         <p:nvSpPr>
-          <p:cNvPr id="13" name="TextBox 12"/>
+          <p:cNvPr id="14" name="TextBox 13"/>
           <p:cNvSpPr txBox="1"/>
           <p:nvPr/>
         </p:nvSpPr>
         <p:spPr>
           <a:xfrm>
-            <a:off x="8084667" y="3840480"/>
+            <a:off x="8084667" y="4160520"/>
             <a:ext cx="2916936" cy="1143000"/>
           </a:xfrm>
           <a:prstGeom prst="rect">

--- a/talks/whats-stopping-us-from-building-great-products-and-monetizing-them/whats-stopping-us-from-building-great-products-and-monetizing-them.pptx
+++ b/talks/whats-stopping-us-from-building-great-products-and-monetizing-them/whats-stopping-us-from-building-great-products-and-monetizing-them.pptx
@@ -30,6 +30,8 @@
     <p:sldId id="278" r:id="rId29"/>
     <p:sldId id="279" r:id="rId30"/>
     <p:sldId id="280" r:id="rId31"/>
+    <p:sldId id="281" r:id="rId32"/>
+    <p:sldId id="282" r:id="rId33"/>
   </p:sldIdLst>
   <p:sldSz cx="12191695" cy="6858000" type="screen4x3"/>
   <p:notesSz cx="6858000" cy="9144000"/>
@@ -606,7 +608,12 @@
           <a:lstStyle/>
           <a:p>
             <a:r>
-              <a:t>Tanglish: Checkout-ku anju peru. Ella provider-um venam.</a:t>
+              <a:t>Tanglish: Oruthan pick pannunga. Anju-um venam. Next slide-la oru price, andha checkout.</a:t>
+            </a:r>
+          </a:p>
+          <a:p>
+            <a:r>
+              <a:t>Pick one of these. You do not need all five. Another allowed checkout is fine. The next slide is one price and that checkout.</a:t>
             </a:r>
           </a:p>
           <a:p>
@@ -621,7 +628,7 @@
           </a:p>
           <a:p>
             <a:r>
-              <a:t>RevenueCat is mobile subscriptions. https://www.revenuecat.com/</a:t>
+              <a:t>RevenueCat is mobile subscriptions and stays optional. https://www.revenuecat.com/</a:t>
             </a:r>
           </a:p>
           <a:p>
@@ -632,11 +639,6 @@
           <a:p>
             <a:r>
               <a:t>Apple Pay: wallet checkout where Apple Pay is available. https://developer.apple.com/apple-pay/</a:t>
-            </a:r>
-          </a:p>
-          <a:p>
-            <a:r>
-              <a:t>None of the five is required.</a:t>
             </a:r>
           </a:p>
           <a:p>
@@ -1476,22 +1478,17 @@
           <a:lstStyle/>
           <a:p>
             <a:r>
-              <a:t>Tanglish: Sheet-la fill pannunga. Review Ready-ku maathunga. Organizers dhaan paathu review pannuvaanga.</a:t>
-            </a:r>
-          </a:p>
-          <a:p>
-            <a:r>
-              <a:t>Sheet: https://docs.google.com/spreadsheets/d/1DZ7OSphlY8llxWisVc_FcLGeu9Psj_fvfxR2F7ohxcM/edit?usp=sharing</a:t>
-            </a:r>
-          </a:p>
-          <a:p>
-            <a:r>
-              <a:t>Columns: Product Name, Creator / Team, Product Category, Demo / Product URL, Repository URL, Monetization Model, Payment Integration, Deployment Status, Review Status, Production Ready by Thursday, Notes.</a:t>
-            </a:r>
-          </a:p>
-          <a:p>
-            <a:r>
-              <a:t>Workflow: fill the sheet, update URLs, the participant sets Review Status to Review Ready, organizers review. Review Ready is not approval.</a:t>
+              <a:t>Tanglish: Startup School free. Online. YC. Early lessons-ah use pannunga. Lesson number invent pannaathinga.</a:t>
+            </a:r>
+          </a:p>
+          <a:p>
+            <a:r>
+              <a:t>The QR lives only here. Take Y Combinator Startup School. Free. Online. Say early lessons. Do not invent a lesson number.</a:t>
+            </a:r>
+          </a:p>
+          <a:p>
+            <a:r>
+              <a:t>https://www.startupschool.org/</a:t>
             </a:r>
           </a:p>
         </p:txBody>
@@ -1646,37 +1643,22 @@
           <a:lstStyle/>
           <a:p>
             <a:r>
-              <a:t>Tanglish: Thursday-kku live aaganum. Review Ready-na ‘paathu videoonga.’ Production Ready-na users use panna ready.</a:t>
-            </a:r>
-          </a:p>
-          <a:p>
-            <a:r>
-              <a:t>Say Thursday. Do not print a calendar date.</a:t>
-            </a:r>
-          </a:p>
-          <a:p>
-            <a:r>
-              <a:t>Production Ready by Thursday = deployed and usable. Review Ready = please review.</a:t>
-            </a:r>
-          </a:p>
-          <a:p>
-            <a:r>
-              <a:t>Checklist: production URL; core flow works; usable onboarding; no critical blockers; a clear way to charge; payment flow works when they charge; basic analytics or feedback; enough for organizers to test.</a:t>
-            </a:r>
-          </a:p>
-          <a:p>
-            <a:r>
-              <a:t>Extra DevFest prize eligibility, not an automatic win.</a:t>
-            </a:r>
-          </a:p>
-          <a:p>
-            <a:r>
-              <a:t>https://luma.com/mprx0ocg</a:t>
-            </a:r>
-          </a:p>
-          <a:p>
-            <a:r>
-              <a:t>https://devfest.gdgchennai.in/</a:t>
+              <a:t>Tanglish: Sheet-la fill pannunga. Review Ready-ku maathunga. Organizers dhaan paathu review pannuvaanga.</a:t>
+            </a:r>
+          </a:p>
+          <a:p>
+            <a:r>
+              <a:t>Sheet: https://docs.google.com/spreadsheets/d/1DZ7OSphlY8llxWisVc_FcLGeu9Psj_fvfxR2F7ohxcM/edit?usp=sharing</a:t>
+            </a:r>
+          </a:p>
+          <a:p>
+            <a:r>
+              <a:t>Columns: Product Name, Creator / Team, Product Category, Demo / Product URL, Repository URL, Monetization Model, Payment Integration, Deployment Status, Review Status, Production Ready by Thursday, Notes.</a:t>
+            </a:r>
+          </a:p>
+          <a:p>
+            <a:r>
+              <a:t>Workflow: fill the sheet, update URLs, the participant sets Review Status to Review Ready, organizers review. Review Ready is not approval.</a:t>
             </a:r>
           </a:p>
         </p:txBody>
@@ -1746,32 +1728,32 @@
           <a:lstStyle/>
           <a:p>
             <a:r>
-              <a:t>Tanglish: Ship pannunga. Review aaganum. Ticket-na bonus — guarantee illa.</a:t>
-            </a:r>
-          </a:p>
-          <a:p>
-            <a:r>
-              <a:t>On the slide, attributed to Sam Altman: We're going to see 10 person billion-dollar companies pretty soon.</a:t>
-            </a:r>
-          </a:p>
-          <a:p>
-            <a:r>
-              <a:t>Fuller reported line: We're going to see 10-person companies with billion-dollar valuations pretty soon.</a:t>
-            </a:r>
-          </a:p>
-          <a:p>
-            <a:r>
-              <a:t>https://www.forbes.com/sites/michaelashley/2025/02/17/the-future-is-solo-ai-is-creating-billion-dollar-one-person-companies/</a:t>
-            </a:r>
-          </a:p>
-          <a:p>
-            <a:r>
-              <a:t>Organizers review. Selected winners get DevFest Chennai tickets. Prizes also at DevFest, Sat 17 Oct 2026, IITM Research Park. Thursday production-ready teams are considered for an additional prize — not a guarantee.</a:t>
-            </a:r>
-          </a:p>
-          <a:p>
-            <a:r>
-              <a:t>Judging themes only: usefulness, execution, UX, monetization potential, real deployment, learning. Do not invent amounts, winner counts, or weights.</a:t>
+              <a:t>Tanglish: Thursday-kku live aaganum. Review Ready-na ‘paathu videoonga.’ Production Ready-na users use panna ready.</a:t>
+            </a:r>
+          </a:p>
+          <a:p>
+            <a:r>
+              <a:t>Say Thursday. Do not print a calendar date.</a:t>
+            </a:r>
+          </a:p>
+          <a:p>
+            <a:r>
+              <a:t>Production Ready by Thursday = deployed and usable. Review Ready = please review.</a:t>
+            </a:r>
+          </a:p>
+          <a:p>
+            <a:r>
+              <a:t>Checklist: production URL; core flow works; usable onboarding; no critical blockers; a clear way to charge; payment flow works when they charge; basic analytics or feedback; enough for organizers to test.</a:t>
+            </a:r>
+          </a:p>
+          <a:p>
+            <a:r>
+              <a:t>Extra DevFest prize eligibility, not an automatic win.</a:t>
+            </a:r>
+          </a:p>
+          <a:p>
+            <a:r>
+              <a:t>https://luma.com/mprx0ocg</a:t>
             </a:r>
           </a:p>
           <a:p>
@@ -1846,27 +1828,37 @@
           <a:lstStyle/>
           <a:p>
             <a:r>
-              <a:t>Tanglish: Ippo ivathai follow pannunga. Overwhelm aagadheenga.</a:t>
-            </a:r>
-          </a:p>
-          <a:p>
-            <a:r>
-              <a:t>Three names only. X is build in public. https://x.com/</a:t>
-            </a:r>
-          </a:p>
-          <a:p>
-            <a:r>
-              <a:t>Product Hunt is where new products show up. https://www.producthunt.com/</a:t>
-            </a:r>
-          </a:p>
-          <a:p>
-            <a:r>
-              <a:t>Startup School is the free YC course on the next slide. https://www.startupschool.org/</a:t>
-            </a:r>
-          </a:p>
-          <a:p>
-            <a:r>
-              <a:t>No second QR here. No extra networks.</a:t>
+              <a:t>Tanglish: Ship pannunga. Review aaganum. Ticket-na bonus — guarantee illa.</a:t>
+            </a:r>
+          </a:p>
+          <a:p>
+            <a:r>
+              <a:t>On the slide, attributed to Sam Altman: We're going to see 10 person billion-dollar companies pretty soon.</a:t>
+            </a:r>
+          </a:p>
+          <a:p>
+            <a:r>
+              <a:t>Fuller reported line: We're going to see 10-person companies with billion-dollar valuations pretty soon.</a:t>
+            </a:r>
+          </a:p>
+          <a:p>
+            <a:r>
+              <a:t>https://www.forbes.com/sites/michaelashley/2025/02/17/the-future-is-solo-ai-is-creating-billion-dollar-one-person-companies/</a:t>
+            </a:r>
+          </a:p>
+          <a:p>
+            <a:r>
+              <a:t>Organizers review. Selected winners get DevFest Chennai tickets. Prizes also at DevFest, Sat 17 Oct 2026, IITM Research Park. Thursday production-ready teams are considered for an additional prize — not a guarantee.</a:t>
+            </a:r>
+          </a:p>
+          <a:p>
+            <a:r>
+              <a:t>Judging themes only: usefulness, execution, UX, monetization potential, real deployment, learning. Do not invent amounts, winner counts, or weights.</a:t>
+            </a:r>
+          </a:p>
+          <a:p>
+            <a:r>
+              <a:t>https://devfest.gdgchennai.in/</a:t>
             </a:r>
           </a:p>
         </p:txBody>
@@ -1936,17 +1928,27 @@
           <a:lstStyle/>
           <a:p>
             <a:r>
-              <a:t>Tanglish: Startup School free. Online. YC. Early lessons-ah use pannunga. Lesson number invent pannaathinga.</a:t>
-            </a:r>
-          </a:p>
-          <a:p>
-            <a:r>
-              <a:t>The QR lives only here. The previous slide only named Startup School as something to follow. Take Y Combinator Startup School. Free. Online. Say early lessons. Do not invent a lesson number.</a:t>
-            </a:r>
-          </a:p>
-          <a:p>
-            <a:r>
-              <a:t>https://www.startupschool.org/</a:t>
+              <a:t>Tanglish: Ippo ivathai follow pannunga. Overwhelm aagadheenga.</a:t>
+            </a:r>
+          </a:p>
+          <a:p>
+            <a:r>
+              <a:t>Three names only. X is build in public. https://x.com/</a:t>
+            </a:r>
+          </a:p>
+          <a:p>
+            <a:r>
+              <a:t>Product Hunt is where new products show up. https://www.producthunt.com/</a:t>
+            </a:r>
+          </a:p>
+          <a:p>
+            <a:r>
+              <a:t>Startup School is the free YC course shown earlier. https://www.startupschool.org/</a:t>
+            </a:r>
+          </a:p>
+          <a:p>
+            <a:r>
+              <a:t>No second QR here. No extra networks.</a:t>
             </a:r>
           </a:p>
         </p:txBody>
@@ -2052,6 +2054,171 @@
 </file>
 
 <file path=ppt/notesSlides/notesSlide25.xml><?xml version="1.0" encoding="utf-8"?>
+<p:notes xmlns:a="http://schemas.openxmlformats.org/drawingml/2006/main" xmlns:p="http://schemas.openxmlformats.org/presentationml/2006/main" xmlns:r="http://schemas.openxmlformats.org/officeDocument/2006/relationships">
+  <p:cSld>
+    <p:spTree>
+      <p:nvGrpSpPr>
+        <p:cNvPr id="1" name=""/>
+        <p:cNvGrpSpPr/>
+        <p:nvPr/>
+      </p:nvGrpSpPr>
+      <p:grpSpPr>
+        <a:xfrm>
+          <a:off x="0" y="0"/>
+          <a:ext cx="0" cy="0"/>
+          <a:chOff x="0" y="0"/>
+          <a:chExt cx="0" cy="0"/>
+        </a:xfrm>
+      </p:grpSpPr>
+      <p:sp>
+        <p:nvSpPr>
+          <p:cNvPr id="2" name="Slide Image Placeholder 1"/>
+          <p:cNvSpPr>
+            <a:spLocks noGrp="1"/>
+          </p:cNvSpPr>
+          <p:nvPr>
+            <p:ph type="sldImg" idx="2"/>
+          </p:nvPr>
+        </p:nvSpPr>
+        <p:spPr/>
+      </p:sp>
+      <p:sp>
+        <p:nvSpPr>
+          <p:cNvPr id="3" name="Notes Placeholder 2"/>
+          <p:cNvSpPr>
+            <a:spLocks noGrp="1"/>
+          </p:cNvSpPr>
+          <p:nvPr>
+            <p:ph type="body" idx="3" sz="quarter"/>
+          </p:nvPr>
+        </p:nvSpPr>
+        <p:spPr/>
+        <p:txBody>
+          <a:bodyPr/>
+          <a:lstStyle/>
+          <a:p>
+            <a:r>
+              <a:t>Tanglish: Indha card-ah vechi vidunga. Title overlay pannaathinga.</a:t>
+            </a:r>
+          </a:p>
+          <a:p>
+            <a:r>
+              <a:t>Whole image. No crop. No title on the slide. The date stays inside the art. 20% off, code KUGCHENNAI, 20 Nov 2026, Bengaluru — that is on the card, not a second headline.</a:t>
+            </a:r>
+          </a:p>
+          <a:p>
+            <a:r>
+              <a:t>https://india.droidcon.com/</a:t>
+            </a:r>
+          </a:p>
+          <a:p>
+            <a:r>
+              <a:t>https://ibb.co/3mpLSXFq</a:t>
+            </a:r>
+          </a:p>
+        </p:txBody>
+      </p:sp>
+      <p:sp>
+        <p:nvSpPr>
+          <p:cNvPr id="4" name="Slide Number Placeholder 3"/>
+          <p:cNvSpPr>
+            <a:spLocks noGrp="1"/>
+          </p:cNvSpPr>
+          <p:nvPr>
+            <p:ph type="sldNum" idx="5" sz="quarter"/>
+          </p:nvPr>
+        </p:nvSpPr>
+        <p:spPr/>
+      </p:sp>
+    </p:spTree>
+  </p:cSld>
+  <p:clrMapOvr>
+    <a:masterClrMapping/>
+  </p:clrMapOvr>
+</p:notes>
+</file>
+
+<file path=ppt/notesSlides/notesSlide26.xml><?xml version="1.0" encoding="utf-8"?>
+<p:notes xmlns:a="http://schemas.openxmlformats.org/drawingml/2006/main" xmlns:p="http://schemas.openxmlformats.org/presentationml/2006/main" xmlns:r="http://schemas.openxmlformats.org/officeDocument/2006/relationships">
+  <p:cSld>
+    <p:spTree>
+      <p:nvGrpSpPr>
+        <p:cNvPr id="1" name=""/>
+        <p:cNvGrpSpPr/>
+        <p:nvPr/>
+      </p:nvGrpSpPr>
+      <p:grpSpPr>
+        <a:xfrm>
+          <a:off x="0" y="0"/>
+          <a:ext cx="0" cy="0"/>
+          <a:chOff x="0" y="0"/>
+          <a:chExt cx="0" cy="0"/>
+        </a:xfrm>
+      </p:grpSpPr>
+      <p:sp>
+        <p:nvSpPr>
+          <p:cNvPr id="2" name="Slide Image Placeholder 1"/>
+          <p:cNvSpPr>
+            <a:spLocks noGrp="1"/>
+          </p:cNvSpPr>
+          <p:nvPr>
+            <p:ph type="sldImg" idx="2"/>
+          </p:nvPr>
+        </p:nvSpPr>
+        <p:spPr/>
+      </p:sp>
+      <p:sp>
+        <p:nvSpPr>
+          <p:cNvPr id="3" name="Notes Placeholder 2"/>
+          <p:cNvSpPr>
+            <a:spLocks noGrp="1"/>
+          </p:cNvSpPr>
+          <p:nvPr>
+            <p:ph type="body" idx="3" sz="quarter"/>
+          </p:nvPr>
+        </p:nvSpPr>
+        <p:spPr/>
+        <p:txBody>
+          <a:bodyPr/>
+          <a:lstStyle/>
+          <a:p>
+            <a:r>
+              <a:t>Tanglish: Volunteer aaganum-na scan pannunga. Form fill pannunga.</a:t>
+            </a:r>
+          </a:p>
+          <a:p>
+            <a:r>
+              <a:t>This is the last slide before Jobs. Large QR. It decodes to https://forms.gle/bpL3rYXffdDWCMK89</a:t>
+            </a:r>
+          </a:p>
+          <a:p>
+            <a:r>
+              <a:t>Leave the form title up. Do not invent extra volunteer perks.</a:t>
+            </a:r>
+          </a:p>
+        </p:txBody>
+      </p:sp>
+      <p:sp>
+        <p:nvSpPr>
+          <p:cNvPr id="4" name="Slide Number Placeholder 3"/>
+          <p:cNvSpPr>
+            <a:spLocks noGrp="1"/>
+          </p:cNvSpPr>
+          <p:nvPr>
+            <p:ph type="sldNum" idx="5" sz="quarter"/>
+          </p:nvPr>
+        </p:nvSpPr>
+        <p:spPr/>
+      </p:sp>
+    </p:spTree>
+  </p:cSld>
+  <p:clrMapOvr>
+    <a:masterClrMapping/>
+  </p:clrMapOvr>
+</p:notes>
+</file>
+
+<file path=ppt/notesSlides/notesSlide27.xml><?xml version="1.0" encoding="utf-8"?>
 <p:notes xmlns:a="http://schemas.openxmlformats.org/drawingml/2006/main" xmlns:p="http://schemas.openxmlformats.org/presentationml/2006/main" xmlns:r="http://schemas.openxmlformats.org/officeDocument/2006/relationships">
   <p:cSld>
     <p:spTree>
@@ -5890,7 +6057,7 @@
                 </a:solidFill>
                 <a:latin typeface="Calibri"/>
               </a:rPr>
-              <a:t>Pick a checkout.</a:t>
+              <a:t>Pick one.</a:t>
             </a:r>
           </a:p>
         </p:txBody>
@@ -5925,7 +6092,7 @@
                 </a:solidFill>
                 <a:latin typeface="Calibri"/>
               </a:rPr>
-              <a:t>None of these is required.</a:t>
+              <a:t>Any of these is fine.</a:t>
             </a:r>
           </a:p>
         </p:txBody>
@@ -9750,7 +9917,7 @@
         <p:spPr>
           <a:xfrm>
             <a:off x="640080" y="640080"/>
-            <a:ext cx="10881360" cy="1143000"/>
+            <a:ext cx="10881360" cy="1051560"/>
           </a:xfrm>
           <a:prstGeom prst="rect">
             <a:avLst/>
@@ -9765,20 +9932,55 @@
           <a:p>
             <a:pPr algn="ctr"/>
             <a:r>
-              <a:rPr sz="3400" b="1">
+              <a:rPr sz="3600" b="1">
                 <a:solidFill>
                   <a:srgbClr val="1D1D1F"/>
                 </a:solidFill>
                 <a:latin typeface="Calibri"/>
               </a:rPr>
-              <a:t>One sheet. Set Review Ready.</a:t>
+              <a:t>Take Startup School.</a:t>
+            </a:r>
+          </a:p>
+        </p:txBody>
+      </p:sp>
+      <p:sp>
+        <p:nvSpPr>
+          <p:cNvPr id="4" name="TextBox 3"/>
+          <p:cNvSpPr txBox="1"/>
+          <p:nvPr/>
+        </p:nvSpPr>
+        <p:spPr>
+          <a:xfrm>
+            <a:off x="640080" y="1737360"/>
+            <a:ext cx="10881360" cy="502920"/>
+          </a:xfrm>
+          <a:prstGeom prst="rect">
+            <a:avLst/>
+          </a:prstGeom>
+          <a:noFill/>
+        </p:spPr>
+        <p:txBody>
+          <a:bodyPr wrap="square">
+            <a:spAutoFit/>
+          </a:bodyPr>
+          <a:lstStyle/>
+          <a:p>
+            <a:pPr algn="ctr"/>
+            <a:r>
+              <a:rPr sz="2200" b="0">
+                <a:solidFill>
+                  <a:srgbClr val="6E6E73"/>
+                </a:solidFill>
+                <a:latin typeface="Calibri"/>
+              </a:rPr>
+              <a:t>Free. Online. From YC.</a:t>
             </a:r>
           </a:p>
         </p:txBody>
       </p:sp>
       <p:pic>
         <p:nvPicPr>
-          <p:cNvPr id="4" name="Picture 3" descr="shipaton-sheet-qr.png"/>
+          <p:cNvPr id="5" name="Picture 4" descr="startup-school-qr.png"/>
           <p:cNvPicPr>
             <a:picLocks noChangeAspect="1"/>
           </p:cNvPicPr>
@@ -9792,7 +9994,7 @@
         </p:blipFill>
         <p:spPr>
           <a:xfrm>
-            <a:off x="4160520" y="1965960"/>
+            <a:off x="4160520" y="2331720"/>
             <a:ext cx="3840480" cy="3840480"/>
           </a:xfrm>
           <a:prstGeom prst="rect">
@@ -10078,8 +10280,8 @@
         </p:nvSpPr>
         <p:spPr>
           <a:xfrm>
-            <a:off x="640080" y="1874519"/>
-            <a:ext cx="10881360" cy="1737360"/>
+            <a:off x="640080" y="640080"/>
+            <a:ext cx="10881360" cy="1143000"/>
           </a:xfrm>
           <a:prstGeom prst="rect">
             <a:avLst/>
@@ -10094,251 +10296,41 @@
           <a:p>
             <a:pPr algn="ctr"/>
             <a:r>
-              <a:rPr sz="4000" b="1">
+              <a:rPr sz="3400" b="1">
                 <a:solidFill>
                   <a:srgbClr val="1D1D1F"/>
                 </a:solidFill>
                 <a:latin typeface="Calibri"/>
               </a:rPr>
-              <a:t>Thursday. Make it live.</a:t>
-            </a:r>
-          </a:p>
-        </p:txBody>
-      </p:sp>
-      <p:sp>
-        <p:nvSpPr>
-          <p:cNvPr id="4" name="Rounded Rectangle 3"/>
-          <p:cNvSpPr/>
-          <p:nvPr/>
-        </p:nvSpPr>
-        <p:spPr>
-          <a:xfrm>
-            <a:off x="4168749" y="5257800"/>
-            <a:ext cx="1078992" cy="384048"/>
-          </a:xfrm>
-          <a:prstGeom prst="roundRect">
-            <a:avLst/>
-          </a:prstGeom>
-          <a:solidFill>
-            <a:srgbClr val="E8E8ED"/>
-          </a:solidFill>
-          <a:ln>
-            <a:noFill/>
-          </a:ln>
-        </p:spPr>
-        <p:style>
-          <a:lnRef idx="1">
-            <a:schemeClr val="accent1"/>
-          </a:lnRef>
-          <a:fillRef idx="3">
-            <a:schemeClr val="accent1"/>
-          </a:fillRef>
-          <a:effectRef idx="2">
-            <a:schemeClr val="accent1"/>
-          </a:effectRef>
-          <a:fontRef idx="minor">
-            <a:schemeClr val="lt1"/>
-          </a:fontRef>
-        </p:style>
-        <p:txBody>
-          <a:bodyPr rtlCol="0" anchor="ctr"/>
-          <a:lstStyle/>
-          <a:p>
-            <a:pPr algn="ctr"/>
-          </a:p>
-        </p:txBody>
-      </p:sp>
-      <p:sp>
-        <p:nvSpPr>
-          <p:cNvPr id="5" name="TextBox 4"/>
-          <p:cNvSpPr txBox="1"/>
-          <p:nvPr/>
-        </p:nvSpPr>
-        <p:spPr>
-          <a:xfrm>
-            <a:off x="4168749" y="5294376"/>
-            <a:ext cx="1078992" cy="329184"/>
-          </a:xfrm>
-          <a:prstGeom prst="rect">
-            <a:avLst/>
-          </a:prstGeom>
-          <a:noFill/>
-        </p:spPr>
-        <p:txBody>
-          <a:bodyPr wrap="square">
-            <a:spAutoFit/>
-          </a:bodyPr>
-          <a:lstStyle/>
-          <a:p>
-            <a:pPr algn="ctr"/>
-            <a:r>
-              <a:rPr sz="1200" b="1">
-                <a:solidFill>
-                  <a:srgbClr val="1D1D1F"/>
-                </a:solidFill>
-                <a:latin typeface="Calibri"/>
-              </a:rPr>
-              <a:t>Deployed</a:t>
-            </a:r>
-          </a:p>
-        </p:txBody>
-      </p:sp>
-      <p:sp>
-        <p:nvSpPr>
-          <p:cNvPr id="6" name="Rounded Rectangle 5"/>
-          <p:cNvSpPr/>
-          <p:nvPr/>
-        </p:nvSpPr>
-        <p:spPr>
-          <a:xfrm>
-            <a:off x="5412333" y="5257800"/>
-            <a:ext cx="886968" cy="384048"/>
-          </a:xfrm>
-          <a:prstGeom prst="roundRect">
-            <a:avLst/>
-          </a:prstGeom>
-          <a:solidFill>
-            <a:srgbClr val="E8E8ED"/>
-          </a:solidFill>
-          <a:ln>
-            <a:noFill/>
-          </a:ln>
-        </p:spPr>
-        <p:style>
-          <a:lnRef idx="1">
-            <a:schemeClr val="accent1"/>
-          </a:lnRef>
-          <a:fillRef idx="3">
-            <a:schemeClr val="accent1"/>
-          </a:fillRef>
-          <a:effectRef idx="2">
-            <a:schemeClr val="accent1"/>
-          </a:effectRef>
-          <a:fontRef idx="minor">
-            <a:schemeClr val="lt1"/>
-          </a:fontRef>
-        </p:style>
-        <p:txBody>
-          <a:bodyPr rtlCol="0" anchor="ctr"/>
-          <a:lstStyle/>
-          <a:p>
-            <a:pPr algn="ctr"/>
-          </a:p>
-        </p:txBody>
-      </p:sp>
-      <p:sp>
-        <p:nvSpPr>
-          <p:cNvPr id="7" name="TextBox 6"/>
-          <p:cNvSpPr txBox="1"/>
-          <p:nvPr/>
-        </p:nvSpPr>
-        <p:spPr>
-          <a:xfrm>
-            <a:off x="5412333" y="5294376"/>
-            <a:ext cx="886968" cy="329184"/>
-          </a:xfrm>
-          <a:prstGeom prst="rect">
-            <a:avLst/>
-          </a:prstGeom>
-          <a:noFill/>
-        </p:spPr>
-        <p:txBody>
-          <a:bodyPr wrap="square">
-            <a:spAutoFit/>
-          </a:bodyPr>
-          <a:lstStyle/>
-          <a:p>
-            <a:pPr algn="ctr"/>
-            <a:r>
-              <a:rPr sz="1200" b="1">
-                <a:solidFill>
-                  <a:srgbClr val="1D1D1F"/>
-                </a:solidFill>
-                <a:latin typeface="Calibri"/>
-              </a:rPr>
-              <a:t>Usable</a:t>
-            </a:r>
-          </a:p>
-        </p:txBody>
-      </p:sp>
-      <p:sp>
-        <p:nvSpPr>
-          <p:cNvPr id="8" name="Rounded Rectangle 7"/>
-          <p:cNvSpPr/>
-          <p:nvPr/>
-        </p:nvSpPr>
-        <p:spPr>
-          <a:xfrm>
-            <a:off x="6463893" y="5257800"/>
-            <a:ext cx="1559052" cy="384048"/>
-          </a:xfrm>
-          <a:prstGeom prst="roundRect">
-            <a:avLst/>
-          </a:prstGeom>
-          <a:solidFill>
-            <a:srgbClr val="E8E8ED"/>
-          </a:solidFill>
-          <a:ln>
-            <a:noFill/>
-          </a:ln>
-        </p:spPr>
-        <p:style>
-          <a:lnRef idx="1">
-            <a:schemeClr val="accent1"/>
-          </a:lnRef>
-          <a:fillRef idx="3">
-            <a:schemeClr val="accent1"/>
-          </a:fillRef>
-          <a:effectRef idx="2">
-            <a:schemeClr val="accent1"/>
-          </a:effectRef>
-          <a:fontRef idx="minor">
-            <a:schemeClr val="lt1"/>
-          </a:fontRef>
-        </p:style>
-        <p:txBody>
-          <a:bodyPr rtlCol="0" anchor="ctr"/>
-          <a:lstStyle/>
-          <a:p>
-            <a:pPr algn="ctr"/>
-          </a:p>
-        </p:txBody>
-      </p:sp>
-      <p:sp>
-        <p:nvSpPr>
-          <p:cNvPr id="9" name="TextBox 8"/>
-          <p:cNvSpPr txBox="1"/>
-          <p:nvPr/>
-        </p:nvSpPr>
-        <p:spPr>
-          <a:xfrm>
-            <a:off x="6463893" y="5294376"/>
-            <a:ext cx="1559052" cy="329184"/>
-          </a:xfrm>
-          <a:prstGeom prst="rect">
-            <a:avLst/>
-          </a:prstGeom>
-          <a:noFill/>
-        </p:spPr>
-        <p:txBody>
-          <a:bodyPr wrap="square">
-            <a:spAutoFit/>
-          </a:bodyPr>
-          <a:lstStyle/>
-          <a:p>
-            <a:pPr algn="ctr"/>
-            <a:r>
-              <a:rPr sz="1200" b="1">
-                <a:solidFill>
-                  <a:srgbClr val="1D1D1F"/>
-                </a:solidFill>
-                <a:latin typeface="Calibri"/>
-              </a:rPr>
-              <a:t>Payments work</a:t>
-            </a:r>
-          </a:p>
-        </p:txBody>
-      </p:sp>
+              <a:t>One sheet. Set Review Ready.</a:t>
+            </a:r>
+          </a:p>
+        </p:txBody>
+      </p:sp>
+      <p:pic>
+        <p:nvPicPr>
+          <p:cNvPr id="4" name="Picture 3" descr="shipaton-sheet-qr.png"/>
+          <p:cNvPicPr>
+            <a:picLocks noChangeAspect="1"/>
+          </p:cNvPicPr>
+          <p:nvPr/>
+        </p:nvPicPr>
+        <p:blipFill>
+          <a:blip r:embed="rId2"/>
+          <a:stretch>
+            <a:fillRect/>
+          </a:stretch>
+        </p:blipFill>
+        <p:spPr>
+          <a:xfrm>
+            <a:off x="4160520" y="1965960"/>
+            <a:ext cx="3840480" cy="3840480"/>
+          </a:xfrm>
+          <a:prstGeom prst="rect">
+            <a:avLst/>
+          </a:prstGeom>
+        </p:spPr>
+      </p:pic>
     </p:spTree>
   </p:cSld>
   <p:clrMapOvr>
@@ -10408,8 +10400,8 @@
         </p:nvSpPr>
         <p:spPr>
           <a:xfrm>
-            <a:off x="640080" y="1051560"/>
-            <a:ext cx="10881360" cy="1005840"/>
+            <a:off x="640080" y="1874519"/>
+            <a:ext cx="10881360" cy="1737360"/>
           </a:xfrm>
           <a:prstGeom prst="rect">
             <a:avLst/>
@@ -10424,97 +10416,27 @@
           <a:p>
             <a:pPr algn="ctr"/>
             <a:r>
-              <a:rPr sz="3600" b="1">
+              <a:rPr sz="4000" b="1">
                 <a:solidFill>
                   <a:srgbClr val="1D1D1F"/>
                 </a:solidFill>
                 <a:latin typeface="Calibri"/>
               </a:rPr>
-              <a:t>Ship it. Get reviewed.</a:t>
-            </a:r>
-          </a:p>
-        </p:txBody>
-      </p:sp>
-      <p:sp>
-        <p:nvSpPr>
-          <p:cNvPr id="4" name="TextBox 3"/>
-          <p:cNvSpPr txBox="1"/>
-          <p:nvPr/>
-        </p:nvSpPr>
-        <p:spPr>
-          <a:xfrm>
-            <a:off x="822960" y="2331720"/>
-            <a:ext cx="10515600" cy="1828800"/>
-          </a:xfrm>
-          <a:prstGeom prst="rect">
-            <a:avLst/>
-          </a:prstGeom>
-          <a:noFill/>
-        </p:spPr>
-        <p:txBody>
-          <a:bodyPr wrap="square">
-            <a:spAutoFit/>
-          </a:bodyPr>
-          <a:lstStyle/>
-          <a:p>
-            <a:pPr algn="ctr"/>
-            <a:r>
-              <a:rPr sz="2400" b="1">
-                <a:solidFill>
-                  <a:srgbClr val="1D1D1F"/>
-                </a:solidFill>
-                <a:latin typeface="Calibri"/>
-              </a:rPr>
-              <a:t>We're going to see 10 person billion-dollar companies pretty soon.</a:t>
-            </a:r>
-          </a:p>
-        </p:txBody>
-      </p:sp>
-      <p:sp>
-        <p:nvSpPr>
-          <p:cNvPr id="5" name="TextBox 4"/>
-          <p:cNvSpPr txBox="1"/>
-          <p:nvPr/>
-        </p:nvSpPr>
-        <p:spPr>
-          <a:xfrm>
-            <a:off x="640080" y="4297680"/>
-            <a:ext cx="10881360" cy="365760"/>
-          </a:xfrm>
-          <a:prstGeom prst="rect">
-            <a:avLst/>
-          </a:prstGeom>
-          <a:noFill/>
-        </p:spPr>
-        <p:txBody>
-          <a:bodyPr wrap="square">
-            <a:spAutoFit/>
-          </a:bodyPr>
-          <a:lstStyle/>
-          <a:p>
-            <a:pPr algn="ctr"/>
-            <a:r>
-              <a:rPr sz="1400" b="1">
-                <a:solidFill>
-                  <a:srgbClr val="6E6E73"/>
-                </a:solidFill>
-                <a:latin typeface="Calibri"/>
-              </a:rPr>
-              <a:t>Sam Altman</a:t>
-            </a:r>
-          </a:p>
-        </p:txBody>
-      </p:sp>
-      <p:sp>
-        <p:nvSpPr>
-          <p:cNvPr id="6" name="Rounded Rectangle 5"/>
+              <a:t>Thursday. Make it live.</a:t>
+            </a:r>
+          </a:p>
+        </p:txBody>
+      </p:sp>
+      <p:sp>
+        <p:nvSpPr>
+          <p:cNvPr id="4" name="Rounded Rectangle 3"/>
           <p:cNvSpPr/>
           <p:nvPr/>
         </p:nvSpPr>
         <p:spPr>
           <a:xfrm>
-            <a:off x="5220309" y="5257800"/>
-            <a:ext cx="1751076" cy="384048"/>
+            <a:off x="4168749" y="5257800"/>
+            <a:ext cx="1078992" cy="384048"/>
           </a:xfrm>
           <a:prstGeom prst="roundRect">
             <a:avLst/>
@@ -10550,14 +10472,14 @@
       </p:sp>
       <p:sp>
         <p:nvSpPr>
-          <p:cNvPr id="7" name="TextBox 6"/>
+          <p:cNvPr id="5" name="TextBox 4"/>
           <p:cNvSpPr txBox="1"/>
           <p:nvPr/>
         </p:nvSpPr>
         <p:spPr>
           <a:xfrm>
-            <a:off x="5220309" y="5294376"/>
-            <a:ext cx="1751076" cy="329184"/>
+            <a:off x="4168749" y="5294376"/>
+            <a:ext cx="1078992" cy="329184"/>
           </a:xfrm>
           <a:prstGeom prst="rect">
             <a:avLst/>
@@ -10578,7 +10500,163 @@
                 </a:solidFill>
                 <a:latin typeface="Calibri"/>
               </a:rPr>
-              <a:t>DevFest tickets</a:t>
+              <a:t>Deployed</a:t>
+            </a:r>
+          </a:p>
+        </p:txBody>
+      </p:sp>
+      <p:sp>
+        <p:nvSpPr>
+          <p:cNvPr id="6" name="Rounded Rectangle 5"/>
+          <p:cNvSpPr/>
+          <p:nvPr/>
+        </p:nvSpPr>
+        <p:spPr>
+          <a:xfrm>
+            <a:off x="5412333" y="5257800"/>
+            <a:ext cx="886968" cy="384048"/>
+          </a:xfrm>
+          <a:prstGeom prst="roundRect">
+            <a:avLst/>
+          </a:prstGeom>
+          <a:solidFill>
+            <a:srgbClr val="E8E8ED"/>
+          </a:solidFill>
+          <a:ln>
+            <a:noFill/>
+          </a:ln>
+        </p:spPr>
+        <p:style>
+          <a:lnRef idx="1">
+            <a:schemeClr val="accent1"/>
+          </a:lnRef>
+          <a:fillRef idx="3">
+            <a:schemeClr val="accent1"/>
+          </a:fillRef>
+          <a:effectRef idx="2">
+            <a:schemeClr val="accent1"/>
+          </a:effectRef>
+          <a:fontRef idx="minor">
+            <a:schemeClr val="lt1"/>
+          </a:fontRef>
+        </p:style>
+        <p:txBody>
+          <a:bodyPr rtlCol="0" anchor="ctr"/>
+          <a:lstStyle/>
+          <a:p>
+            <a:pPr algn="ctr"/>
+          </a:p>
+        </p:txBody>
+      </p:sp>
+      <p:sp>
+        <p:nvSpPr>
+          <p:cNvPr id="7" name="TextBox 6"/>
+          <p:cNvSpPr txBox="1"/>
+          <p:nvPr/>
+        </p:nvSpPr>
+        <p:spPr>
+          <a:xfrm>
+            <a:off x="5412333" y="5294376"/>
+            <a:ext cx="886968" cy="329184"/>
+          </a:xfrm>
+          <a:prstGeom prst="rect">
+            <a:avLst/>
+          </a:prstGeom>
+          <a:noFill/>
+        </p:spPr>
+        <p:txBody>
+          <a:bodyPr wrap="square">
+            <a:spAutoFit/>
+          </a:bodyPr>
+          <a:lstStyle/>
+          <a:p>
+            <a:pPr algn="ctr"/>
+            <a:r>
+              <a:rPr sz="1200" b="1">
+                <a:solidFill>
+                  <a:srgbClr val="1D1D1F"/>
+                </a:solidFill>
+                <a:latin typeface="Calibri"/>
+              </a:rPr>
+              <a:t>Usable</a:t>
+            </a:r>
+          </a:p>
+        </p:txBody>
+      </p:sp>
+      <p:sp>
+        <p:nvSpPr>
+          <p:cNvPr id="8" name="Rounded Rectangle 7"/>
+          <p:cNvSpPr/>
+          <p:nvPr/>
+        </p:nvSpPr>
+        <p:spPr>
+          <a:xfrm>
+            <a:off x="6463893" y="5257800"/>
+            <a:ext cx="1559052" cy="384048"/>
+          </a:xfrm>
+          <a:prstGeom prst="roundRect">
+            <a:avLst/>
+          </a:prstGeom>
+          <a:solidFill>
+            <a:srgbClr val="E8E8ED"/>
+          </a:solidFill>
+          <a:ln>
+            <a:noFill/>
+          </a:ln>
+        </p:spPr>
+        <p:style>
+          <a:lnRef idx="1">
+            <a:schemeClr val="accent1"/>
+          </a:lnRef>
+          <a:fillRef idx="3">
+            <a:schemeClr val="accent1"/>
+          </a:fillRef>
+          <a:effectRef idx="2">
+            <a:schemeClr val="accent1"/>
+          </a:effectRef>
+          <a:fontRef idx="minor">
+            <a:schemeClr val="lt1"/>
+          </a:fontRef>
+        </p:style>
+        <p:txBody>
+          <a:bodyPr rtlCol="0" anchor="ctr"/>
+          <a:lstStyle/>
+          <a:p>
+            <a:pPr algn="ctr"/>
+          </a:p>
+        </p:txBody>
+      </p:sp>
+      <p:sp>
+        <p:nvSpPr>
+          <p:cNvPr id="9" name="TextBox 8"/>
+          <p:cNvSpPr txBox="1"/>
+          <p:nvPr/>
+        </p:nvSpPr>
+        <p:spPr>
+          <a:xfrm>
+            <a:off x="6463893" y="5294376"/>
+            <a:ext cx="1559052" cy="329184"/>
+          </a:xfrm>
+          <a:prstGeom prst="rect">
+            <a:avLst/>
+          </a:prstGeom>
+          <a:noFill/>
+        </p:spPr>
+        <p:txBody>
+          <a:bodyPr wrap="square">
+            <a:spAutoFit/>
+          </a:bodyPr>
+          <a:lstStyle/>
+          <a:p>
+            <a:pPr algn="ctr"/>
+            <a:r>
+              <a:rPr sz="1200" b="1">
+                <a:solidFill>
+                  <a:srgbClr val="1D1D1F"/>
+                </a:solidFill>
+                <a:latin typeface="Calibri"/>
+              </a:rPr>
+              <a:t>Payments work</a:t>
             </a:r>
           </a:p>
         </p:txBody>
@@ -10652,8 +10730,8 @@
         </p:nvSpPr>
         <p:spPr>
           <a:xfrm>
-            <a:off x="640080" y="1554480"/>
-            <a:ext cx="10881360" cy="1737360"/>
+            <a:off x="640080" y="1051560"/>
+            <a:ext cx="10881360" cy="1005840"/>
           </a:xfrm>
           <a:prstGeom prst="rect">
             <a:avLst/>
@@ -10668,13 +10746,13 @@
           <a:p>
             <a:pPr algn="ctr"/>
             <a:r>
-              <a:rPr sz="3400" b="1">
+              <a:rPr sz="3600" b="1">
                 <a:solidFill>
                   <a:srgbClr val="1D1D1F"/>
                 </a:solidFill>
                 <a:latin typeface="Calibri"/>
               </a:rPr>
-              <a:t>Just follow these for now.</a:t>
+              <a:t>Ship it. Get reviewed.</a:t>
             </a:r>
           </a:p>
         </p:txBody>
@@ -10687,8 +10765,8 @@
         </p:nvSpPr>
         <p:spPr>
           <a:xfrm>
-            <a:off x="640080" y="3337560"/>
-            <a:ext cx="10881360" cy="777240"/>
+            <a:off x="822960" y="2331720"/>
+            <a:ext cx="10515600" cy="1828800"/>
           </a:xfrm>
           <a:prstGeom prst="rect">
             <a:avLst/>
@@ -10703,27 +10781,62 @@
           <a:p>
             <a:pPr algn="ctr"/>
             <a:r>
-              <a:rPr sz="2200" b="0">
+              <a:rPr sz="2400" b="1">
+                <a:solidFill>
+                  <a:srgbClr val="1D1D1F"/>
+                </a:solidFill>
+                <a:latin typeface="Calibri"/>
+              </a:rPr>
+              <a:t>We're going to see 10 person billion-dollar companies pretty soon.</a:t>
+            </a:r>
+          </a:p>
+        </p:txBody>
+      </p:sp>
+      <p:sp>
+        <p:nvSpPr>
+          <p:cNvPr id="5" name="TextBox 4"/>
+          <p:cNvSpPr txBox="1"/>
+          <p:nvPr/>
+        </p:nvSpPr>
+        <p:spPr>
+          <a:xfrm>
+            <a:off x="640080" y="4297680"/>
+            <a:ext cx="10881360" cy="365760"/>
+          </a:xfrm>
+          <a:prstGeom prst="rect">
+            <a:avLst/>
+          </a:prstGeom>
+          <a:noFill/>
+        </p:spPr>
+        <p:txBody>
+          <a:bodyPr wrap="square">
+            <a:spAutoFit/>
+          </a:bodyPr>
+          <a:lstStyle/>
+          <a:p>
+            <a:pPr algn="ctr"/>
+            <a:r>
+              <a:rPr sz="1400" b="1">
                 <a:solidFill>
                   <a:srgbClr val="6E6E73"/>
                 </a:solidFill>
                 <a:latin typeface="Calibri"/>
               </a:rPr>
-              <a:t>Don't get overwhelmed.</a:t>
-            </a:r>
-          </a:p>
-        </p:txBody>
-      </p:sp>
-      <p:sp>
-        <p:nvSpPr>
-          <p:cNvPr id="5" name="Rounded Rectangle 4"/>
+              <a:t>Sam Altman</a:t>
+            </a:r>
+          </a:p>
+        </p:txBody>
+      </p:sp>
+      <p:sp>
+        <p:nvSpPr>
+          <p:cNvPr id="6" name="Rounded Rectangle 5"/>
           <p:cNvSpPr/>
           <p:nvPr/>
         </p:nvSpPr>
         <p:spPr>
           <a:xfrm>
-            <a:off x="4168749" y="5074920"/>
-            <a:ext cx="406908" cy="384048"/>
+            <a:off x="5220309" y="5257800"/>
+            <a:ext cx="1751076" cy="384048"/>
           </a:xfrm>
           <a:prstGeom prst="roundRect">
             <a:avLst/>
@@ -10759,14 +10872,14 @@
       </p:sp>
       <p:sp>
         <p:nvSpPr>
-          <p:cNvPr id="6" name="TextBox 5"/>
+          <p:cNvPr id="7" name="TextBox 6"/>
           <p:cNvSpPr txBox="1"/>
           <p:nvPr/>
         </p:nvSpPr>
         <p:spPr>
           <a:xfrm>
-            <a:off x="4168749" y="5111496"/>
-            <a:ext cx="406908" cy="329184"/>
+            <a:off x="5220309" y="5294376"/>
+            <a:ext cx="1751076" cy="329184"/>
           </a:xfrm>
           <a:prstGeom prst="rect">
             <a:avLst/>
@@ -10787,163 +10900,7 @@
                 </a:solidFill>
                 <a:latin typeface="Calibri"/>
               </a:rPr>
-              <a:t>X</a:t>
-            </a:r>
-          </a:p>
-        </p:txBody>
-      </p:sp>
-      <p:sp>
-        <p:nvSpPr>
-          <p:cNvPr id="7" name="Rounded Rectangle 6"/>
-          <p:cNvSpPr/>
-          <p:nvPr/>
-        </p:nvSpPr>
-        <p:spPr>
-          <a:xfrm>
-            <a:off x="4740249" y="5074920"/>
-            <a:ext cx="1463040" cy="384048"/>
-          </a:xfrm>
-          <a:prstGeom prst="roundRect">
-            <a:avLst/>
-          </a:prstGeom>
-          <a:solidFill>
-            <a:srgbClr val="E8E8ED"/>
-          </a:solidFill>
-          <a:ln>
-            <a:noFill/>
-          </a:ln>
-        </p:spPr>
-        <p:style>
-          <a:lnRef idx="1">
-            <a:schemeClr val="accent1"/>
-          </a:lnRef>
-          <a:fillRef idx="3">
-            <a:schemeClr val="accent1"/>
-          </a:fillRef>
-          <a:effectRef idx="2">
-            <a:schemeClr val="accent1"/>
-          </a:effectRef>
-          <a:fontRef idx="minor">
-            <a:schemeClr val="lt1"/>
-          </a:fontRef>
-        </p:style>
-        <p:txBody>
-          <a:bodyPr rtlCol="0" anchor="ctr"/>
-          <a:lstStyle/>
-          <a:p>
-            <a:pPr algn="ctr"/>
-          </a:p>
-        </p:txBody>
-      </p:sp>
-      <p:sp>
-        <p:nvSpPr>
-          <p:cNvPr id="8" name="TextBox 7"/>
-          <p:cNvSpPr txBox="1"/>
-          <p:nvPr/>
-        </p:nvSpPr>
-        <p:spPr>
-          <a:xfrm>
-            <a:off x="4740249" y="5111496"/>
-            <a:ext cx="1463040" cy="329184"/>
-          </a:xfrm>
-          <a:prstGeom prst="rect">
-            <a:avLst/>
-          </a:prstGeom>
-          <a:noFill/>
-        </p:spPr>
-        <p:txBody>
-          <a:bodyPr wrap="square">
-            <a:spAutoFit/>
-          </a:bodyPr>
-          <a:lstStyle/>
-          <a:p>
-            <a:pPr algn="ctr"/>
-            <a:r>
-              <a:rPr sz="1200" b="1">
-                <a:solidFill>
-                  <a:srgbClr val="1D1D1F"/>
-                </a:solidFill>
-                <a:latin typeface="Calibri"/>
-              </a:rPr>
-              <a:t>Product Hunt</a:t>
-            </a:r>
-          </a:p>
-        </p:txBody>
-      </p:sp>
-      <p:sp>
-        <p:nvSpPr>
-          <p:cNvPr id="9" name="Rounded Rectangle 8"/>
-          <p:cNvSpPr/>
-          <p:nvPr/>
-        </p:nvSpPr>
-        <p:spPr>
-          <a:xfrm>
-            <a:off x="6367881" y="5074920"/>
-            <a:ext cx="1655064" cy="384048"/>
-          </a:xfrm>
-          <a:prstGeom prst="roundRect">
-            <a:avLst/>
-          </a:prstGeom>
-          <a:solidFill>
-            <a:srgbClr val="E8E8ED"/>
-          </a:solidFill>
-          <a:ln>
-            <a:noFill/>
-          </a:ln>
-        </p:spPr>
-        <p:style>
-          <a:lnRef idx="1">
-            <a:schemeClr val="accent1"/>
-          </a:lnRef>
-          <a:fillRef idx="3">
-            <a:schemeClr val="accent1"/>
-          </a:fillRef>
-          <a:effectRef idx="2">
-            <a:schemeClr val="accent1"/>
-          </a:effectRef>
-          <a:fontRef idx="minor">
-            <a:schemeClr val="lt1"/>
-          </a:fontRef>
-        </p:style>
-        <p:txBody>
-          <a:bodyPr rtlCol="0" anchor="ctr"/>
-          <a:lstStyle/>
-          <a:p>
-            <a:pPr algn="ctr"/>
-          </a:p>
-        </p:txBody>
-      </p:sp>
-      <p:sp>
-        <p:nvSpPr>
-          <p:cNvPr id="10" name="TextBox 9"/>
-          <p:cNvSpPr txBox="1"/>
-          <p:nvPr/>
-        </p:nvSpPr>
-        <p:spPr>
-          <a:xfrm>
-            <a:off x="6367881" y="5111496"/>
-            <a:ext cx="1655064" cy="329184"/>
-          </a:xfrm>
-          <a:prstGeom prst="rect">
-            <a:avLst/>
-          </a:prstGeom>
-          <a:noFill/>
-        </p:spPr>
-        <p:txBody>
-          <a:bodyPr wrap="square">
-            <a:spAutoFit/>
-          </a:bodyPr>
-          <a:lstStyle/>
-          <a:p>
-            <a:pPr algn="ctr"/>
-            <a:r>
-              <a:rPr sz="1200" b="1">
-                <a:solidFill>
-                  <a:srgbClr val="1D1D1F"/>
-                </a:solidFill>
-                <a:latin typeface="Calibri"/>
-              </a:rPr>
-              <a:t>Startup School</a:t>
+              <a:t>DevFest tickets</a:t>
             </a:r>
           </a:p>
         </p:txBody>
@@ -11017,8 +10974,8 @@
         </p:nvSpPr>
         <p:spPr>
           <a:xfrm>
-            <a:off x="640080" y="640080"/>
-            <a:ext cx="10881360" cy="1051560"/>
+            <a:off x="640080" y="1554480"/>
+            <a:ext cx="10881360" cy="1737360"/>
           </a:xfrm>
           <a:prstGeom prst="rect">
             <a:avLst/>
@@ -11033,13 +10990,13 @@
           <a:p>
             <a:pPr algn="ctr"/>
             <a:r>
-              <a:rPr sz="3600" b="1">
+              <a:rPr sz="3400" b="1">
                 <a:solidFill>
                   <a:srgbClr val="1D1D1F"/>
                 </a:solidFill>
                 <a:latin typeface="Calibri"/>
               </a:rPr>
-              <a:t>Take Startup School.</a:t>
+              <a:t>Just follow these for now.</a:t>
             </a:r>
           </a:p>
         </p:txBody>
@@ -11052,8 +11009,8 @@
         </p:nvSpPr>
         <p:spPr>
           <a:xfrm>
-            <a:off x="640080" y="1737360"/>
-            <a:ext cx="10881360" cy="502920"/>
+            <a:off x="640080" y="3337560"/>
+            <a:ext cx="10881360" cy="777240"/>
           </a:xfrm>
           <a:prstGeom prst="rect">
             <a:avLst/>
@@ -11074,35 +11031,245 @@
                 </a:solidFill>
                 <a:latin typeface="Calibri"/>
               </a:rPr>
-              <a:t>Free. Online. From YC.</a:t>
-            </a:r>
-          </a:p>
-        </p:txBody>
-      </p:sp>
-      <p:pic>
-        <p:nvPicPr>
-          <p:cNvPr id="5" name="Picture 4" descr="startup-school-qr.png"/>
-          <p:cNvPicPr>
-            <a:picLocks noChangeAspect="1"/>
-          </p:cNvPicPr>
-          <p:nvPr/>
-        </p:nvPicPr>
-        <p:blipFill>
-          <a:blip r:embed="rId2"/>
-          <a:stretch>
-            <a:fillRect/>
-          </a:stretch>
-        </p:blipFill>
-        <p:spPr>
-          <a:xfrm>
-            <a:off x="4160520" y="2331720"/>
-            <a:ext cx="3840480" cy="3840480"/>
-          </a:xfrm>
-          <a:prstGeom prst="rect">
-            <a:avLst/>
-          </a:prstGeom>
-        </p:spPr>
-      </p:pic>
+              <a:t>Don't get overwhelmed.</a:t>
+            </a:r>
+          </a:p>
+        </p:txBody>
+      </p:sp>
+      <p:sp>
+        <p:nvSpPr>
+          <p:cNvPr id="5" name="Rounded Rectangle 4"/>
+          <p:cNvSpPr/>
+          <p:nvPr/>
+        </p:nvSpPr>
+        <p:spPr>
+          <a:xfrm>
+            <a:off x="4168749" y="5074920"/>
+            <a:ext cx="406908" cy="384048"/>
+          </a:xfrm>
+          <a:prstGeom prst="roundRect">
+            <a:avLst/>
+          </a:prstGeom>
+          <a:solidFill>
+            <a:srgbClr val="E8E8ED"/>
+          </a:solidFill>
+          <a:ln>
+            <a:noFill/>
+          </a:ln>
+        </p:spPr>
+        <p:style>
+          <a:lnRef idx="1">
+            <a:schemeClr val="accent1"/>
+          </a:lnRef>
+          <a:fillRef idx="3">
+            <a:schemeClr val="accent1"/>
+          </a:fillRef>
+          <a:effectRef idx="2">
+            <a:schemeClr val="accent1"/>
+          </a:effectRef>
+          <a:fontRef idx="minor">
+            <a:schemeClr val="lt1"/>
+          </a:fontRef>
+        </p:style>
+        <p:txBody>
+          <a:bodyPr rtlCol="0" anchor="ctr"/>
+          <a:lstStyle/>
+          <a:p>
+            <a:pPr algn="ctr"/>
+          </a:p>
+        </p:txBody>
+      </p:sp>
+      <p:sp>
+        <p:nvSpPr>
+          <p:cNvPr id="6" name="TextBox 5"/>
+          <p:cNvSpPr txBox="1"/>
+          <p:nvPr/>
+        </p:nvSpPr>
+        <p:spPr>
+          <a:xfrm>
+            <a:off x="4168749" y="5111496"/>
+            <a:ext cx="406908" cy="329184"/>
+          </a:xfrm>
+          <a:prstGeom prst="rect">
+            <a:avLst/>
+          </a:prstGeom>
+          <a:noFill/>
+        </p:spPr>
+        <p:txBody>
+          <a:bodyPr wrap="square">
+            <a:spAutoFit/>
+          </a:bodyPr>
+          <a:lstStyle/>
+          <a:p>
+            <a:pPr algn="ctr"/>
+            <a:r>
+              <a:rPr sz="1200" b="1">
+                <a:solidFill>
+                  <a:srgbClr val="1D1D1F"/>
+                </a:solidFill>
+                <a:latin typeface="Calibri"/>
+              </a:rPr>
+              <a:t>X</a:t>
+            </a:r>
+          </a:p>
+        </p:txBody>
+      </p:sp>
+      <p:sp>
+        <p:nvSpPr>
+          <p:cNvPr id="7" name="Rounded Rectangle 6"/>
+          <p:cNvSpPr/>
+          <p:nvPr/>
+        </p:nvSpPr>
+        <p:spPr>
+          <a:xfrm>
+            <a:off x="4740249" y="5074920"/>
+            <a:ext cx="1463040" cy="384048"/>
+          </a:xfrm>
+          <a:prstGeom prst="roundRect">
+            <a:avLst/>
+          </a:prstGeom>
+          <a:solidFill>
+            <a:srgbClr val="E8E8ED"/>
+          </a:solidFill>
+          <a:ln>
+            <a:noFill/>
+          </a:ln>
+        </p:spPr>
+        <p:style>
+          <a:lnRef idx="1">
+            <a:schemeClr val="accent1"/>
+          </a:lnRef>
+          <a:fillRef idx="3">
+            <a:schemeClr val="accent1"/>
+          </a:fillRef>
+          <a:effectRef idx="2">
+            <a:schemeClr val="accent1"/>
+          </a:effectRef>
+          <a:fontRef idx="minor">
+            <a:schemeClr val="lt1"/>
+          </a:fontRef>
+        </p:style>
+        <p:txBody>
+          <a:bodyPr rtlCol="0" anchor="ctr"/>
+          <a:lstStyle/>
+          <a:p>
+            <a:pPr algn="ctr"/>
+          </a:p>
+        </p:txBody>
+      </p:sp>
+      <p:sp>
+        <p:nvSpPr>
+          <p:cNvPr id="8" name="TextBox 7"/>
+          <p:cNvSpPr txBox="1"/>
+          <p:nvPr/>
+        </p:nvSpPr>
+        <p:spPr>
+          <a:xfrm>
+            <a:off x="4740249" y="5111496"/>
+            <a:ext cx="1463040" cy="329184"/>
+          </a:xfrm>
+          <a:prstGeom prst="rect">
+            <a:avLst/>
+          </a:prstGeom>
+          <a:noFill/>
+        </p:spPr>
+        <p:txBody>
+          <a:bodyPr wrap="square">
+            <a:spAutoFit/>
+          </a:bodyPr>
+          <a:lstStyle/>
+          <a:p>
+            <a:pPr algn="ctr"/>
+            <a:r>
+              <a:rPr sz="1200" b="1">
+                <a:solidFill>
+                  <a:srgbClr val="1D1D1F"/>
+                </a:solidFill>
+                <a:latin typeface="Calibri"/>
+              </a:rPr>
+              <a:t>Product Hunt</a:t>
+            </a:r>
+          </a:p>
+        </p:txBody>
+      </p:sp>
+      <p:sp>
+        <p:nvSpPr>
+          <p:cNvPr id="9" name="Rounded Rectangle 8"/>
+          <p:cNvSpPr/>
+          <p:nvPr/>
+        </p:nvSpPr>
+        <p:spPr>
+          <a:xfrm>
+            <a:off x="6367881" y="5074920"/>
+            <a:ext cx="1655064" cy="384048"/>
+          </a:xfrm>
+          <a:prstGeom prst="roundRect">
+            <a:avLst/>
+          </a:prstGeom>
+          <a:solidFill>
+            <a:srgbClr val="E8E8ED"/>
+          </a:solidFill>
+          <a:ln>
+            <a:noFill/>
+          </a:ln>
+        </p:spPr>
+        <p:style>
+          <a:lnRef idx="1">
+            <a:schemeClr val="accent1"/>
+          </a:lnRef>
+          <a:fillRef idx="3">
+            <a:schemeClr val="accent1"/>
+          </a:fillRef>
+          <a:effectRef idx="2">
+            <a:schemeClr val="accent1"/>
+          </a:effectRef>
+          <a:fontRef idx="minor">
+            <a:schemeClr val="lt1"/>
+          </a:fontRef>
+        </p:style>
+        <p:txBody>
+          <a:bodyPr rtlCol="0" anchor="ctr"/>
+          <a:lstStyle/>
+          <a:p>
+            <a:pPr algn="ctr"/>
+          </a:p>
+        </p:txBody>
+      </p:sp>
+      <p:sp>
+        <p:nvSpPr>
+          <p:cNvPr id="10" name="TextBox 9"/>
+          <p:cNvSpPr txBox="1"/>
+          <p:nvPr/>
+        </p:nvSpPr>
+        <p:spPr>
+          <a:xfrm>
+            <a:off x="6367881" y="5111496"/>
+            <a:ext cx="1655064" cy="329184"/>
+          </a:xfrm>
+          <a:prstGeom prst="rect">
+            <a:avLst/>
+          </a:prstGeom>
+          <a:noFill/>
+        </p:spPr>
+        <p:txBody>
+          <a:bodyPr wrap="square">
+            <a:spAutoFit/>
+          </a:bodyPr>
+          <a:lstStyle/>
+          <a:p>
+            <a:pPr algn="ctr"/>
+            <a:r>
+              <a:rPr sz="1200" b="1">
+                <a:solidFill>
+                  <a:srgbClr val="1D1D1F"/>
+                </a:solidFill>
+                <a:latin typeface="Calibri"/>
+              </a:rPr>
+              <a:t>Startup School</a:t>
+            </a:r>
+          </a:p>
+        </p:txBody>
+      </p:sp>
     </p:spTree>
   </p:cSld>
   <p:clrMapOvr>
@@ -11197,6 +11364,211 @@
 </file>
 
 <file path=ppt/slides/slide25.xml><?xml version="1.0" encoding="utf-8"?>
+<p:sld xmlns:a="http://schemas.openxmlformats.org/drawingml/2006/main" xmlns:p="http://schemas.openxmlformats.org/presentationml/2006/main" xmlns:r="http://schemas.openxmlformats.org/officeDocument/2006/relationships">
+  <p:cSld>
+    <p:spTree>
+      <p:nvGrpSpPr>
+        <p:cNvPr id="1" name=""/>
+        <p:cNvGrpSpPr/>
+        <p:nvPr/>
+      </p:nvGrpSpPr>
+      <p:grpSpPr/>
+      <p:sp>
+        <p:nvSpPr>
+          <p:cNvPr id="2" name="Rectangle 1"/>
+          <p:cNvSpPr/>
+          <p:nvPr/>
+        </p:nvSpPr>
+        <p:spPr>
+          <a:xfrm>
+            <a:off x="0" y="0"/>
+            <a:ext cx="12191695" cy="6858000"/>
+          </a:xfrm>
+          <a:prstGeom prst="rect">
+            <a:avLst/>
+          </a:prstGeom>
+          <a:solidFill>
+            <a:srgbClr val="070710"/>
+          </a:solidFill>
+          <a:ln>
+            <a:noFill/>
+          </a:ln>
+        </p:spPr>
+        <p:style>
+          <a:lnRef idx="1">
+            <a:schemeClr val="accent1"/>
+          </a:lnRef>
+          <a:fillRef idx="3">
+            <a:schemeClr val="accent1"/>
+          </a:fillRef>
+          <a:effectRef idx="2">
+            <a:schemeClr val="accent1"/>
+          </a:effectRef>
+          <a:fontRef idx="minor">
+            <a:schemeClr val="lt1"/>
+          </a:fontRef>
+        </p:style>
+        <p:txBody>
+          <a:bodyPr rtlCol="0" anchor="ctr"/>
+          <a:lstStyle/>
+          <a:p>
+            <a:pPr algn="ctr"/>
+          </a:p>
+        </p:txBody>
+      </p:sp>
+      <p:pic>
+        <p:nvPicPr>
+          <p:cNvPr id="3" name="Picture 2" descr="droidcon-india-partner-card.png"/>
+          <p:cNvPicPr>
+            <a:picLocks noChangeAspect="1"/>
+          </p:cNvPicPr>
+          <p:nvPr/>
+        </p:nvPicPr>
+        <p:blipFill>
+          <a:blip r:embed="rId2"/>
+          <a:stretch>
+            <a:fillRect/>
+          </a:stretch>
+        </p:blipFill>
+        <p:spPr>
+          <a:xfrm>
+            <a:off x="0" y="238839"/>
+            <a:ext cx="12191695" cy="6380320"/>
+          </a:xfrm>
+          <a:prstGeom prst="rect">
+            <a:avLst/>
+          </a:prstGeom>
+        </p:spPr>
+      </p:pic>
+    </p:spTree>
+  </p:cSld>
+  <p:clrMapOvr>
+    <a:masterClrMapping/>
+  </p:clrMapOvr>
+</p:sld>
+</file>
+
+<file path=ppt/slides/slide26.xml><?xml version="1.0" encoding="utf-8"?>
+<p:sld xmlns:a="http://schemas.openxmlformats.org/drawingml/2006/main" xmlns:p="http://schemas.openxmlformats.org/presentationml/2006/main" xmlns:r="http://schemas.openxmlformats.org/officeDocument/2006/relationships">
+  <p:cSld>
+    <p:spTree>
+      <p:nvGrpSpPr>
+        <p:cNvPr id="1" name=""/>
+        <p:cNvGrpSpPr/>
+        <p:nvPr/>
+      </p:nvGrpSpPr>
+      <p:grpSpPr/>
+      <p:sp>
+        <p:nvSpPr>
+          <p:cNvPr id="2" name="Rectangle 1"/>
+          <p:cNvSpPr/>
+          <p:nvPr/>
+        </p:nvSpPr>
+        <p:spPr>
+          <a:xfrm>
+            <a:off x="0" y="0"/>
+            <a:ext cx="12191695" cy="6858000"/>
+          </a:xfrm>
+          <a:prstGeom prst="rect">
+            <a:avLst/>
+          </a:prstGeom>
+          <a:solidFill>
+            <a:srgbClr val="F5F5F7"/>
+          </a:solidFill>
+          <a:ln>
+            <a:noFill/>
+          </a:ln>
+        </p:spPr>
+        <p:style>
+          <a:lnRef idx="1">
+            <a:schemeClr val="accent1"/>
+          </a:lnRef>
+          <a:fillRef idx="3">
+            <a:schemeClr val="accent1"/>
+          </a:fillRef>
+          <a:effectRef idx="2">
+            <a:schemeClr val="accent1"/>
+          </a:effectRef>
+          <a:fontRef idx="minor">
+            <a:schemeClr val="lt1"/>
+          </a:fontRef>
+        </p:style>
+        <p:txBody>
+          <a:bodyPr rtlCol="0" anchor="ctr"/>
+          <a:lstStyle/>
+          <a:p>
+            <a:pPr algn="ctr"/>
+          </a:p>
+        </p:txBody>
+      </p:sp>
+      <p:sp>
+        <p:nvSpPr>
+          <p:cNvPr id="3" name="TextBox 2"/>
+          <p:cNvSpPr txBox="1"/>
+          <p:nvPr/>
+        </p:nvSpPr>
+        <p:spPr>
+          <a:xfrm>
+            <a:off x="640080" y="502920"/>
+            <a:ext cx="10881360" cy="1143000"/>
+          </a:xfrm>
+          <a:prstGeom prst="rect">
+            <a:avLst/>
+          </a:prstGeom>
+          <a:noFill/>
+        </p:spPr>
+        <p:txBody>
+          <a:bodyPr wrap="square">
+            <a:spAutoFit/>
+          </a:bodyPr>
+          <a:lstStyle/>
+          <a:p>
+            <a:pPr algn="ctr"/>
+            <a:r>
+              <a:rPr sz="3000" b="1">
+                <a:solidFill>
+                  <a:srgbClr val="1D1D1F"/>
+                </a:solidFill>
+                <a:latin typeface="Calibri"/>
+              </a:rPr>
+              <a:t>KUG Chennai Volunteer Interest Form</a:t>
+            </a:r>
+          </a:p>
+        </p:txBody>
+      </p:sp>
+      <p:pic>
+        <p:nvPicPr>
+          <p:cNvPr id="4" name="Picture 3" descr="kug-volunteer-qr.png"/>
+          <p:cNvPicPr>
+            <a:picLocks noChangeAspect="1"/>
+          </p:cNvPicPr>
+          <p:nvPr/>
+        </p:nvPicPr>
+        <p:blipFill>
+          <a:blip r:embed="rId2"/>
+          <a:stretch>
+            <a:fillRect/>
+          </a:stretch>
+        </p:blipFill>
+        <p:spPr>
+          <a:xfrm>
+            <a:off x="3977639" y="1783080"/>
+            <a:ext cx="4206240" cy="4206240"/>
+          </a:xfrm>
+          <a:prstGeom prst="rect">
+            <a:avLst/>
+          </a:prstGeom>
+        </p:spPr>
+      </p:pic>
+    </p:spTree>
+  </p:cSld>
+  <p:clrMapOvr>
+    <a:masterClrMapping/>
+  </p:clrMapOvr>
+</p:sld>
+</file>
+
+<file path=ppt/slides/slide27.xml><?xml version="1.0" encoding="utf-8"?>
 <p:sld xmlns:a="http://schemas.openxmlformats.org/drawingml/2006/main" xmlns:p="http://schemas.openxmlformats.org/presentationml/2006/main" xmlns:r="http://schemas.openxmlformats.org/officeDocument/2006/relationships">
   <p:cSld>
     <p:spTree>

--- a/talks/whats-stopping-us-from-building-great-products-and-monetizing-them/whats-stopping-us-from-building-great-products-and-monetizing-them.pptx
+++ b/talks/whats-stopping-us-from-building-great-products-and-monetizing-them/whats-stopping-us-from-building-great-products-and-monetizing-them.pptx
@@ -923,7 +923,7 @@
           <a:lstStyle/>
           <a:p>
             <a:r>
-              <a:t>Tanglish: Growth team-oda velai-nu theriyum. AI era-la neenga pick up panna mudiyum. First product-ah valarunga. Use pannanavanga irukanum. Appuram ads.</a:t>
+              <a:t>Tanglish: Growth team-oda velai-nu theriyum. AI era-la neenga pick up panna mudiyum. First product-ah valarunga. Use pannanavanga irukanum. Appuram ads. Product sell panna ads. Product-ukkulley ads potta, puthiya user-ku bloatware-ah theriyum.</a:t>
             </a:r>
           </a:p>
           <a:p>
@@ -933,12 +933,17 @@
           </a:p>
           <a:p>
             <a:r>
-              <a:t>Grow the product first. Then revenue, like ads. When the topic is making money from the product, people have to be using it before ads. Do not skip the earlier payment slides. Customer checkout and ad revenue are different.</a:t>
-            </a:r>
-          </a:p>
-          <a:p>
-            <a:r>
-              <a:t>Ads: Google Ads, Meta ads, Apple Search Ads. Ads cost money.</a:t>
+              <a:t>Grow the product first. Then revenue, like ads. Run ads to sell the product. Don't put ads inside it.</a:t>
+            </a:r>
+          </a:p>
+          <a:p>
+            <a:r>
+              <a:t>When the topic is making money from the product, people have to be using it before ads. Do not skip the earlier payment slides. Customer checkout and ad revenue are different.</a:t>
+            </a:r>
+          </a:p>
+          <a:p>
+            <a:r>
+              <a:t>Google Ads, Meta ads, and Apple Search Ads are for reaching buyers. Ads inside the product feel like bloatware to someone who just arrived. Ads cost money.</a:t>
             </a:r>
           </a:p>
           <a:p>
@@ -2263,12 +2268,22 @@
           <a:lstStyle/>
           <a:p>
             <a:r>
-              <a:t>Tanglish: Crazy-nu ninaichavanga dhaan world-ah maathuvaanga.</a:t>
-            </a:r>
-          </a:p>
-          <a:p>
-            <a:r>
-              <a:t>Leave the line up. The people who are crazy enough to think they can change the world are the ones who do. Steve Jobs.</a:t>
+              <a:t>Tanglish: Crazy-nu ninaichavanga dhaan world-ah maathuvaanga. Indha prize pool innaiku. Next billion-ah next hackathon prize-nu nenaikunga.</a:t>
+            </a:r>
+          </a:p>
+          <a:p>
+            <a:r>
+              <a:t>Leave the poster up. It already prints today's prize pool. ₹12,000 is today's prize pool, as printed. Do not retype that number as a second headline. Do not split it, name winners, or promise the billion.</a:t>
+            </a:r>
+          </a:p>
+          <a:p>
+            <a:r>
+              <a:t>Keep the Steve Jobs line: The people who are crazy enough to think they can change the world are the ones who do.</a:t>
+            </a:r>
+          </a:p>
+          <a:p>
+            <a:r>
+              <a:t>The billion line is the push to keep shipping: Today's prize pool is this. Nothing else is stopping you from a $1 billion company very soon. Think of the next $1 billion as your next hackathon-winning prize.</a:t>
             </a:r>
           </a:p>
           <a:p>
@@ -7753,8 +7768,8 @@
         </p:nvSpPr>
         <p:spPr>
           <a:xfrm>
-            <a:off x="640080" y="2697480"/>
-            <a:ext cx="10881360" cy="502920"/>
+            <a:off x="640080" y="2487168"/>
+            <a:ext cx="10881360" cy="411480"/>
           </a:xfrm>
           <a:prstGeom prst="rect">
             <a:avLst/>
@@ -7769,7 +7784,7 @@
           <a:p>
             <a:pPr algn="ctr"/>
             <a:r>
-              <a:rPr sz="2000" b="1">
+              <a:rPr sz="1800" b="1">
                 <a:solidFill>
                   <a:srgbClr val="1D1D1F"/>
                 </a:solidFill>
@@ -7782,14 +7797,49 @@
       </p:sp>
       <p:sp>
         <p:nvSpPr>
-          <p:cNvPr id="6" name="Rounded Rectangle 5"/>
+          <p:cNvPr id="6" name="TextBox 5"/>
+          <p:cNvSpPr txBox="1"/>
+          <p:nvPr/>
+        </p:nvSpPr>
+        <p:spPr>
+          <a:xfrm>
+            <a:off x="640080" y="2907792"/>
+            <a:ext cx="10881360" cy="411480"/>
+          </a:xfrm>
+          <a:prstGeom prst="rect">
+            <a:avLst/>
+          </a:prstGeom>
+          <a:noFill/>
+        </p:spPr>
+        <p:txBody>
+          <a:bodyPr wrap="square">
+            <a:spAutoFit/>
+          </a:bodyPr>
+          <a:lstStyle/>
+          <a:p>
+            <a:pPr algn="ctr"/>
+            <a:r>
+              <a:rPr sz="1800" b="1">
+                <a:solidFill>
+                  <a:srgbClr val="1D1D1F"/>
+                </a:solidFill>
+                <a:latin typeface="Calibri"/>
+              </a:rPr>
+              <a:t>Run ads to sell the product. Don't put ads inside it.</a:t>
+            </a:r>
+          </a:p>
+        </p:txBody>
+      </p:sp>
+      <p:sp>
+        <p:nvSpPr>
+          <p:cNvPr id="7" name="Rounded Rectangle 6"/>
           <p:cNvSpPr/>
           <p:nvPr/>
         </p:nvSpPr>
         <p:spPr>
           <a:xfrm>
-            <a:off x="1025499" y="3383280"/>
-            <a:ext cx="3246120" cy="2011680"/>
+            <a:off x="1025499" y="3474720"/>
+            <a:ext cx="3246120" cy="1874519"/>
           </a:xfrm>
           <a:prstGeom prst="roundRect">
             <a:avLst/>
@@ -7825,13 +7875,13 @@
       </p:sp>
       <p:sp>
         <p:nvSpPr>
-          <p:cNvPr id="7" name="TextBox 6"/>
+          <p:cNvPr id="8" name="TextBox 7"/>
           <p:cNvSpPr txBox="1"/>
           <p:nvPr/>
         </p:nvSpPr>
         <p:spPr>
           <a:xfrm>
-            <a:off x="1162659" y="3639312"/>
+            <a:off x="1162659" y="3730752"/>
             <a:ext cx="2971800" cy="411480"/>
           </a:xfrm>
           <a:prstGeom prst="rect">
@@ -7860,13 +7910,13 @@
       </p:sp>
       <p:sp>
         <p:nvSpPr>
-          <p:cNvPr id="8" name="TextBox 7"/>
+          <p:cNvPr id="9" name="TextBox 8"/>
           <p:cNvSpPr txBox="1"/>
           <p:nvPr/>
         </p:nvSpPr>
         <p:spPr>
           <a:xfrm>
-            <a:off x="1190091" y="4160520"/>
+            <a:off x="1190091" y="4251959"/>
             <a:ext cx="2916936" cy="1143000"/>
           </a:xfrm>
           <a:prstGeom prst="rect">
@@ -7895,14 +7945,14 @@
       </p:sp>
       <p:sp>
         <p:nvSpPr>
-          <p:cNvPr id="9" name="Rounded Rectangle 8"/>
+          <p:cNvPr id="10" name="Rounded Rectangle 9"/>
           <p:cNvSpPr/>
           <p:nvPr/>
         </p:nvSpPr>
         <p:spPr>
           <a:xfrm>
-            <a:off x="4472787" y="3383280"/>
-            <a:ext cx="3246120" cy="2011680"/>
+            <a:off x="4472787" y="3474720"/>
+            <a:ext cx="3246120" cy="1874519"/>
           </a:xfrm>
           <a:prstGeom prst="roundRect">
             <a:avLst/>
@@ -7938,13 +7988,13 @@
       </p:sp>
       <p:sp>
         <p:nvSpPr>
-          <p:cNvPr id="10" name="TextBox 9"/>
+          <p:cNvPr id="11" name="TextBox 10"/>
           <p:cNvSpPr txBox="1"/>
           <p:nvPr/>
         </p:nvSpPr>
         <p:spPr>
           <a:xfrm>
-            <a:off x="4609947" y="3639312"/>
+            <a:off x="4609947" y="3730752"/>
             <a:ext cx="2971800" cy="411480"/>
           </a:xfrm>
           <a:prstGeom prst="rect">
@@ -7973,13 +8023,13 @@
       </p:sp>
       <p:sp>
         <p:nvSpPr>
-          <p:cNvPr id="11" name="TextBox 10"/>
+          <p:cNvPr id="12" name="TextBox 11"/>
           <p:cNvSpPr txBox="1"/>
           <p:nvPr/>
         </p:nvSpPr>
         <p:spPr>
           <a:xfrm>
-            <a:off x="4637379" y="4160520"/>
+            <a:off x="4637379" y="4251959"/>
             <a:ext cx="2916936" cy="1143000"/>
           </a:xfrm>
           <a:prstGeom prst="rect">
@@ -8008,14 +8058,14 @@
       </p:sp>
       <p:sp>
         <p:nvSpPr>
-          <p:cNvPr id="12" name="Rounded Rectangle 11"/>
+          <p:cNvPr id="13" name="Rounded Rectangle 12"/>
           <p:cNvSpPr/>
           <p:nvPr/>
         </p:nvSpPr>
         <p:spPr>
           <a:xfrm>
-            <a:off x="7920075" y="3383280"/>
-            <a:ext cx="3246120" cy="2011680"/>
+            <a:off x="7920075" y="3474720"/>
+            <a:ext cx="3246120" cy="1874519"/>
           </a:xfrm>
           <a:prstGeom prst="roundRect">
             <a:avLst/>
@@ -8051,13 +8101,13 @@
       </p:sp>
       <p:sp>
         <p:nvSpPr>
-          <p:cNvPr id="13" name="TextBox 12"/>
+          <p:cNvPr id="14" name="TextBox 13"/>
           <p:cNvSpPr txBox="1"/>
           <p:nvPr/>
         </p:nvSpPr>
         <p:spPr>
           <a:xfrm>
-            <a:off x="8057235" y="3639312"/>
+            <a:off x="8057235" y="3730752"/>
             <a:ext cx="2971800" cy="411480"/>
           </a:xfrm>
           <a:prstGeom prst="rect">
@@ -8086,13 +8136,13 @@
       </p:sp>
       <p:sp>
         <p:nvSpPr>
-          <p:cNvPr id="14" name="TextBox 13"/>
+          <p:cNvPr id="15" name="TextBox 14"/>
           <p:cNvSpPr txBox="1"/>
           <p:nvPr/>
         </p:nvSpPr>
         <p:spPr>
           <a:xfrm>
-            <a:off x="8084667" y="4160520"/>
+            <a:off x="8084667" y="4251959"/>
             <a:ext cx="2916936" cy="1143000"/>
           </a:xfrm>
           <a:prstGeom prst="rect">
@@ -11621,16 +11671,40 @@
           </a:p>
         </p:txBody>
       </p:sp>
-      <p:sp>
-        <p:nvSpPr>
-          <p:cNvPr id="3" name="TextBox 2"/>
+      <p:pic>
+        <p:nvPicPr>
+          <p:cNvPr id="3" name="Picture 2" descr="shipaton-prize-pool.png"/>
+          <p:cNvPicPr>
+            <a:picLocks noChangeAspect="1"/>
+          </p:cNvPicPr>
+          <p:nvPr/>
+        </p:nvPicPr>
+        <p:blipFill>
+          <a:blip r:embed="rId2"/>
+          <a:stretch>
+            <a:fillRect/>
+          </a:stretch>
+        </p:blipFill>
+        <p:spPr>
+          <a:xfrm>
+            <a:off x="320040" y="411480"/>
+            <a:ext cx="6035040" cy="6035040"/>
+          </a:xfrm>
+          <a:prstGeom prst="rect">
+            <a:avLst/>
+          </a:prstGeom>
+        </p:spPr>
+      </p:pic>
+      <p:sp>
+        <p:nvSpPr>
+          <p:cNvPr id="4" name="TextBox 3"/>
           <p:cNvSpPr txBox="1"/>
           <p:nvPr/>
         </p:nvSpPr>
         <p:spPr>
           <a:xfrm>
-            <a:off x="1097280" y="1874519"/>
-            <a:ext cx="9966960" cy="2377440"/>
+            <a:off x="6537960" y="1051560"/>
+            <a:ext cx="5212080" cy="2148840"/>
           </a:xfrm>
           <a:prstGeom prst="rect">
             <a:avLst/>
@@ -11643,9 +11717,9 @@
           </a:bodyPr>
           <a:lstStyle/>
           <a:p>
-            <a:pPr algn="ctr"/>
-            <a:r>
-              <a:rPr sz="2800" b="1">
+            <a:pPr algn="l"/>
+            <a:r>
+              <a:rPr sz="2200" b="1">
                 <a:solidFill>
                   <a:srgbClr val="F5F5F7"/>
                 </a:solidFill>
@@ -11658,14 +11732,14 @@
       </p:sp>
       <p:sp>
         <p:nvSpPr>
-          <p:cNvPr id="4" name="TextBox 3"/>
+          <p:cNvPr id="5" name="TextBox 4"/>
           <p:cNvSpPr txBox="1"/>
           <p:nvPr/>
         </p:nvSpPr>
         <p:spPr>
           <a:xfrm>
-            <a:off x="1097280" y="4434840"/>
-            <a:ext cx="9966960" cy="411480"/>
+            <a:off x="6537960" y="3246120"/>
+            <a:ext cx="5212080" cy="365760"/>
           </a:xfrm>
           <a:prstGeom prst="rect">
             <a:avLst/>
@@ -11678,7 +11752,7 @@
           </a:bodyPr>
           <a:lstStyle/>
           <a:p>
-            <a:pPr algn="ctr"/>
+            <a:pPr algn="l"/>
             <a:r>
               <a:rPr sz="1400" b="1">
                 <a:solidFill>
@@ -11687,6 +11761,41 @@
                 <a:latin typeface="Calibri"/>
               </a:rPr>
               <a:t>Steve Jobs</a:t>
+            </a:r>
+          </a:p>
+        </p:txBody>
+      </p:sp>
+      <p:sp>
+        <p:nvSpPr>
+          <p:cNvPr id="6" name="TextBox 5"/>
+          <p:cNvSpPr txBox="1"/>
+          <p:nvPr/>
+        </p:nvSpPr>
+        <p:spPr>
+          <a:xfrm>
+            <a:off x="6537960" y="3794760"/>
+            <a:ext cx="5212080" cy="2103120"/>
+          </a:xfrm>
+          <a:prstGeom prst="rect">
+            <a:avLst/>
+          </a:prstGeom>
+          <a:noFill/>
+        </p:spPr>
+        <p:txBody>
+          <a:bodyPr wrap="square">
+            <a:spAutoFit/>
+          </a:bodyPr>
+          <a:lstStyle/>
+          <a:p>
+            <a:pPr algn="l"/>
+            <a:r>
+              <a:rPr sz="1600" b="1">
+                <a:solidFill>
+                  <a:srgbClr val="F5F5F7"/>
+                </a:solidFill>
+                <a:latin typeface="Calibri"/>
+              </a:rPr>
+              <a:t>Today's prize pool is this. Nothing else is stopping you from a $1 billion company very soon. Think of the next $1 billion as your next hackathon-winning prize.</a:t>
             </a:r>
           </a:p>
         </p:txBody>
